--- a/docs/partners/SpotU_Presentacion.pptx
+++ b/docs/partners/SpotU_Presentacion.pptx
@@ -4,6 +4,9 @@
   <p:sldMasterIdLst>
     <p:sldMasterId id="2147483648" r:id="rId1"/>
   </p:sldMasterIdLst>
+  <p:notesMasterIdLst>
+    <p:notesMasterId r:id="rId16"/>
+  </p:notesMasterIdLst>
   <p:sldIdLst>
     <p:sldId id="256" r:id="rId2"/>
     <p:sldId id="257" r:id="rId3"/>
@@ -20,10 +23,7 @@
     <p:sldId id="268" r:id="rId14"/>
     <p:sldId id="269" r:id="rId15"/>
   </p:sldIdLst>
-  <p:notesMasterIdLst>
-    <p:notesMasterId r:id="rId16"/>
-  </p:notesMasterIdLst>
-  <p:sldSz cx="9144000" cy="5143500"/>
+  <p:sldSz cx="9144000" cy="5143500" type="screen16x9"/>
   <p:notesSz cx="5143500" cy="9144000"/>
   <p:defaultTextStyle>
     <a:lvl1pPr marL="0" algn="l" defTabSz="914400" rtl="0" eaLnBrk="1" latinLnBrk="0" hangingPunct="1">
@@ -117,6 +117,11 @@
       </a:defRPr>
     </a:lvl9pPr>
   </p:defaultTextStyle>
+  <p:extLst>
+    <p:ext uri="{EFAFB233-063F-42B5-8137-9DF3F51BA10A}">
+      <p15:sldGuideLst xmlns:p15="http://schemas.microsoft.com/office/powerpoint/2012/main"/>
+    </p:ext>
+  </p:extLst>
 </p:presentation>
 </file>
 
@@ -142,234 +147,10 @@
           <a:chExt cx="0" cy="0"/>
         </a:xfrm>
       </p:grpSpPr>
-      <p:sp>
-        <p:nvSpPr>
-          <p:cNvPr id="2" name="Header Placeholder 1"/>
-          <p:cNvSpPr>
-            <a:spLocks noGrp="1"/>
-          </p:cNvSpPr>
-          <p:nvPr>
-            <p:ph type="hdr" sz="quarter"/>
-          </p:nvPr>
-        </p:nvSpPr>
-        <p:spPr>
-          <a:xfrm>
-            <a:off x="0" y="0"/>
-            <a:ext cx="2971800" cy="458788"/>
-          </a:xfrm>
-          <a:prstGeom prst="rect">
-            <a:avLst/>
-          </a:prstGeom>
-        </p:spPr>
-        <p:txBody>
-          <a:bodyPr vert="horz" lIns="91440" tIns="45720" rIns="91440" bIns="45720" rtlCol="0"/>
-          <a:lstStyle>
-            <a:lvl1pPr algn="l">
-              <a:defRPr sz="1200"/>
-            </a:lvl1pPr>
-          </a:lstStyle>
-          <a:p>
-            <a:endParaRPr lang="en-US"/>
-          </a:p>
-        </p:txBody>
-      </p:sp>
-      <p:sp>
-        <p:nvSpPr>
-          <p:cNvPr id="3" name="Date Placeholder 2"/>
-          <p:cNvSpPr>
-            <a:spLocks noGrp="1"/>
-          </p:cNvSpPr>
-          <p:nvPr>
-            <p:ph type="dt" idx="1"/>
-          </p:nvPr>
-        </p:nvSpPr>
-        <p:spPr>
-          <a:xfrm>
-            <a:off x="3884613" y="0"/>
-            <a:ext cx="2971800" cy="458788"/>
-          </a:xfrm>
-          <a:prstGeom prst="rect">
-            <a:avLst/>
-          </a:prstGeom>
-        </p:spPr>
-        <p:txBody>
-          <a:bodyPr vert="horz" lIns="91440" tIns="45720" rIns="91440" bIns="45720" rtlCol="0"/>
-          <a:lstStyle>
-            <a:lvl1pPr algn="r">
-              <a:defRPr sz="1200"/>
-            </a:lvl1pPr>
-          </a:lstStyle>
-          <a:p>
-            <a:fld id="{5282F153-3F37-0F45-9E97-73ACFA13230C}" type="datetimeFigureOut">
-              <a:rPr lang="en-US"/>
-              <a:t>7/23/19</a:t>
-            </a:fld>
-            <a:endParaRPr lang="en-US"/>
-          </a:p>
-        </p:txBody>
-      </p:sp>
-      <p:sp>
-        <p:nvSpPr>
-          <p:cNvPr id="4" name="Slide Image Placeholder 3"/>
-          <p:cNvSpPr>
-            <a:spLocks noGrp="1" noRot="1" noChangeAspect="1"/>
-          </p:cNvSpPr>
-          <p:nvPr>
-            <p:ph type="sldImg" idx="2"/>
-          </p:nvPr>
-        </p:nvSpPr>
-        <p:spPr>
-          <a:xfrm>
-            <a:off x="685800" y="1143000"/>
-            <a:ext cx="5486400" cy="3086100"/>
-          </a:xfrm>
-          <a:prstGeom prst="rect">
-            <a:avLst/>
-          </a:prstGeom>
-          <a:noFill/>
-          <a:ln w="12700">
-            <a:solidFill>
-              <a:prstClr val="black"/>
-            </a:solidFill>
-          </a:ln>
-        </p:spPr>
-        <p:txBody>
-          <a:bodyPr vert="horz" lIns="91440" tIns="45720" rIns="91440" bIns="45720" rtlCol="0" anchor="ctr"/>
-          <a:lstStyle/>
-          <a:p>
-            <a:endParaRPr lang="en-US"/>
-          </a:p>
-        </p:txBody>
-      </p:sp>
-      <p:sp>
-        <p:nvSpPr>
-          <p:cNvPr id="5" name="Notes Placeholder 4"/>
-          <p:cNvSpPr>
-            <a:spLocks noGrp="1"/>
-          </p:cNvSpPr>
-          <p:nvPr>
-            <p:ph type="body" sz="quarter" idx="3"/>
-          </p:nvPr>
-        </p:nvSpPr>
-        <p:spPr>
-          <a:xfrm>
-            <a:off x="685800" y="4400550"/>
-            <a:ext cx="5486400" cy="3600450"/>
-          </a:xfrm>
-          <a:prstGeom prst="rect">
-            <a:avLst/>
-          </a:prstGeom>
-        </p:spPr>
-        <p:txBody>
-          <a:bodyPr vert="horz" lIns="91440" tIns="45720" rIns="91440" bIns="45720" rtlCol="0"/>
-          <a:lstStyle/>
-          <a:p>
-            <a:pPr lvl="0"/>
-            <a:r>
-              <a:rPr lang="en-US"/>
-              <a:t>Click to edit Master text styles</a:t>
-            </a:r>
-          </a:p>
-          <a:p>
-            <a:pPr lvl="1"/>
-            <a:r>
-              <a:rPr lang="en-US"/>
-              <a:t>Second level</a:t>
-            </a:r>
-          </a:p>
-          <a:p>
-            <a:pPr lvl="2"/>
-            <a:r>
-              <a:rPr lang="en-US"/>
-              <a:t>Third level</a:t>
-            </a:r>
-          </a:p>
-          <a:p>
-            <a:pPr lvl="3"/>
-            <a:r>
-              <a:rPr lang="en-US"/>
-              <a:t>Fourth level</a:t>
-            </a:r>
-          </a:p>
-          <a:p>
-            <a:pPr lvl="4"/>
-            <a:r>
-              <a:rPr lang="en-US"/>
-              <a:t>Fifth level</a:t>
-            </a:r>
-          </a:p>
-        </p:txBody>
-      </p:sp>
-      <p:sp>
-        <p:nvSpPr>
-          <p:cNvPr id="6" name="Footer Placeholder 5"/>
-          <p:cNvSpPr>
-            <a:spLocks noGrp="1"/>
-          </p:cNvSpPr>
-          <p:nvPr>
-            <p:ph type="ftr" sz="quarter" idx="4"/>
-          </p:nvPr>
-        </p:nvSpPr>
-        <p:spPr>
-          <a:xfrm>
-            <a:off x="0" y="8685213"/>
-            <a:ext cx="2971800" cy="458787"/>
-          </a:xfrm>
-          <a:prstGeom prst="rect">
-            <a:avLst/>
-          </a:prstGeom>
-        </p:spPr>
-        <p:txBody>
-          <a:bodyPr vert="horz" lIns="91440" tIns="45720" rIns="91440" bIns="45720" rtlCol="0" anchor="b"/>
-          <a:lstStyle>
-            <a:lvl1pPr algn="l">
-              <a:defRPr sz="1200"/>
-            </a:lvl1pPr>
-          </a:lstStyle>
-          <a:p>
-            <a:endParaRPr lang="en-US"/>
-          </a:p>
-        </p:txBody>
-      </p:sp>
-      <p:sp>
-        <p:nvSpPr>
-          <p:cNvPr id="7" name="Slide Number Placeholder 6"/>
-          <p:cNvSpPr>
-            <a:spLocks noGrp="1"/>
-          </p:cNvSpPr>
-          <p:nvPr>
-            <p:ph type="sldNum" sz="quarter" idx="5"/>
-          </p:nvPr>
-        </p:nvSpPr>
-        <p:spPr>
-          <a:xfrm>
-            <a:off x="3884613" y="8685213"/>
-            <a:ext cx="2971800" cy="458787"/>
-          </a:xfrm>
-          <a:prstGeom prst="rect">
-            <a:avLst/>
-          </a:prstGeom>
-        </p:spPr>
-        <p:txBody>
-          <a:bodyPr vert="horz" lIns="91440" tIns="45720" rIns="91440" bIns="45720" rtlCol="0" anchor="b"/>
-          <a:lstStyle>
-            <a:lvl1pPr algn="r">
-              <a:defRPr sz="1200"/>
-            </a:lvl1pPr>
-          </a:lstStyle>
-          <a:p>
-            <a:fld id="{CE5E9CC1-C706-0F49-92D6-E571CC5EEA8F}" type="slidenum">
-              <a:rPr lang="en-US"/>
-              <a:t>‹#›</a:t>
-            </a:fld>
-            <a:endParaRPr lang="en-US"/>
-          </a:p>
-        </p:txBody>
-      </p:sp>
     </p:spTree>
     <p:extLst>
       <p:ext uri="{BB962C8B-B14F-4D97-AF65-F5344CB8AC3E}">
-        <p14:creationId xmlns:p14="http://schemas.microsoft.com/office/powerpoint/2010/main" val="1024086991"/>
+        <p14:creationId xmlns:p14="http://schemas.microsoft.com/office/powerpoint/2010/main" val="3296491608"/>
       </p:ext>
     </p:extLst>
   </p:cSld>
@@ -513,10 +294,6 @@
           <a:bodyPr/>
           <a:lstStyle/>
           <a:p>
-            <a:r>
-              <a:rPr lang="en-US" dirty="0"/>
-              <a:t/>
-            </a:r>
             <a:endParaRPr lang="en-US" dirty="0"/>
           </a:p>
         </p:txBody>
@@ -601,10 +378,6 @@
           <a:bodyPr/>
           <a:lstStyle/>
           <a:p>
-            <a:r>
-              <a:rPr lang="en-US" dirty="0"/>
-              <a:t/>
-            </a:r>
             <a:endParaRPr lang="en-US" dirty="0"/>
           </a:p>
         </p:txBody>
@@ -689,10 +462,6 @@
           <a:bodyPr/>
           <a:lstStyle/>
           <a:p>
-            <a:r>
-              <a:rPr lang="en-US" dirty="0"/>
-              <a:t/>
-            </a:r>
             <a:endParaRPr lang="en-US" dirty="0"/>
           </a:p>
         </p:txBody>
@@ -777,10 +546,6 @@
           <a:bodyPr/>
           <a:lstStyle/>
           <a:p>
-            <a:r>
-              <a:rPr lang="en-US" dirty="0"/>
-              <a:t/>
-            </a:r>
             <a:endParaRPr lang="en-US" dirty="0"/>
           </a:p>
         </p:txBody>
@@ -865,10 +630,6 @@
           <a:bodyPr/>
           <a:lstStyle/>
           <a:p>
-            <a:r>
-              <a:rPr lang="en-US" dirty="0"/>
-              <a:t/>
-            </a:r>
             <a:endParaRPr lang="en-US" dirty="0"/>
           </a:p>
         </p:txBody>
@@ -953,10 +714,6 @@
           <a:bodyPr/>
           <a:lstStyle/>
           <a:p>
-            <a:r>
-              <a:rPr lang="en-US" dirty="0"/>
-              <a:t/>
-            </a:r>
             <a:endParaRPr lang="en-US" dirty="0"/>
           </a:p>
         </p:txBody>
@@ -1041,10 +798,6 @@
           <a:bodyPr/>
           <a:lstStyle/>
           <a:p>
-            <a:r>
-              <a:rPr lang="en-US" dirty="0"/>
-              <a:t/>
-            </a:r>
             <a:endParaRPr lang="en-US" dirty="0"/>
           </a:p>
         </p:txBody>
@@ -1129,10 +882,6 @@
           <a:bodyPr/>
           <a:lstStyle/>
           <a:p>
-            <a:r>
-              <a:rPr lang="en-US" dirty="0"/>
-              <a:t/>
-            </a:r>
             <a:endParaRPr lang="en-US" dirty="0"/>
           </a:p>
         </p:txBody>
@@ -1217,10 +966,6 @@
           <a:bodyPr/>
           <a:lstStyle/>
           <a:p>
-            <a:r>
-              <a:rPr lang="en-US" dirty="0"/>
-              <a:t/>
-            </a:r>
             <a:endParaRPr lang="en-US" dirty="0"/>
           </a:p>
         </p:txBody>
@@ -1305,10 +1050,6 @@
           <a:bodyPr/>
           <a:lstStyle/>
           <a:p>
-            <a:r>
-              <a:rPr lang="en-US" dirty="0"/>
-              <a:t/>
-            </a:r>
             <a:endParaRPr lang="en-US" dirty="0"/>
           </a:p>
         </p:txBody>
@@ -1393,10 +1134,6 @@
           <a:bodyPr/>
           <a:lstStyle/>
           <a:p>
-            <a:r>
-              <a:rPr lang="en-US" dirty="0"/>
-              <a:t/>
-            </a:r>
             <a:endParaRPr lang="en-US" dirty="0"/>
           </a:p>
         </p:txBody>
@@ -1481,10 +1218,6 @@
           <a:bodyPr/>
           <a:lstStyle/>
           <a:p>
-            <a:r>
-              <a:rPr lang="en-US" dirty="0"/>
-              <a:t/>
-            </a:r>
             <a:endParaRPr lang="en-US" dirty="0"/>
           </a:p>
         </p:txBody>
@@ -1569,10 +1302,6 @@
           <a:bodyPr/>
           <a:lstStyle/>
           <a:p>
-            <a:r>
-              <a:rPr lang="en-US" dirty="0"/>
-              <a:t/>
-            </a:r>
             <a:endParaRPr lang="en-US" dirty="0"/>
           </a:p>
         </p:txBody>
@@ -1657,10 +1386,6 @@
           <a:bodyPr/>
           <a:lstStyle/>
           <a:p>
-            <a:r>
-              <a:rPr lang="en-US" dirty="0"/>
-              <a:t/>
-            </a:r>
             <a:endParaRPr lang="en-US" dirty="0"/>
           </a:p>
         </p:txBody>
@@ -1734,6 +1459,11 @@
 <file path=ppt/slideMasters/slideMaster1.xml><?xml version="1.0" encoding="utf-8"?>
 <p:sldMaster xmlns:a="http://schemas.openxmlformats.org/drawingml/2006/main" xmlns:r="http://schemas.openxmlformats.org/officeDocument/2006/relationships" xmlns:p="http://schemas.openxmlformats.org/presentationml/2006/main">
   <p:cSld>
+    <p:bg>
+      <p:bgRef idx="1001">
+        <a:schemeClr val="bg1"/>
+      </p:bgRef>
+    </p:bg>
     <p:spTree>
       <p:nvGrpSpPr>
         <p:cNvPr id="1" name=""/>
@@ -2016,6 +1746,7 @@
         <a:solidFill>
           <a:srgbClr val="4F46E5"/>
         </a:solidFill>
+        <a:effectLst/>
       </p:bgPr>
     </p:bg>
     <p:spTree>
@@ -2056,6 +1787,13 @@
             <a:prstDash val="solid"/>
           </a:ln>
         </p:spPr>
+        <p:txBody>
+          <a:bodyPr/>
+          <a:lstStyle/>
+          <a:p>
+            <a:endParaRPr lang="es-CO"/>
+          </a:p>
+        </p:txBody>
       </p:sp>
       <p:sp>
         <p:nvSpPr>
@@ -2081,6 +1819,13 @@
             <a:prstDash val="solid"/>
           </a:ln>
         </p:spPr>
+        <p:txBody>
+          <a:bodyPr/>
+          <a:lstStyle/>
+          <a:p>
+            <a:endParaRPr lang="es-CO"/>
+          </a:p>
+        </p:txBody>
       </p:sp>
       <p:sp>
         <p:nvSpPr>
@@ -2106,30 +1851,14 @@
             <a:prstDash val="solid"/>
           </a:ln>
         </p:spPr>
-      </p:sp>
-      <p:pic>
-        <p:nvPicPr>
-          <p:cNvPr id="5" name="Image 0" descr="C:\Users\cesar\OneDrive\Escritorio\FREELANCE\SpotU\docs\assets\logo-dark-bg.png">    </p:cNvPr>
-          <p:cNvPicPr>
-            <a:picLocks noChangeAspect="1"/>
-          </p:cNvPicPr>
-          <p:nvPr/>
-        </p:nvPicPr>
-        <p:blipFill>
-          <a:blip r:embed="rId1"/>
-          <a:srcRect l="0" r="0" t="0" b="0"/>
-          <a:stretch/>
-        </p:blipFill>
-        <p:spPr>
-          <a:xfrm>
-            <a:off x="2743200" y="960120"/>
-            <a:ext cx="3657600" cy="1188720"/>
-          </a:xfrm>
-          <a:prstGeom prst="rect">
-            <a:avLst/>
-          </a:prstGeom>
-        </p:spPr>
-      </p:pic>
+        <p:txBody>
+          <a:bodyPr/>
+          <a:lstStyle/>
+          <a:p>
+            <a:endParaRPr lang="es-CO"/>
+          </a:p>
+        </p:txBody>
+      </p:sp>
       <p:sp>
         <p:nvSpPr>
           <p:cNvPr id="6" name="Text 3"/>
@@ -2151,7 +1880,7 @@
           <a:bodyPr wrap="square" rtlCol="0" anchor="ctr"/>
           <a:lstStyle/>
           <a:p>
-            <a:pPr algn="ctr" indent="0" marL="0">
+            <a:pPr marL="0" indent="0" algn="ctr">
               <a:buNone/>
             </a:pPr>
             <a:r>
@@ -2193,6 +1922,13 @@
             <a:prstDash val="solid"/>
           </a:ln>
         </p:spPr>
+        <p:txBody>
+          <a:bodyPr/>
+          <a:lstStyle/>
+          <a:p>
+            <a:endParaRPr lang="es-CO"/>
+          </a:p>
+        </p:txBody>
       </p:sp>
       <p:sp>
         <p:nvSpPr>
@@ -2215,7 +1951,7 @@
           <a:bodyPr wrap="square" rtlCol="0" anchor="ctr"/>
           <a:lstStyle/>
           <a:p>
-            <a:pPr algn="ctr" indent="0" marL="0">
+            <a:pPr marL="0" indent="0" algn="ctr">
               <a:buNone/>
             </a:pPr>
             <a:r>
@@ -2227,7 +1963,45 @@
                 <a:ea typeface="Calibri" pitchFamily="34" charset="-122"/>
                 <a:cs typeface="Calibri" pitchFamily="34" charset="-120"/>
               </a:rPr>
-              <a:t>Marketplace SMB que conecta anunciantes, espacios publicitarios y agencias de marketing</a:t>
+              <a:t>Marketplace SMB que conecta anunciantes, espacios </a:t>
+            </a:r>
+            <a:r>
+              <a:rPr lang="en-US" sz="1500" dirty="0" err="1">
+                <a:solidFill>
+                  <a:srgbClr val="A5B4FC"/>
+                </a:solidFill>
+                <a:latin typeface="Calibri" pitchFamily="34" charset="0"/>
+                <a:ea typeface="Calibri" pitchFamily="34" charset="-122"/>
+                <a:cs typeface="Calibri" pitchFamily="34" charset="-120"/>
+              </a:rPr>
+              <a:t>publicitarios</a:t>
+            </a:r>
+            <a:r>
+              <a:rPr lang="en-US" sz="1500" dirty="0">
+                <a:solidFill>
+                  <a:srgbClr val="A5B4FC"/>
+                </a:solidFill>
+                <a:latin typeface="Calibri" pitchFamily="34" charset="0"/>
+                <a:ea typeface="Calibri" pitchFamily="34" charset="-122"/>
+                <a:cs typeface="Calibri" pitchFamily="34" charset="-120"/>
+              </a:rPr>
+              <a:t> </a:t>
+            </a:r>
+          </a:p>
+          <a:p>
+            <a:pPr marL="0" indent="0" algn="ctr">
+              <a:buNone/>
+            </a:pPr>
+            <a:r>
+              <a:rPr lang="en-US" sz="1500" dirty="0">
+                <a:solidFill>
+                  <a:srgbClr val="A5B4FC"/>
+                </a:solidFill>
+                <a:latin typeface="Calibri" pitchFamily="34" charset="0"/>
+                <a:ea typeface="Calibri" pitchFamily="34" charset="-122"/>
+                <a:cs typeface="Calibri" pitchFamily="34" charset="-120"/>
+              </a:rPr>
+              <a:t>y agencias de marketing</a:t>
             </a:r>
             <a:endParaRPr lang="en-US" sz="1500" dirty="0"/>
           </a:p>
@@ -2254,7 +2028,7 @@
           <a:bodyPr wrap="square" rtlCol="0" anchor="ctr"/>
           <a:lstStyle/>
           <a:p>
-            <a:pPr algn="ctr" indent="0" marL="0">
+            <a:pPr marL="0" indent="0" algn="ctr">
               <a:buNone/>
             </a:pPr>
             <a:r>
@@ -2272,6 +2046,36 @@
           </a:p>
         </p:txBody>
       </p:sp>
+      <p:pic>
+        <p:nvPicPr>
+          <p:cNvPr id="11" name="Imagen 10">
+            <a:extLst>
+              <a:ext uri="{FF2B5EF4-FFF2-40B4-BE49-F238E27FC236}">
+                <a16:creationId xmlns:a16="http://schemas.microsoft.com/office/drawing/2014/main" id="{6B72E945-820D-1D07-1362-6005BDD250E8}"/>
+              </a:ext>
+            </a:extLst>
+          </p:cNvPr>
+          <p:cNvPicPr>
+            <a:picLocks noChangeAspect="1"/>
+          </p:cNvPicPr>
+          <p:nvPr/>
+        </p:nvPicPr>
+        <p:blipFill>
+          <a:blip r:embed="rId3"/>
+          <a:stretch>
+            <a:fillRect/>
+          </a:stretch>
+        </p:blipFill>
+        <p:spPr>
+          <a:xfrm>
+            <a:off x="2420050" y="678675"/>
+            <a:ext cx="4303899" cy="2347989"/>
+          </a:xfrm>
+          <a:prstGeom prst="rect">
+            <a:avLst/>
+          </a:prstGeom>
+        </p:spPr>
+      </p:pic>
     </p:spTree>
   </p:cSld>
   <p:clrMapOvr>
@@ -2288,6 +2092,7 @@
         <a:solidFill>
           <a:srgbClr val="4F46E5"/>
         </a:solidFill>
+        <a:effectLst/>
       </p:bgPr>
     </p:bg>
     <p:spTree>
@@ -2325,11 +2130,11 @@
           <a:bodyPr wrap="square" rtlCol="0" anchor="ctr"/>
           <a:lstStyle/>
           <a:p>
-            <a:pPr indent="0" marL="0">
-              <a:buNone/>
-            </a:pPr>
-            <a:r>
-              <a:rPr lang="en-US" sz="1200" b="1" spc="100" kern="0" dirty="0">
+            <a:pPr marL="0" indent="0">
+              <a:buNone/>
+            </a:pPr>
+            <a:r>
+              <a:rPr lang="en-US" sz="1200" b="1" kern="0" spc="100" dirty="0">
                 <a:solidFill>
                   <a:srgbClr val="A5B4FC"/>
                 </a:solidFill>
@@ -2364,7 +2169,7 @@
           <a:bodyPr wrap="square" rtlCol="0" anchor="ctr"/>
           <a:lstStyle/>
           <a:p>
-            <a:pPr indent="0" marL="0">
+            <a:pPr marL="0" indent="0">
               <a:buNone/>
             </a:pPr>
             <a:r>
@@ -2408,6 +2213,13 @@
             <a:prstDash val="solid"/>
           </a:ln>
         </p:spPr>
+        <p:txBody>
+          <a:bodyPr/>
+          <a:lstStyle/>
+          <a:p>
+            <a:endParaRPr lang="es-CO"/>
+          </a:p>
+        </p:txBody>
       </p:sp>
       <p:sp>
         <p:nvSpPr>
@@ -2435,6 +2247,13 @@
             <a:prstDash val="solid"/>
           </a:ln>
         </p:spPr>
+        <p:txBody>
+          <a:bodyPr/>
+          <a:lstStyle/>
+          <a:p>
+            <a:endParaRPr lang="es-CO"/>
+          </a:p>
+        </p:txBody>
       </p:sp>
       <p:sp>
         <p:nvSpPr>
@@ -2457,7 +2276,7 @@
           <a:bodyPr wrap="square" rtlCol="0" anchor="ctr"/>
           <a:lstStyle/>
           <a:p>
-            <a:pPr algn="ctr" indent="0" marL="0">
+            <a:pPr marL="0" indent="0" algn="ctr">
               <a:buNone/>
             </a:pPr>
             <a:r>
@@ -2496,7 +2315,7 @@
           <a:bodyPr wrap="square" rtlCol="0" anchor="ctr"/>
           <a:lstStyle/>
           <a:p>
-            <a:pPr indent="0" marL="0">
+            <a:pPr marL="0" indent="0">
               <a:buNone/>
             </a:pPr>
             <a:r>
@@ -2540,6 +2359,13 @@
             <a:prstDash val="solid"/>
           </a:ln>
         </p:spPr>
+        <p:txBody>
+          <a:bodyPr/>
+          <a:lstStyle/>
+          <a:p>
+            <a:endParaRPr lang="es-CO"/>
+          </a:p>
+        </p:txBody>
       </p:sp>
       <p:sp>
         <p:nvSpPr>
@@ -2567,6 +2393,13 @@
             <a:prstDash val="solid"/>
           </a:ln>
         </p:spPr>
+        <p:txBody>
+          <a:bodyPr/>
+          <a:lstStyle/>
+          <a:p>
+            <a:endParaRPr lang="es-CO"/>
+          </a:p>
+        </p:txBody>
       </p:sp>
       <p:sp>
         <p:nvSpPr>
@@ -2589,7 +2422,7 @@
           <a:bodyPr wrap="square" rtlCol="0" anchor="ctr"/>
           <a:lstStyle/>
           <a:p>
-            <a:pPr algn="ctr" indent="0" marL="0">
+            <a:pPr marL="0" indent="0" algn="ctr">
               <a:buNone/>
             </a:pPr>
             <a:r>
@@ -2628,7 +2461,7 @@
           <a:bodyPr wrap="square" rtlCol="0" anchor="ctr"/>
           <a:lstStyle/>
           <a:p>
-            <a:pPr indent="0" marL="0">
+            <a:pPr marL="0" indent="0">
               <a:buNone/>
             </a:pPr>
             <a:r>
@@ -2672,6 +2505,13 @@
             <a:prstDash val="solid"/>
           </a:ln>
         </p:spPr>
+        <p:txBody>
+          <a:bodyPr/>
+          <a:lstStyle/>
+          <a:p>
+            <a:endParaRPr lang="es-CO"/>
+          </a:p>
+        </p:txBody>
       </p:sp>
       <p:sp>
         <p:nvSpPr>
@@ -2699,6 +2539,13 @@
             <a:prstDash val="solid"/>
           </a:ln>
         </p:spPr>
+        <p:txBody>
+          <a:bodyPr/>
+          <a:lstStyle/>
+          <a:p>
+            <a:endParaRPr lang="es-CO"/>
+          </a:p>
+        </p:txBody>
       </p:sp>
       <p:sp>
         <p:nvSpPr>
@@ -2721,7 +2568,7 @@
           <a:bodyPr wrap="square" rtlCol="0" anchor="ctr"/>
           <a:lstStyle/>
           <a:p>
-            <a:pPr algn="ctr" indent="0" marL="0">
+            <a:pPr marL="0" indent="0" algn="ctr">
               <a:buNone/>
             </a:pPr>
             <a:r>
@@ -2760,7 +2607,7 @@
           <a:bodyPr wrap="square" rtlCol="0" anchor="ctr"/>
           <a:lstStyle/>
           <a:p>
-            <a:pPr indent="0" marL="0">
+            <a:pPr marL="0" indent="0">
               <a:buNone/>
             </a:pPr>
             <a:r>
@@ -2804,6 +2651,13 @@
             <a:prstDash val="solid"/>
           </a:ln>
         </p:spPr>
+        <p:txBody>
+          <a:bodyPr/>
+          <a:lstStyle/>
+          <a:p>
+            <a:endParaRPr lang="es-CO"/>
+          </a:p>
+        </p:txBody>
       </p:sp>
       <p:sp>
         <p:nvSpPr>
@@ -2831,6 +2685,13 @@
             <a:prstDash val="solid"/>
           </a:ln>
         </p:spPr>
+        <p:txBody>
+          <a:bodyPr/>
+          <a:lstStyle/>
+          <a:p>
+            <a:endParaRPr lang="es-CO"/>
+          </a:p>
+        </p:txBody>
       </p:sp>
       <p:sp>
         <p:nvSpPr>
@@ -2853,7 +2714,7 @@
           <a:bodyPr wrap="square" rtlCol="0" anchor="ctr"/>
           <a:lstStyle/>
           <a:p>
-            <a:pPr algn="ctr" indent="0" marL="0">
+            <a:pPr marL="0" indent="0" algn="ctr">
               <a:buNone/>
             </a:pPr>
             <a:r>
@@ -2892,7 +2753,7 @@
           <a:bodyPr wrap="square" rtlCol="0" anchor="ctr"/>
           <a:lstStyle/>
           <a:p>
-            <a:pPr indent="0" marL="0">
+            <a:pPr marL="0" indent="0">
               <a:buNone/>
             </a:pPr>
             <a:r>
@@ -2926,6 +2787,7 @@
         <a:solidFill>
           <a:srgbClr val="FFFFFF"/>
         </a:solidFill>
+        <a:effectLst/>
       </p:bgPr>
     </p:bg>
     <p:spTree>
@@ -2966,6 +2828,13 @@
             <a:prstDash val="solid"/>
           </a:ln>
         </p:spPr>
+        <p:txBody>
+          <a:bodyPr/>
+          <a:lstStyle/>
+          <a:p>
+            <a:endParaRPr lang="es-CO"/>
+          </a:p>
+        </p:txBody>
       </p:sp>
       <p:sp>
         <p:nvSpPr>
@@ -2988,11 +2857,11 @@
           <a:bodyPr wrap="square" rtlCol="0" anchor="ctr"/>
           <a:lstStyle/>
           <a:p>
-            <a:pPr indent="0" marL="0">
-              <a:buNone/>
-            </a:pPr>
-            <a:r>
-              <a:rPr lang="en-US" sz="900" b="1" spc="200" kern="0" dirty="0">
+            <a:pPr marL="0" indent="0">
+              <a:buNone/>
+            </a:pPr>
+            <a:r>
+              <a:rPr lang="en-US" sz="900" b="1" kern="0" spc="200" dirty="0">
                 <a:solidFill>
                   <a:srgbClr val="F97316"/>
                 </a:solidFill>
@@ -3006,29 +2875,6 @@
           </a:p>
         </p:txBody>
       </p:sp>
-      <p:pic>
-        <p:nvPicPr>
-          <p:cNvPr id="4" name="Image 0" descr="C:\Users\cesar\OneDrive\Escritorio\FREELANCE\SpotU\docs\assets\logo-horizontal.png">    </p:cNvPr>
-          <p:cNvPicPr>
-            <a:picLocks noChangeAspect="1"/>
-          </p:cNvPicPr>
-          <p:nvPr/>
-        </p:nvPicPr>
-        <p:blipFill>
-          <a:blip r:embed="rId1"/>
-          <a:srcRect l="0" r="0" t="0" b="0"/>
-          <a:stretch/>
-        </p:blipFill>
-        <p:spPr>
-          <a:xfrm>
-            <a:off x="7315200" y="292608"/>
-            <a:ext cx="1371600" cy="384048"/>
-          </a:xfrm>
-          <a:prstGeom prst="rect">
-            <a:avLst/>
-          </a:prstGeom>
-        </p:spPr>
-      </p:pic>
       <p:sp>
         <p:nvSpPr>
           <p:cNvPr id="5" name="Text 2"/>
@@ -3050,7 +2896,7 @@
           <a:bodyPr wrap="square" rtlCol="0" anchor="ctr"/>
           <a:lstStyle/>
           <a:p>
-            <a:pPr indent="0" marL="0">
+            <a:pPr marL="0" indent="0">
               <a:buNone/>
             </a:pPr>
             <a:r>
@@ -3090,6 +2936,13 @@
             <a:prstDash val="solid"/>
           </a:ln>
         </p:spPr>
+        <p:txBody>
+          <a:bodyPr/>
+          <a:lstStyle/>
+          <a:p>
+            <a:endParaRPr lang="es-CO"/>
+          </a:p>
+        </p:txBody>
       </p:sp>
       <p:sp>
         <p:nvSpPr>
@@ -3117,6 +2970,13 @@
             <a:prstDash val="solid"/>
           </a:ln>
         </p:spPr>
+        <p:txBody>
+          <a:bodyPr/>
+          <a:lstStyle/>
+          <a:p>
+            <a:endParaRPr lang="es-CO"/>
+          </a:p>
+        </p:txBody>
       </p:sp>
       <p:sp>
         <p:nvSpPr>
@@ -3142,6 +3002,13 @@
             <a:prstDash val="solid"/>
           </a:ln>
         </p:spPr>
+        <p:txBody>
+          <a:bodyPr/>
+          <a:lstStyle/>
+          <a:p>
+            <a:endParaRPr lang="es-CO"/>
+          </a:p>
+        </p:txBody>
       </p:sp>
       <p:sp>
         <p:nvSpPr>
@@ -3164,7 +3031,7 @@
           <a:bodyPr wrap="square" rtlCol="0" anchor="ctr"/>
           <a:lstStyle/>
           <a:p>
-            <a:pPr algn="ctr" indent="0" marL="0">
+            <a:pPr marL="0" indent="0" algn="ctr">
               <a:buNone/>
             </a:pPr>
             <a:r>
@@ -3203,7 +3070,7 @@
           <a:bodyPr wrap="square" rtlCol="0" anchor="ctr"/>
           <a:lstStyle/>
           <a:p>
-            <a:pPr indent="0" marL="0">
+            <a:pPr marL="0" indent="0">
               <a:buNone/>
             </a:pPr>
             <a:r>
@@ -3242,7 +3109,7 @@
           <a:bodyPr wrap="square" rtlCol="0" anchor="ctr"/>
           <a:lstStyle/>
           <a:p>
-            <a:pPr indent="0" marL="0">
+            <a:pPr marL="0" indent="0">
               <a:buNone/>
             </a:pPr>
             <a:r>
@@ -3281,7 +3148,7 @@
           <a:bodyPr wrap="square" rtlCol="0" anchor="ctr"/>
           <a:lstStyle/>
           <a:p>
-            <a:pPr indent="0" marL="0">
+            <a:pPr marL="0" indent="0">
               <a:buNone/>
             </a:pPr>
             <a:r>
@@ -3325,6 +3192,13 @@
             <a:prstDash val="solid"/>
           </a:ln>
         </p:spPr>
+        <p:txBody>
+          <a:bodyPr/>
+          <a:lstStyle/>
+          <a:p>
+            <a:endParaRPr lang="es-CO"/>
+          </a:p>
+        </p:txBody>
       </p:sp>
       <p:sp>
         <p:nvSpPr>
@@ -3350,6 +3224,13 @@
             <a:prstDash val="solid"/>
           </a:ln>
         </p:spPr>
+        <p:txBody>
+          <a:bodyPr/>
+          <a:lstStyle/>
+          <a:p>
+            <a:endParaRPr lang="es-CO"/>
+          </a:p>
+        </p:txBody>
       </p:sp>
       <p:sp>
         <p:nvSpPr>
@@ -3372,7 +3253,7 @@
           <a:bodyPr wrap="square" rtlCol="0" anchor="ctr"/>
           <a:lstStyle/>
           <a:p>
-            <a:pPr algn="ctr" indent="0" marL="0">
+            <a:pPr marL="0" indent="0" algn="ctr">
               <a:buNone/>
             </a:pPr>
             <a:r>
@@ -3411,7 +3292,7 @@
           <a:bodyPr wrap="square" rtlCol="0" anchor="ctr"/>
           <a:lstStyle/>
           <a:p>
-            <a:pPr indent="0" marL="0">
+            <a:pPr marL="0" indent="0">
               <a:buNone/>
             </a:pPr>
             <a:r>
@@ -3450,7 +3331,7 @@
           <a:bodyPr wrap="square" rtlCol="0" anchor="ctr"/>
           <a:lstStyle/>
           <a:p>
-            <a:pPr indent="0" marL="0">
+            <a:pPr marL="0" indent="0">
               <a:buNone/>
             </a:pPr>
             <a:r>
@@ -3489,7 +3370,7 @@
           <a:bodyPr wrap="square" rtlCol="0" anchor="ctr"/>
           <a:lstStyle/>
           <a:p>
-            <a:pPr indent="0" marL="0">
+            <a:pPr marL="0" indent="0">
               <a:buNone/>
             </a:pPr>
             <a:r>
@@ -3533,6 +3414,13 @@
             <a:prstDash val="solid"/>
           </a:ln>
         </p:spPr>
+        <p:txBody>
+          <a:bodyPr/>
+          <a:lstStyle/>
+          <a:p>
+            <a:endParaRPr lang="es-CO"/>
+          </a:p>
+        </p:txBody>
       </p:sp>
       <p:sp>
         <p:nvSpPr>
@@ -3555,7 +3443,7 @@
           <a:bodyPr wrap="square" rtlCol="0" anchor="ctr"/>
           <a:lstStyle/>
           <a:p>
-            <a:pPr algn="ctr" indent="0" marL="0">
+            <a:pPr marL="0" indent="0" algn="ctr">
               <a:buNone/>
             </a:pPr>
             <a:r>
@@ -3594,7 +3482,7 @@
           <a:bodyPr wrap="square" rtlCol="0" anchor="ctr"/>
           <a:lstStyle/>
           <a:p>
-            <a:pPr algn="ctr" indent="0" marL="0">
+            <a:pPr marL="0" indent="0" algn="ctr">
               <a:buNone/>
             </a:pPr>
             <a:r>
@@ -3612,6 +3500,36 @@
           </a:p>
         </p:txBody>
       </p:sp>
+      <p:pic>
+        <p:nvPicPr>
+          <p:cNvPr id="23" name="Imagen 22">
+            <a:extLst>
+              <a:ext uri="{FF2B5EF4-FFF2-40B4-BE49-F238E27FC236}">
+                <a16:creationId xmlns:a16="http://schemas.microsoft.com/office/drawing/2014/main" id="{59A2F477-015A-E706-61D0-88CC5F3FECE6}"/>
+              </a:ext>
+            </a:extLst>
+          </p:cNvPr>
+          <p:cNvPicPr>
+            <a:picLocks noChangeAspect="1"/>
+          </p:cNvPicPr>
+          <p:nvPr/>
+        </p:nvPicPr>
+        <p:blipFill>
+          <a:blip r:embed="rId3"/>
+          <a:stretch>
+            <a:fillRect/>
+          </a:stretch>
+        </p:blipFill>
+        <p:spPr>
+          <a:xfrm>
+            <a:off x="7877556" y="143810"/>
+            <a:ext cx="1216152" cy="663356"/>
+          </a:xfrm>
+          <a:prstGeom prst="rect">
+            <a:avLst/>
+          </a:prstGeom>
+        </p:spPr>
+      </p:pic>
     </p:spTree>
   </p:cSld>
   <p:clrMapOvr>
@@ -3628,6 +3546,7 @@
         <a:solidFill>
           <a:srgbClr val="FFFFFF"/>
         </a:solidFill>
+        <a:effectLst/>
       </p:bgPr>
     </p:bg>
     <p:spTree>
@@ -3668,6 +3587,13 @@
             <a:prstDash val="solid"/>
           </a:ln>
         </p:spPr>
+        <p:txBody>
+          <a:bodyPr/>
+          <a:lstStyle/>
+          <a:p>
+            <a:endParaRPr lang="es-CO"/>
+          </a:p>
+        </p:txBody>
       </p:sp>
       <p:sp>
         <p:nvSpPr>
@@ -3690,11 +3616,11 @@
           <a:bodyPr wrap="square" rtlCol="0" anchor="ctr"/>
           <a:lstStyle/>
           <a:p>
-            <a:pPr indent="0" marL="0">
-              <a:buNone/>
-            </a:pPr>
-            <a:r>
-              <a:rPr lang="en-US" sz="900" b="1" spc="200" kern="0" dirty="0">
+            <a:pPr marL="0" indent="0">
+              <a:buNone/>
+            </a:pPr>
+            <a:r>
+              <a:rPr lang="en-US" sz="900" b="1" kern="0" spc="200" dirty="0">
                 <a:solidFill>
                   <a:srgbClr val="F97316"/>
                 </a:solidFill>
@@ -3708,29 +3634,6 @@
           </a:p>
         </p:txBody>
       </p:sp>
-      <p:pic>
-        <p:nvPicPr>
-          <p:cNvPr id="4" name="Image 0" descr="C:\Users\cesar\OneDrive\Escritorio\FREELANCE\SpotU\docs\assets\logo-horizontal.png">    </p:cNvPr>
-          <p:cNvPicPr>
-            <a:picLocks noChangeAspect="1"/>
-          </p:cNvPicPr>
-          <p:nvPr/>
-        </p:nvPicPr>
-        <p:blipFill>
-          <a:blip r:embed="rId1"/>
-          <a:srcRect l="0" r="0" t="0" b="0"/>
-          <a:stretch/>
-        </p:blipFill>
-        <p:spPr>
-          <a:xfrm>
-            <a:off x="7315200" y="292608"/>
-            <a:ext cx="1371600" cy="384048"/>
-          </a:xfrm>
-          <a:prstGeom prst="rect">
-            <a:avLst/>
-          </a:prstGeom>
-        </p:spPr>
-      </p:pic>
       <p:sp>
         <p:nvSpPr>
           <p:cNvPr id="5" name="Text 2"/>
@@ -3752,7 +3655,7 @@
           <a:bodyPr wrap="square" rtlCol="0" anchor="ctr"/>
           <a:lstStyle/>
           <a:p>
-            <a:pPr indent="0" marL="0">
+            <a:pPr marL="0" indent="0">
               <a:buNone/>
             </a:pPr>
             <a:r>
@@ -3792,6 +3695,13 @@
             <a:prstDash val="solid"/>
           </a:ln>
         </p:spPr>
+        <p:txBody>
+          <a:bodyPr/>
+          <a:lstStyle/>
+          <a:p>
+            <a:endParaRPr lang="es-CO"/>
+          </a:p>
+        </p:txBody>
       </p:sp>
       <p:sp>
         <p:nvSpPr>
@@ -3815,6 +3725,13 @@
             <a:prstDash val="solid"/>
           </a:ln>
         </p:spPr>
+        <p:txBody>
+          <a:bodyPr/>
+          <a:lstStyle/>
+          <a:p>
+            <a:endParaRPr lang="es-CO"/>
+          </a:p>
+        </p:txBody>
       </p:sp>
       <p:sp>
         <p:nvSpPr>
@@ -3840,6 +3757,13 @@
             <a:prstDash val="solid"/>
           </a:ln>
         </p:spPr>
+        <p:txBody>
+          <a:bodyPr/>
+          <a:lstStyle/>
+          <a:p>
+            <a:endParaRPr lang="es-CO"/>
+          </a:p>
+        </p:txBody>
       </p:sp>
       <p:sp>
         <p:nvSpPr>
@@ -3862,7 +3786,7 @@
           <a:bodyPr wrap="square" rtlCol="0" anchor="ctr"/>
           <a:lstStyle/>
           <a:p>
-            <a:pPr algn="ctr" indent="0" marL="0">
+            <a:pPr marL="0" indent="0" algn="ctr">
               <a:buNone/>
             </a:pPr>
             <a:r>
@@ -3901,11 +3825,11 @@
           <a:bodyPr wrap="square" rtlCol="0" anchor="ctr"/>
           <a:lstStyle/>
           <a:p>
-            <a:pPr algn="ctr" indent="0" marL="0">
-              <a:buNone/>
-            </a:pPr>
-            <a:r>
-              <a:rPr lang="en-US" sz="1000" b="1" spc="100" kern="0" dirty="0">
+            <a:pPr marL="0" indent="0" algn="ctr">
+              <a:buNone/>
+            </a:pPr>
+            <a:r>
+              <a:rPr lang="en-US" sz="1000" b="1" kern="0" spc="100" dirty="0">
                 <a:solidFill>
                   <a:srgbClr val="10B981"/>
                 </a:solidFill>
@@ -3940,7 +3864,7 @@
           <a:bodyPr wrap="square" rtlCol="0" anchor="ctr"/>
           <a:lstStyle/>
           <a:p>
-            <a:pPr algn="ctr" indent="0" marL="0">
+            <a:pPr marL="0" indent="0" algn="ctr">
               <a:buNone/>
             </a:pPr>
             <a:r>
@@ -3979,7 +3903,7 @@
           <a:bodyPr wrap="square" rtlCol="0" anchor="ctr"/>
           <a:lstStyle/>
           <a:p>
-            <a:pPr algn="ctr" indent="0" marL="0">
+            <a:pPr marL="0" indent="0" algn="ctr">
               <a:buNone/>
             </a:pPr>
             <a:r>
@@ -4021,6 +3945,13 @@
             <a:prstDash val="solid"/>
           </a:ln>
         </p:spPr>
+        <p:txBody>
+          <a:bodyPr/>
+          <a:lstStyle/>
+          <a:p>
+            <a:endParaRPr lang="es-CO"/>
+          </a:p>
+        </p:txBody>
       </p:sp>
       <p:sp>
         <p:nvSpPr>
@@ -4043,11 +3974,11 @@
           <a:bodyPr wrap="square" rtlCol="0" anchor="ctr"/>
           <a:lstStyle/>
           <a:p>
-            <a:pPr algn="ctr" indent="0" marL="0">
-              <a:buNone/>
-            </a:pPr>
-            <a:r>
-              <a:rPr lang="en-US" sz="1000" b="1" spc="100" kern="0" dirty="0">
+            <a:pPr marL="0" indent="0" algn="ctr">
+              <a:buNone/>
+            </a:pPr>
+            <a:r>
+              <a:rPr lang="en-US" sz="1000" b="1" kern="0" spc="100" dirty="0">
                 <a:solidFill>
                   <a:srgbClr val="4F46E5"/>
                 </a:solidFill>
@@ -4082,7 +4013,7 @@
           <a:bodyPr wrap="square" rtlCol="0" anchor="ctr"/>
           <a:lstStyle/>
           <a:p>
-            <a:pPr algn="ctr" indent="0" marL="0">
+            <a:pPr marL="0" indent="0" algn="ctr">
               <a:buNone/>
             </a:pPr>
             <a:r>
@@ -4121,7 +4052,7 @@
           <a:bodyPr wrap="square" rtlCol="0" anchor="ctr"/>
           <a:lstStyle/>
           <a:p>
-            <a:pPr algn="ctr" indent="0" marL="0">
+            <a:pPr marL="0" indent="0" algn="ctr">
               <a:buNone/>
             </a:pPr>
             <a:r>
@@ -4163,6 +4094,13 @@
             <a:prstDash val="solid"/>
           </a:ln>
         </p:spPr>
+        <p:txBody>
+          <a:bodyPr/>
+          <a:lstStyle/>
+          <a:p>
+            <a:endParaRPr lang="es-CO"/>
+          </a:p>
+        </p:txBody>
       </p:sp>
       <p:sp>
         <p:nvSpPr>
@@ -4185,11 +4123,11 @@
           <a:bodyPr wrap="square" rtlCol="0" anchor="ctr"/>
           <a:lstStyle/>
           <a:p>
-            <a:pPr algn="ctr" indent="0" marL="0">
-              <a:buNone/>
-            </a:pPr>
-            <a:r>
-              <a:rPr lang="en-US" sz="1000" b="1" spc="100" kern="0" dirty="0">
+            <a:pPr marL="0" indent="0" algn="ctr">
+              <a:buNone/>
+            </a:pPr>
+            <a:r>
+              <a:rPr lang="en-US" sz="1000" b="1" kern="0" spc="100" dirty="0">
                 <a:solidFill>
                   <a:srgbClr val="4F46E5"/>
                 </a:solidFill>
@@ -4224,7 +4162,7 @@
           <a:bodyPr wrap="square" rtlCol="0" anchor="ctr"/>
           <a:lstStyle/>
           <a:p>
-            <a:pPr algn="ctr" indent="0" marL="0">
+            <a:pPr marL="0" indent="0" algn="ctr">
               <a:buNone/>
             </a:pPr>
             <a:r>
@@ -4263,7 +4201,7 @@
           <a:bodyPr wrap="square" rtlCol="0" anchor="ctr"/>
           <a:lstStyle/>
           <a:p>
-            <a:pPr algn="ctr" indent="0" marL="0">
+            <a:pPr marL="0" indent="0" algn="ctr">
               <a:buNone/>
             </a:pPr>
             <a:r>
@@ -4305,6 +4243,13 @@
             <a:prstDash val="solid"/>
           </a:ln>
         </p:spPr>
+        <p:txBody>
+          <a:bodyPr/>
+          <a:lstStyle/>
+          <a:p>
+            <a:endParaRPr lang="es-CO"/>
+          </a:p>
+        </p:txBody>
       </p:sp>
       <p:sp>
         <p:nvSpPr>
@@ -4327,11 +4272,11 @@
           <a:bodyPr wrap="square" rtlCol="0" anchor="ctr"/>
           <a:lstStyle/>
           <a:p>
-            <a:pPr algn="ctr" indent="0" marL="0">
-              <a:buNone/>
-            </a:pPr>
-            <a:r>
-              <a:rPr lang="en-US" sz="1000" b="1" spc="100" kern="0" dirty="0">
+            <a:pPr marL="0" indent="0" algn="ctr">
+              <a:buNone/>
+            </a:pPr>
+            <a:r>
+              <a:rPr lang="en-US" sz="1000" b="1" kern="0" spc="100" dirty="0">
                 <a:solidFill>
                   <a:srgbClr val="F97316"/>
                 </a:solidFill>
@@ -4366,7 +4311,7 @@
           <a:bodyPr wrap="square" rtlCol="0" anchor="ctr"/>
           <a:lstStyle/>
           <a:p>
-            <a:pPr algn="ctr" indent="0" marL="0">
+            <a:pPr marL="0" indent="0" algn="ctr">
               <a:buNone/>
             </a:pPr>
             <a:r>
@@ -4405,7 +4350,7 @@
           <a:bodyPr wrap="square" rtlCol="0" anchor="ctr"/>
           <a:lstStyle/>
           <a:p>
-            <a:pPr algn="ctr" indent="0" marL="0">
+            <a:pPr marL="0" indent="0" algn="ctr">
               <a:buNone/>
             </a:pPr>
             <a:r>
@@ -4444,7 +4389,7 @@
           <a:bodyPr wrap="square" rtlCol="0" anchor="ctr"/>
           <a:lstStyle/>
           <a:p>
-            <a:pPr algn="ctr" indent="0" marL="0">
+            <a:pPr marL="0" indent="0" algn="ctr">
               <a:buNone/>
             </a:pPr>
             <a:r>
@@ -4462,6 +4407,36 @@
           </a:p>
         </p:txBody>
       </p:sp>
+      <p:pic>
+        <p:nvPicPr>
+          <p:cNvPr id="27" name="Imagen 26">
+            <a:extLst>
+              <a:ext uri="{FF2B5EF4-FFF2-40B4-BE49-F238E27FC236}">
+                <a16:creationId xmlns:a16="http://schemas.microsoft.com/office/drawing/2014/main" id="{CABF495F-FE14-98CD-772B-83292D6A76DB}"/>
+              </a:ext>
+            </a:extLst>
+          </p:cNvPr>
+          <p:cNvPicPr>
+            <a:picLocks noChangeAspect="1"/>
+          </p:cNvPicPr>
+          <p:nvPr/>
+        </p:nvPicPr>
+        <p:blipFill>
+          <a:blip r:embed="rId3"/>
+          <a:stretch>
+            <a:fillRect/>
+          </a:stretch>
+        </p:blipFill>
+        <p:spPr>
+          <a:xfrm>
+            <a:off x="7877556" y="143810"/>
+            <a:ext cx="1216152" cy="663356"/>
+          </a:xfrm>
+          <a:prstGeom prst="rect">
+            <a:avLst/>
+          </a:prstGeom>
+        </p:spPr>
+      </p:pic>
     </p:spTree>
   </p:cSld>
   <p:clrMapOvr>
@@ -4478,6 +4453,7 @@
         <a:solidFill>
           <a:srgbClr val="FFFFFF"/>
         </a:solidFill>
+        <a:effectLst/>
       </p:bgPr>
     </p:bg>
     <p:spTree>
@@ -4518,6 +4494,13 @@
             <a:prstDash val="solid"/>
           </a:ln>
         </p:spPr>
+        <p:txBody>
+          <a:bodyPr/>
+          <a:lstStyle/>
+          <a:p>
+            <a:endParaRPr lang="es-CO"/>
+          </a:p>
+        </p:txBody>
       </p:sp>
       <p:sp>
         <p:nvSpPr>
@@ -4540,11 +4523,11 @@
           <a:bodyPr wrap="square" rtlCol="0" anchor="ctr"/>
           <a:lstStyle/>
           <a:p>
-            <a:pPr indent="0" marL="0">
-              <a:buNone/>
-            </a:pPr>
-            <a:r>
-              <a:rPr lang="en-US" sz="900" b="1" spc="200" kern="0" dirty="0">
+            <a:pPr marL="0" indent="0">
+              <a:buNone/>
+            </a:pPr>
+            <a:r>
+              <a:rPr lang="en-US" sz="900" b="1" kern="0" spc="200" dirty="0">
                 <a:solidFill>
                   <a:srgbClr val="F97316"/>
                 </a:solidFill>
@@ -4558,29 +4541,6 @@
           </a:p>
         </p:txBody>
       </p:sp>
-      <p:pic>
-        <p:nvPicPr>
-          <p:cNvPr id="4" name="Image 0" descr="C:\Users\cesar\OneDrive\Escritorio\FREELANCE\SpotU\docs\assets\logo-horizontal.png">    </p:cNvPr>
-          <p:cNvPicPr>
-            <a:picLocks noChangeAspect="1"/>
-          </p:cNvPicPr>
-          <p:nvPr/>
-        </p:nvPicPr>
-        <p:blipFill>
-          <a:blip r:embed="rId1"/>
-          <a:srcRect l="0" r="0" t="0" b="0"/>
-          <a:stretch/>
-        </p:blipFill>
-        <p:spPr>
-          <a:xfrm>
-            <a:off x="7315200" y="292608"/>
-            <a:ext cx="1371600" cy="384048"/>
-          </a:xfrm>
-          <a:prstGeom prst="rect">
-            <a:avLst/>
-          </a:prstGeom>
-        </p:spPr>
-      </p:pic>
       <p:sp>
         <p:nvSpPr>
           <p:cNvPr id="5" name="Text 2"/>
@@ -4602,7 +4562,7 @@
           <a:bodyPr wrap="square" rtlCol="0" anchor="ctr"/>
           <a:lstStyle/>
           <a:p>
-            <a:pPr indent="0" marL="0">
+            <a:pPr marL="0" indent="0">
               <a:buNone/>
             </a:pPr>
             <a:r>
@@ -4642,6 +4602,13 @@
             <a:prstDash val="solid"/>
           </a:ln>
         </p:spPr>
+        <p:txBody>
+          <a:bodyPr/>
+          <a:lstStyle/>
+          <a:p>
+            <a:endParaRPr lang="es-CO"/>
+          </a:p>
+        </p:txBody>
       </p:sp>
       <p:sp>
         <p:nvSpPr>
@@ -4669,6 +4636,13 @@
             <a:prstDash val="solid"/>
           </a:ln>
         </p:spPr>
+        <p:txBody>
+          <a:bodyPr/>
+          <a:lstStyle/>
+          <a:p>
+            <a:endParaRPr lang="es-CO"/>
+          </a:p>
+        </p:txBody>
       </p:sp>
       <p:sp>
         <p:nvSpPr>
@@ -4694,6 +4668,13 @@
             <a:prstDash val="solid"/>
           </a:ln>
         </p:spPr>
+        <p:txBody>
+          <a:bodyPr/>
+          <a:lstStyle/>
+          <a:p>
+            <a:endParaRPr lang="es-CO"/>
+          </a:p>
+        </p:txBody>
       </p:sp>
       <p:sp>
         <p:nvSpPr>
@@ -4716,7 +4697,7 @@
           <a:bodyPr wrap="square" rtlCol="0" anchor="ctr"/>
           <a:lstStyle/>
           <a:p>
-            <a:pPr algn="ctr" indent="0" marL="0">
+            <a:pPr marL="0" indent="0" algn="ctr">
               <a:buNone/>
             </a:pPr>
             <a:r>
@@ -4755,7 +4736,7 @@
           <a:bodyPr wrap="square" rtlCol="0" anchor="ctr"/>
           <a:lstStyle/>
           <a:p>
-            <a:pPr indent="0" marL="0">
+            <a:pPr marL="0" indent="0">
               <a:buNone/>
             </a:pPr>
             <a:r>
@@ -4794,7 +4775,7 @@
           <a:bodyPr wrap="square" rtlCol="0" anchor="ctr"/>
           <a:lstStyle/>
           <a:p>
-            <a:pPr indent="0" marL="0">
+            <a:pPr marL="0" indent="0">
               <a:buNone/>
             </a:pPr>
             <a:r>
@@ -4838,6 +4819,13 @@
             <a:prstDash val="solid"/>
           </a:ln>
         </p:spPr>
+        <p:txBody>
+          <a:bodyPr/>
+          <a:lstStyle/>
+          <a:p>
+            <a:endParaRPr lang="es-CO"/>
+          </a:p>
+        </p:txBody>
       </p:sp>
       <p:sp>
         <p:nvSpPr>
@@ -4863,6 +4851,13 @@
             <a:prstDash val="solid"/>
           </a:ln>
         </p:spPr>
+        <p:txBody>
+          <a:bodyPr/>
+          <a:lstStyle/>
+          <a:p>
+            <a:endParaRPr lang="es-CO"/>
+          </a:p>
+        </p:txBody>
       </p:sp>
       <p:sp>
         <p:nvSpPr>
@@ -4885,7 +4880,7 @@
           <a:bodyPr wrap="square" rtlCol="0" anchor="ctr"/>
           <a:lstStyle/>
           <a:p>
-            <a:pPr algn="ctr" indent="0" marL="0">
+            <a:pPr marL="0" indent="0" algn="ctr">
               <a:buNone/>
             </a:pPr>
             <a:r>
@@ -4924,7 +4919,7 @@
           <a:bodyPr wrap="square" rtlCol="0" anchor="ctr"/>
           <a:lstStyle/>
           <a:p>
-            <a:pPr indent="0" marL="0">
+            <a:pPr marL="0" indent="0">
               <a:buNone/>
             </a:pPr>
             <a:r>
@@ -4963,7 +4958,7 @@
           <a:bodyPr wrap="square" rtlCol="0" anchor="ctr"/>
           <a:lstStyle/>
           <a:p>
-            <a:pPr indent="0" marL="0">
+            <a:pPr marL="0" indent="0">
               <a:buNone/>
             </a:pPr>
             <a:r>
@@ -5007,6 +5002,13 @@
             <a:prstDash val="solid"/>
           </a:ln>
         </p:spPr>
+        <p:txBody>
+          <a:bodyPr/>
+          <a:lstStyle/>
+          <a:p>
+            <a:endParaRPr lang="es-CO"/>
+          </a:p>
+        </p:txBody>
       </p:sp>
       <p:sp>
         <p:nvSpPr>
@@ -5032,6 +5034,13 @@
             <a:prstDash val="solid"/>
           </a:ln>
         </p:spPr>
+        <p:txBody>
+          <a:bodyPr/>
+          <a:lstStyle/>
+          <a:p>
+            <a:endParaRPr lang="es-CO"/>
+          </a:p>
+        </p:txBody>
       </p:sp>
       <p:sp>
         <p:nvSpPr>
@@ -5054,7 +5063,7 @@
           <a:bodyPr wrap="square" rtlCol="0" anchor="ctr"/>
           <a:lstStyle/>
           <a:p>
-            <a:pPr algn="ctr" indent="0" marL="0">
+            <a:pPr marL="0" indent="0" algn="ctr">
               <a:buNone/>
             </a:pPr>
             <a:r>
@@ -5093,7 +5102,7 @@
           <a:bodyPr wrap="square" rtlCol="0" anchor="ctr"/>
           <a:lstStyle/>
           <a:p>
-            <a:pPr indent="0" marL="0">
+            <a:pPr marL="0" indent="0">
               <a:buNone/>
             </a:pPr>
             <a:r>
@@ -5132,7 +5141,7 @@
           <a:bodyPr wrap="square" rtlCol="0" anchor="ctr"/>
           <a:lstStyle/>
           <a:p>
-            <a:pPr indent="0" marL="0">
+            <a:pPr marL="0" indent="0">
               <a:buNone/>
             </a:pPr>
             <a:r>
@@ -5176,6 +5185,13 @@
             <a:prstDash val="solid"/>
           </a:ln>
         </p:spPr>
+        <p:txBody>
+          <a:bodyPr/>
+          <a:lstStyle/>
+          <a:p>
+            <a:endParaRPr lang="es-CO"/>
+          </a:p>
+        </p:txBody>
       </p:sp>
       <p:sp>
         <p:nvSpPr>
@@ -5201,6 +5217,13 @@
             <a:prstDash val="solid"/>
           </a:ln>
         </p:spPr>
+        <p:txBody>
+          <a:bodyPr/>
+          <a:lstStyle/>
+          <a:p>
+            <a:endParaRPr lang="es-CO"/>
+          </a:p>
+        </p:txBody>
       </p:sp>
       <p:sp>
         <p:nvSpPr>
@@ -5223,7 +5246,7 @@
           <a:bodyPr wrap="square" rtlCol="0" anchor="ctr"/>
           <a:lstStyle/>
           <a:p>
-            <a:pPr algn="ctr" indent="0" marL="0">
+            <a:pPr marL="0" indent="0" algn="ctr">
               <a:buNone/>
             </a:pPr>
             <a:r>
@@ -5262,7 +5285,7 @@
           <a:bodyPr wrap="square" rtlCol="0" anchor="ctr"/>
           <a:lstStyle/>
           <a:p>
-            <a:pPr indent="0" marL="0">
+            <a:pPr marL="0" indent="0">
               <a:buNone/>
             </a:pPr>
             <a:r>
@@ -5301,7 +5324,7 @@
           <a:bodyPr wrap="square" rtlCol="0" anchor="ctr"/>
           <a:lstStyle/>
           <a:p>
-            <a:pPr indent="0" marL="0">
+            <a:pPr marL="0" indent="0">
               <a:buNone/>
             </a:pPr>
             <a:r>
@@ -5319,6 +5342,36 @@
           </a:p>
         </p:txBody>
       </p:sp>
+      <p:pic>
+        <p:nvPicPr>
+          <p:cNvPr id="28" name="Imagen 27">
+            <a:extLst>
+              <a:ext uri="{FF2B5EF4-FFF2-40B4-BE49-F238E27FC236}">
+                <a16:creationId xmlns:a16="http://schemas.microsoft.com/office/drawing/2014/main" id="{9450B79F-6AA2-B988-D284-37E02CAAE23A}"/>
+              </a:ext>
+            </a:extLst>
+          </p:cNvPr>
+          <p:cNvPicPr>
+            <a:picLocks noChangeAspect="1"/>
+          </p:cNvPicPr>
+          <p:nvPr/>
+        </p:nvPicPr>
+        <p:blipFill>
+          <a:blip r:embed="rId3"/>
+          <a:stretch>
+            <a:fillRect/>
+          </a:stretch>
+        </p:blipFill>
+        <p:spPr>
+          <a:xfrm>
+            <a:off x="7877556" y="143810"/>
+            <a:ext cx="1216152" cy="663356"/>
+          </a:xfrm>
+          <a:prstGeom prst="rect">
+            <a:avLst/>
+          </a:prstGeom>
+        </p:spPr>
+      </p:pic>
     </p:spTree>
   </p:cSld>
   <p:clrMapOvr>
@@ -5335,6 +5388,7 @@
         <a:solidFill>
           <a:srgbClr val="3730A3"/>
         </a:solidFill>
+        <a:effectLst/>
       </p:bgPr>
     </p:bg>
     <p:spTree>
@@ -5375,6 +5429,13 @@
             <a:prstDash val="solid"/>
           </a:ln>
         </p:spPr>
+        <p:txBody>
+          <a:bodyPr/>
+          <a:lstStyle/>
+          <a:p>
+            <a:endParaRPr lang="es-CO"/>
+          </a:p>
+        </p:txBody>
       </p:sp>
       <p:sp>
         <p:nvSpPr>
@@ -5400,30 +5461,14 @@
             <a:prstDash val="solid"/>
           </a:ln>
         </p:spPr>
-      </p:sp>
-      <p:pic>
-        <p:nvPicPr>
-          <p:cNvPr id="4" name="Image 0" descr="C:\Users\cesar\OneDrive\Escritorio\FREELANCE\SpotU\docs\assets\logo-dark-bg.png">    </p:cNvPr>
-          <p:cNvPicPr>
-            <a:picLocks noChangeAspect="1"/>
-          </p:cNvPicPr>
-          <p:nvPr/>
-        </p:nvPicPr>
-        <p:blipFill>
-          <a:blip r:embed="rId1"/>
-          <a:srcRect l="0" r="0" t="0" b="0"/>
-          <a:stretch/>
-        </p:blipFill>
-        <p:spPr>
-          <a:xfrm>
-            <a:off x="3657600" y="365760"/>
-            <a:ext cx="1828800" cy="548640"/>
-          </a:xfrm>
-          <a:prstGeom prst="rect">
-            <a:avLst/>
-          </a:prstGeom>
-        </p:spPr>
-      </p:pic>
+        <p:txBody>
+          <a:bodyPr/>
+          <a:lstStyle/>
+          <a:p>
+            <a:endParaRPr lang="es-CO"/>
+          </a:p>
+        </p:txBody>
+      </p:sp>
       <p:sp>
         <p:nvSpPr>
           <p:cNvPr id="5" name="Text 2"/>
@@ -5445,7 +5490,7 @@
           <a:bodyPr wrap="square" rtlCol="0" anchor="ctr"/>
           <a:lstStyle/>
           <a:p>
-            <a:pPr algn="ctr" indent="0" marL="0">
+            <a:pPr marL="0" indent="0" algn="ctr">
               <a:buNone/>
             </a:pPr>
             <a:r>
@@ -5484,7 +5529,7 @@
           <a:bodyPr wrap="square" rtlCol="0" anchor="ctr"/>
           <a:lstStyle/>
           <a:p>
-            <a:pPr algn="ctr" indent="0" marL="0">
+            <a:pPr marL="0" indent="0" algn="ctr">
               <a:buNone/>
             </a:pPr>
             <a:r>
@@ -5523,7 +5568,7 @@
           <a:bodyPr wrap="square" rtlCol="0" anchor="ctr"/>
           <a:lstStyle/>
           <a:p>
-            <a:pPr algn="ctr" indent="0" marL="0">
+            <a:pPr marL="0" indent="0" algn="ctr">
               <a:buNone/>
             </a:pPr>
             <a:r>
@@ -5565,6 +5610,13 @@
             <a:prstDash val="solid"/>
           </a:ln>
         </p:spPr>
+        <p:txBody>
+          <a:bodyPr/>
+          <a:lstStyle/>
+          <a:p>
+            <a:endParaRPr lang="es-CO"/>
+          </a:p>
+        </p:txBody>
       </p:sp>
       <p:sp>
         <p:nvSpPr>
@@ -5587,7 +5639,7 @@
           <a:bodyPr wrap="square" rtlCol="0" anchor="ctr"/>
           <a:lstStyle/>
           <a:p>
-            <a:pPr algn="ctr" indent="0" marL="0">
+            <a:pPr marL="0" indent="0" algn="ctr">
               <a:buNone/>
             </a:pPr>
             <a:r>
@@ -5626,7 +5678,7 @@
           <a:bodyPr wrap="square" rtlCol="0" anchor="ctr"/>
           <a:lstStyle/>
           <a:p>
-            <a:pPr algn="ctr" indent="0" marL="0">
+            <a:pPr marL="0" indent="0" algn="ctr">
               <a:buNone/>
             </a:pPr>
             <a:r>
@@ -5644,6 +5696,36 @@
           </a:p>
         </p:txBody>
       </p:sp>
+      <p:pic>
+        <p:nvPicPr>
+          <p:cNvPr id="12" name="Imagen 11">
+            <a:extLst>
+              <a:ext uri="{FF2B5EF4-FFF2-40B4-BE49-F238E27FC236}">
+                <a16:creationId xmlns:a16="http://schemas.microsoft.com/office/drawing/2014/main" id="{680600B3-A140-6013-A2A9-E258DADD6CFB}"/>
+              </a:ext>
+            </a:extLst>
+          </p:cNvPr>
+          <p:cNvPicPr>
+            <a:picLocks noChangeAspect="1"/>
+          </p:cNvPicPr>
+          <p:nvPr/>
+        </p:nvPicPr>
+        <p:blipFill>
+          <a:blip r:embed="rId3"/>
+          <a:stretch>
+            <a:fillRect/>
+          </a:stretch>
+        </p:blipFill>
+        <p:spPr>
+          <a:xfrm>
+            <a:off x="3077779" y="134839"/>
+            <a:ext cx="2560320" cy="1396781"/>
+          </a:xfrm>
+          <a:prstGeom prst="rect">
+            <a:avLst/>
+          </a:prstGeom>
+        </p:spPr>
+      </p:pic>
     </p:spTree>
   </p:cSld>
   <p:clrMapOvr>
@@ -5660,6 +5742,7 @@
         <a:solidFill>
           <a:srgbClr val="FFFFFF"/>
         </a:solidFill>
+        <a:effectLst/>
       </p:bgPr>
     </p:bg>
     <p:spTree>
@@ -5700,6 +5783,13 @@
             <a:prstDash val="solid"/>
           </a:ln>
         </p:spPr>
+        <p:txBody>
+          <a:bodyPr/>
+          <a:lstStyle/>
+          <a:p>
+            <a:endParaRPr lang="es-CO"/>
+          </a:p>
+        </p:txBody>
       </p:sp>
       <p:sp>
         <p:nvSpPr>
@@ -5722,11 +5812,11 @@
           <a:bodyPr wrap="square" rtlCol="0" anchor="ctr"/>
           <a:lstStyle/>
           <a:p>
-            <a:pPr indent="0" marL="0">
-              <a:buNone/>
-            </a:pPr>
-            <a:r>
-              <a:rPr lang="en-US" sz="900" b="1" spc="200" kern="0" dirty="0">
+            <a:pPr marL="0" indent="0">
+              <a:buNone/>
+            </a:pPr>
+            <a:r>
+              <a:rPr lang="en-US" sz="900" b="1" kern="0" spc="200" dirty="0">
                 <a:solidFill>
                   <a:srgbClr val="F97316"/>
                 </a:solidFill>
@@ -5740,29 +5830,6 @@
           </a:p>
         </p:txBody>
       </p:sp>
-      <p:pic>
-        <p:nvPicPr>
-          <p:cNvPr id="4" name="Image 0" descr="C:\Users\cesar\OneDrive\Escritorio\FREELANCE\SpotU\docs\assets\logo-horizontal.png">    </p:cNvPr>
-          <p:cNvPicPr>
-            <a:picLocks noChangeAspect="1"/>
-          </p:cNvPicPr>
-          <p:nvPr/>
-        </p:nvPicPr>
-        <p:blipFill>
-          <a:blip r:embed="rId1"/>
-          <a:srcRect l="0" r="0" t="0" b="0"/>
-          <a:stretch/>
-        </p:blipFill>
-        <p:spPr>
-          <a:xfrm>
-            <a:off x="7315200" y="292608"/>
-            <a:ext cx="1371600" cy="384048"/>
-          </a:xfrm>
-          <a:prstGeom prst="rect">
-            <a:avLst/>
-          </a:prstGeom>
-        </p:spPr>
-      </p:pic>
       <p:sp>
         <p:nvSpPr>
           <p:cNvPr id="5" name="Text 2"/>
@@ -5784,11 +5851,11 @@
           <a:bodyPr wrap="square" rtlCol="0" anchor="ctr"/>
           <a:lstStyle/>
           <a:p>
-            <a:pPr indent="0" marL="0">
-              <a:buNone/>
-            </a:pPr>
-            <a:r>
-              <a:rPr lang="en-US" sz="3000" b="1" dirty="0">
+            <a:pPr marL="0" indent="0">
+              <a:buNone/>
+            </a:pPr>
+            <a:r>
+              <a:rPr lang="en-US" sz="2400" b="1" dirty="0">
                 <a:solidFill>
                   <a:srgbClr val="0F172A"/>
                 </a:solidFill>
@@ -5796,9 +5863,25 @@
                 <a:ea typeface="Calibri" pitchFamily="34" charset="-122"/>
                 <a:cs typeface="Calibri" pitchFamily="34" charset="-120"/>
               </a:rPr>
-              <a:t>Para el SMB, la publicidad fuera de Google y Meta sigue siendo manual</a:t>
-            </a:r>
-            <a:endParaRPr lang="en-US" sz="3000" dirty="0"/>
+              <a:t>Para el SMB, la publicidad fuera de Google </a:t>
+            </a:r>
+          </a:p>
+          <a:p>
+            <a:pPr marL="0" indent="0">
+              <a:buNone/>
+            </a:pPr>
+            <a:r>
+              <a:rPr lang="en-US" sz="2400" b="1" dirty="0">
+                <a:solidFill>
+                  <a:srgbClr val="0F172A"/>
+                </a:solidFill>
+                <a:latin typeface="Calibri" pitchFamily="34" charset="0"/>
+                <a:ea typeface="Calibri" pitchFamily="34" charset="-122"/>
+                <a:cs typeface="Calibri" pitchFamily="34" charset="-120"/>
+              </a:rPr>
+              <a:t>y Meta sigue siendo manual</a:t>
+            </a:r>
+            <a:endParaRPr lang="en-US" sz="2400" dirty="0"/>
           </a:p>
         </p:txBody>
       </p:sp>
@@ -5824,6 +5907,13 @@
             <a:prstDash val="solid"/>
           </a:ln>
         </p:spPr>
+        <p:txBody>
+          <a:bodyPr/>
+          <a:lstStyle/>
+          <a:p>
+            <a:endParaRPr lang="es-CO"/>
+          </a:p>
+        </p:txBody>
       </p:sp>
       <p:sp>
         <p:nvSpPr>
@@ -5851,6 +5941,13 @@
             <a:prstDash val="solid"/>
           </a:ln>
         </p:spPr>
+        <p:txBody>
+          <a:bodyPr/>
+          <a:lstStyle/>
+          <a:p>
+            <a:endParaRPr lang="es-CO"/>
+          </a:p>
+        </p:txBody>
       </p:sp>
       <p:sp>
         <p:nvSpPr>
@@ -5876,6 +5973,13 @@
             <a:prstDash val="solid"/>
           </a:ln>
         </p:spPr>
+        <p:txBody>
+          <a:bodyPr/>
+          <a:lstStyle/>
+          <a:p>
+            <a:endParaRPr lang="es-CO"/>
+          </a:p>
+        </p:txBody>
       </p:sp>
       <p:sp>
         <p:nvSpPr>
@@ -5898,7 +6002,7 @@
           <a:bodyPr wrap="square" rtlCol="0" anchor="ctr"/>
           <a:lstStyle/>
           <a:p>
-            <a:pPr algn="ctr" indent="0" marL="0">
+            <a:pPr marL="0" indent="0" algn="ctr">
               <a:buNone/>
             </a:pPr>
             <a:r>
@@ -5937,7 +6041,7 @@
           <a:bodyPr wrap="square" rtlCol="0" anchor="ctr"/>
           <a:lstStyle/>
           <a:p>
-            <a:pPr indent="0" marL="0">
+            <a:pPr marL="0" indent="0">
               <a:buNone/>
             </a:pPr>
             <a:r>
@@ -5976,7 +6080,7 @@
           <a:bodyPr wrap="square" rtlCol="0" anchor="ctr"/>
           <a:lstStyle/>
           <a:p>
-            <a:pPr indent="0" marL="0">
+            <a:pPr marL="0" indent="0">
               <a:buNone/>
             </a:pPr>
             <a:r>
@@ -6020,6 +6124,13 @@
             <a:prstDash val="solid"/>
           </a:ln>
         </p:spPr>
+        <p:txBody>
+          <a:bodyPr/>
+          <a:lstStyle/>
+          <a:p>
+            <a:endParaRPr lang="es-CO"/>
+          </a:p>
+        </p:txBody>
       </p:sp>
       <p:sp>
         <p:nvSpPr>
@@ -6045,6 +6156,13 @@
             <a:prstDash val="solid"/>
           </a:ln>
         </p:spPr>
+        <p:txBody>
+          <a:bodyPr/>
+          <a:lstStyle/>
+          <a:p>
+            <a:endParaRPr lang="es-CO"/>
+          </a:p>
+        </p:txBody>
       </p:sp>
       <p:sp>
         <p:nvSpPr>
@@ -6067,7 +6185,7 @@
           <a:bodyPr wrap="square" rtlCol="0" anchor="ctr"/>
           <a:lstStyle/>
           <a:p>
-            <a:pPr algn="ctr" indent="0" marL="0">
+            <a:pPr marL="0" indent="0" algn="ctr">
               <a:buNone/>
             </a:pPr>
             <a:r>
@@ -6106,7 +6224,7 @@
           <a:bodyPr wrap="square" rtlCol="0" anchor="ctr"/>
           <a:lstStyle/>
           <a:p>
-            <a:pPr indent="0" marL="0">
+            <a:pPr marL="0" indent="0">
               <a:buNone/>
             </a:pPr>
             <a:r>
@@ -6145,7 +6263,7 @@
           <a:bodyPr wrap="square" rtlCol="0" anchor="ctr"/>
           <a:lstStyle/>
           <a:p>
-            <a:pPr indent="0" marL="0">
+            <a:pPr marL="0" indent="0">
               <a:buNone/>
             </a:pPr>
             <a:r>
@@ -6189,6 +6307,13 @@
             <a:prstDash val="solid"/>
           </a:ln>
         </p:spPr>
+        <p:txBody>
+          <a:bodyPr/>
+          <a:lstStyle/>
+          <a:p>
+            <a:endParaRPr lang="es-CO"/>
+          </a:p>
+        </p:txBody>
       </p:sp>
       <p:sp>
         <p:nvSpPr>
@@ -6214,6 +6339,13 @@
             <a:prstDash val="solid"/>
           </a:ln>
         </p:spPr>
+        <p:txBody>
+          <a:bodyPr/>
+          <a:lstStyle/>
+          <a:p>
+            <a:endParaRPr lang="es-CO"/>
+          </a:p>
+        </p:txBody>
       </p:sp>
       <p:sp>
         <p:nvSpPr>
@@ -6236,7 +6368,7 @@
           <a:bodyPr wrap="square" rtlCol="0" anchor="ctr"/>
           <a:lstStyle/>
           <a:p>
-            <a:pPr algn="ctr" indent="0" marL="0">
+            <a:pPr marL="0" indent="0" algn="ctr">
               <a:buNone/>
             </a:pPr>
             <a:r>
@@ -6275,7 +6407,7 @@
           <a:bodyPr wrap="square" rtlCol="0" anchor="ctr"/>
           <a:lstStyle/>
           <a:p>
-            <a:pPr indent="0" marL="0">
+            <a:pPr marL="0" indent="0">
               <a:buNone/>
             </a:pPr>
             <a:r>
@@ -6314,7 +6446,7 @@
           <a:bodyPr wrap="square" rtlCol="0" anchor="ctr"/>
           <a:lstStyle/>
           <a:p>
-            <a:pPr indent="0" marL="0">
+            <a:pPr marL="0" indent="0">
               <a:buNone/>
             </a:pPr>
             <a:r>
@@ -6353,7 +6485,7 @@
           <a:bodyPr wrap="square" rtlCol="0" anchor="ctr"/>
           <a:lstStyle/>
           <a:p>
-            <a:pPr algn="ctr" indent="0" marL="0">
+            <a:pPr marL="0" indent="0" algn="ctr">
               <a:buNone/>
             </a:pPr>
             <a:r>
@@ -6371,6 +6503,36 @@
           </a:p>
         </p:txBody>
       </p:sp>
+      <p:pic>
+        <p:nvPicPr>
+          <p:cNvPr id="24" name="Imagen 23">
+            <a:extLst>
+              <a:ext uri="{FF2B5EF4-FFF2-40B4-BE49-F238E27FC236}">
+                <a16:creationId xmlns:a16="http://schemas.microsoft.com/office/drawing/2014/main" id="{0CE588E5-E2D0-9F8E-1842-E480299CBCB0}"/>
+              </a:ext>
+            </a:extLst>
+          </p:cNvPr>
+          <p:cNvPicPr>
+            <a:picLocks noChangeAspect="1"/>
+          </p:cNvPicPr>
+          <p:nvPr/>
+        </p:nvPicPr>
+        <p:blipFill>
+          <a:blip r:embed="rId3"/>
+          <a:stretch>
+            <a:fillRect/>
+          </a:stretch>
+        </p:blipFill>
+        <p:spPr>
+          <a:xfrm>
+            <a:off x="7877556" y="143810"/>
+            <a:ext cx="1216152" cy="663356"/>
+          </a:xfrm>
+          <a:prstGeom prst="rect">
+            <a:avLst/>
+          </a:prstGeom>
+        </p:spPr>
+      </p:pic>
     </p:spTree>
   </p:cSld>
   <p:clrMapOvr>
@@ -6387,6 +6549,7 @@
         <a:solidFill>
           <a:srgbClr val="4F46E5"/>
         </a:solidFill>
+        <a:effectLst/>
       </p:bgPr>
     </p:bg>
     <p:spTree>
@@ -6424,11 +6587,11 @@
           <a:bodyPr wrap="square" rtlCol="0" anchor="ctr"/>
           <a:lstStyle/>
           <a:p>
-            <a:pPr indent="0" marL="0">
-              <a:buNone/>
-            </a:pPr>
-            <a:r>
-              <a:rPr lang="en-US" sz="1300" b="1" spc="100" kern="0" dirty="0">
+            <a:pPr marL="0" indent="0">
+              <a:buNone/>
+            </a:pPr>
+            <a:r>
+              <a:rPr lang="en-US" sz="1300" b="1" kern="0" spc="100" dirty="0">
                 <a:solidFill>
                   <a:srgbClr val="A5B4FC"/>
                 </a:solidFill>
@@ -6463,7 +6626,7 @@
           <a:bodyPr wrap="square" rtlCol="0" anchor="ctr"/>
           <a:lstStyle/>
           <a:p>
-            <a:pPr indent="0" marL="0">
+            <a:pPr marL="0" indent="0">
               <a:buNone/>
             </a:pPr>
             <a:r>
@@ -6475,7 +6638,29 @@
                 <a:ea typeface="Calibri" pitchFamily="34" charset="-122"/>
                 <a:cs typeface="Calibri" pitchFamily="34" charset="-120"/>
               </a:rPr>
-              <a:t>SpotU es un marketplace de publicidad de 3 lados con foco SMB</a:t>
+              <a:t>SpotU es un </a:t>
+            </a:r>
+            <a:r>
+              <a:rPr lang="en-US" sz="3000" b="1" dirty="0">
+                <a:solidFill>
+                  <a:schemeClr val="accent2"/>
+                </a:solidFill>
+                <a:latin typeface="Calibri" pitchFamily="34" charset="0"/>
+                <a:ea typeface="Calibri" pitchFamily="34" charset="-122"/>
+                <a:cs typeface="Calibri" pitchFamily="34" charset="-120"/>
+              </a:rPr>
+              <a:t>marketplace</a:t>
+            </a:r>
+            <a:r>
+              <a:rPr lang="en-US" sz="3000" b="1" dirty="0">
+                <a:solidFill>
+                  <a:srgbClr val="FFFFFF"/>
+                </a:solidFill>
+                <a:latin typeface="Calibri" pitchFamily="34" charset="0"/>
+                <a:ea typeface="Calibri" pitchFamily="34" charset="-122"/>
+                <a:cs typeface="Calibri" pitchFamily="34" charset="-120"/>
+              </a:rPr>
+              <a:t> de publicidad de 3 lados con foco SMB</a:t>
             </a:r>
             <a:endParaRPr lang="en-US" sz="3000" dirty="0"/>
           </a:p>
@@ -6507,6 +6692,13 @@
             <a:prstDash val="solid"/>
           </a:ln>
         </p:spPr>
+        <p:txBody>
+          <a:bodyPr/>
+          <a:lstStyle/>
+          <a:p>
+            <a:endParaRPr lang="es-CO"/>
+          </a:p>
+        </p:txBody>
       </p:sp>
       <p:sp>
         <p:nvSpPr>
@@ -6532,6 +6724,13 @@
             <a:prstDash val="solid"/>
           </a:ln>
         </p:spPr>
+        <p:txBody>
+          <a:bodyPr/>
+          <a:lstStyle/>
+          <a:p>
+            <a:endParaRPr lang="es-CO"/>
+          </a:p>
+        </p:txBody>
       </p:sp>
       <p:sp>
         <p:nvSpPr>
@@ -6554,7 +6753,7 @@
           <a:bodyPr wrap="square" rtlCol="0" anchor="ctr"/>
           <a:lstStyle/>
           <a:p>
-            <a:pPr algn="ctr" indent="0" marL="0">
+            <a:pPr marL="0" indent="0" algn="ctr">
               <a:buNone/>
             </a:pPr>
             <a:r>
@@ -6593,11 +6792,11 @@
           <a:bodyPr wrap="square" rtlCol="0" anchor="ctr"/>
           <a:lstStyle/>
           <a:p>
-            <a:pPr algn="ctr" indent="0" marL="0">
-              <a:buNone/>
-            </a:pPr>
-            <a:r>
-              <a:rPr lang="en-US" sz="1200" b="1" spc="100" kern="0" dirty="0">
+            <a:pPr marL="0" indent="0" algn="ctr">
+              <a:buNone/>
+            </a:pPr>
+            <a:r>
+              <a:rPr lang="en-US" sz="1200" b="1" kern="0" spc="100" dirty="0">
                 <a:solidFill>
                   <a:srgbClr val="818CF8"/>
                 </a:solidFill>
@@ -6632,7 +6831,7 @@
           <a:bodyPr wrap="square" rtlCol="0" anchor="ctr"/>
           <a:lstStyle/>
           <a:p>
-            <a:pPr algn="ctr" indent="0" marL="0">
+            <a:pPr marL="0" indent="0" algn="ctr">
               <a:buNone/>
             </a:pPr>
             <a:r>
@@ -6676,6 +6875,13 @@
             <a:prstDash val="solid"/>
           </a:ln>
         </p:spPr>
+        <p:txBody>
+          <a:bodyPr/>
+          <a:lstStyle/>
+          <a:p>
+            <a:endParaRPr lang="es-CO"/>
+          </a:p>
+        </p:txBody>
       </p:sp>
       <p:sp>
         <p:nvSpPr>
@@ -6701,6 +6907,13 @@
             <a:prstDash val="solid"/>
           </a:ln>
         </p:spPr>
+        <p:txBody>
+          <a:bodyPr/>
+          <a:lstStyle/>
+          <a:p>
+            <a:endParaRPr lang="es-CO"/>
+          </a:p>
+        </p:txBody>
       </p:sp>
       <p:sp>
         <p:nvSpPr>
@@ -6723,7 +6936,7 @@
           <a:bodyPr wrap="square" rtlCol="0" anchor="ctr"/>
           <a:lstStyle/>
           <a:p>
-            <a:pPr algn="ctr" indent="0" marL="0">
+            <a:pPr marL="0" indent="0" algn="ctr">
               <a:buNone/>
             </a:pPr>
             <a:r>
@@ -6762,11 +6975,11 @@
           <a:bodyPr wrap="square" rtlCol="0" anchor="ctr"/>
           <a:lstStyle/>
           <a:p>
-            <a:pPr algn="ctr" indent="0" marL="0">
-              <a:buNone/>
-            </a:pPr>
-            <a:r>
-              <a:rPr lang="en-US" sz="1200" b="1" spc="100" kern="0" dirty="0">
+            <a:pPr marL="0" indent="0" algn="ctr">
+              <a:buNone/>
+            </a:pPr>
+            <a:r>
+              <a:rPr lang="en-US" sz="1200" b="1" kern="0" spc="100" dirty="0">
                 <a:solidFill>
                   <a:srgbClr val="F97316"/>
                 </a:solidFill>
@@ -6801,7 +7014,7 @@
           <a:bodyPr wrap="square" rtlCol="0" anchor="ctr"/>
           <a:lstStyle/>
           <a:p>
-            <a:pPr algn="ctr" indent="0" marL="0">
+            <a:pPr marL="0" indent="0" algn="ctr">
               <a:buNone/>
             </a:pPr>
             <a:r>
@@ -6845,6 +7058,13 @@
             <a:prstDash val="solid"/>
           </a:ln>
         </p:spPr>
+        <p:txBody>
+          <a:bodyPr/>
+          <a:lstStyle/>
+          <a:p>
+            <a:endParaRPr lang="es-CO"/>
+          </a:p>
+        </p:txBody>
       </p:sp>
       <p:sp>
         <p:nvSpPr>
@@ -6870,6 +7090,13 @@
             <a:prstDash val="solid"/>
           </a:ln>
         </p:spPr>
+        <p:txBody>
+          <a:bodyPr/>
+          <a:lstStyle/>
+          <a:p>
+            <a:endParaRPr lang="es-CO"/>
+          </a:p>
+        </p:txBody>
       </p:sp>
       <p:sp>
         <p:nvSpPr>
@@ -6892,7 +7119,7 @@
           <a:bodyPr wrap="square" rtlCol="0" anchor="ctr"/>
           <a:lstStyle/>
           <a:p>
-            <a:pPr algn="ctr" indent="0" marL="0">
+            <a:pPr marL="0" indent="0" algn="ctr">
               <a:buNone/>
             </a:pPr>
             <a:r>
@@ -6931,11 +7158,11 @@
           <a:bodyPr wrap="square" rtlCol="0" anchor="ctr"/>
           <a:lstStyle/>
           <a:p>
-            <a:pPr algn="ctr" indent="0" marL="0">
-              <a:buNone/>
-            </a:pPr>
-            <a:r>
-              <a:rPr lang="en-US" sz="1200" b="1" spc="100" kern="0" dirty="0">
+            <a:pPr marL="0" indent="0" algn="ctr">
+              <a:buNone/>
+            </a:pPr>
+            <a:r>
+              <a:rPr lang="en-US" sz="1200" b="1" kern="0" spc="100" dirty="0">
                 <a:solidFill>
                   <a:srgbClr val="10B981"/>
                 </a:solidFill>
@@ -6970,7 +7197,7 @@
           <a:bodyPr wrap="square" rtlCol="0" anchor="ctr"/>
           <a:lstStyle/>
           <a:p>
-            <a:pPr algn="ctr" indent="0" marL="0">
+            <a:pPr marL="0" indent="0" algn="ctr">
               <a:buNone/>
             </a:pPr>
             <a:r>
@@ -7010,6 +7237,13 @@
             <a:prstDash val="solid"/>
           </a:ln>
         </p:spPr>
+        <p:txBody>
+          <a:bodyPr/>
+          <a:lstStyle/>
+          <a:p>
+            <a:endParaRPr lang="es-CO"/>
+          </a:p>
+        </p:txBody>
       </p:sp>
       <p:sp>
         <p:nvSpPr>
@@ -7033,6 +7267,13 @@
             <a:prstDash val="solid"/>
           </a:ln>
         </p:spPr>
+        <p:txBody>
+          <a:bodyPr/>
+          <a:lstStyle/>
+          <a:p>
+            <a:endParaRPr lang="es-CO"/>
+          </a:p>
+        </p:txBody>
       </p:sp>
     </p:spTree>
   </p:cSld>
@@ -7050,6 +7291,7 @@
         <a:solidFill>
           <a:srgbClr val="FFFFFF"/>
         </a:solidFill>
+        <a:effectLst/>
       </p:bgPr>
     </p:bg>
     <p:spTree>
@@ -7090,6 +7332,13 @@
             <a:prstDash val="solid"/>
           </a:ln>
         </p:spPr>
+        <p:txBody>
+          <a:bodyPr/>
+          <a:lstStyle/>
+          <a:p>
+            <a:endParaRPr lang="es-CO"/>
+          </a:p>
+        </p:txBody>
       </p:sp>
       <p:sp>
         <p:nvSpPr>
@@ -7112,11 +7361,11 @@
           <a:bodyPr wrap="square" rtlCol="0" anchor="ctr"/>
           <a:lstStyle/>
           <a:p>
-            <a:pPr indent="0" marL="0">
-              <a:buNone/>
-            </a:pPr>
-            <a:r>
-              <a:rPr lang="en-US" sz="900" b="1" spc="200" kern="0" dirty="0">
+            <a:pPr marL="0" indent="0">
+              <a:buNone/>
+            </a:pPr>
+            <a:r>
+              <a:rPr lang="en-US" sz="900" b="1" kern="0" spc="200" dirty="0">
                 <a:solidFill>
                   <a:srgbClr val="F97316"/>
                 </a:solidFill>
@@ -7130,29 +7379,6 @@
           </a:p>
         </p:txBody>
       </p:sp>
-      <p:pic>
-        <p:nvPicPr>
-          <p:cNvPr id="4" name="Image 0" descr="C:\Users\cesar\OneDrive\Escritorio\FREELANCE\SpotU\docs\assets\logo-horizontal.png">    </p:cNvPr>
-          <p:cNvPicPr>
-            <a:picLocks noChangeAspect="1"/>
-          </p:cNvPicPr>
-          <p:nvPr/>
-        </p:nvPicPr>
-        <p:blipFill>
-          <a:blip r:embed="rId1"/>
-          <a:srcRect l="0" r="0" t="0" b="0"/>
-          <a:stretch/>
-        </p:blipFill>
-        <p:spPr>
-          <a:xfrm>
-            <a:off x="7315200" y="292608"/>
-            <a:ext cx="1371600" cy="384048"/>
-          </a:xfrm>
-          <a:prstGeom prst="rect">
-            <a:avLst/>
-          </a:prstGeom>
-        </p:spPr>
-      </p:pic>
       <p:sp>
         <p:nvSpPr>
           <p:cNvPr id="5" name="Text 2"/>
@@ -7174,7 +7400,7 @@
           <a:bodyPr wrap="square" rtlCol="0" anchor="ctr"/>
           <a:lstStyle/>
           <a:p>
-            <a:pPr indent="0" marL="0">
+            <a:pPr marL="0" indent="0">
               <a:buNone/>
             </a:pPr>
             <a:r>
@@ -7214,6 +7440,13 @@
             <a:prstDash val="solid"/>
           </a:ln>
         </p:spPr>
+        <p:txBody>
+          <a:bodyPr/>
+          <a:lstStyle/>
+          <a:p>
+            <a:endParaRPr lang="es-CO"/>
+          </a:p>
+        </p:txBody>
       </p:sp>
       <p:sp>
         <p:nvSpPr>
@@ -7241,6 +7474,13 @@
             <a:prstDash val="solid"/>
           </a:ln>
         </p:spPr>
+        <p:txBody>
+          <a:bodyPr/>
+          <a:lstStyle/>
+          <a:p>
+            <a:endParaRPr lang="es-CO"/>
+          </a:p>
+        </p:txBody>
       </p:sp>
       <p:sp>
         <p:nvSpPr>
@@ -7251,19 +7491,19 @@
         <p:spPr>
           <a:xfrm>
             <a:off x="640080" y="1764792"/>
-            <a:ext cx="502920" cy="502920"/>
-          </a:xfrm>
-          <a:prstGeom prst="rect">
-            <a:avLst/>
-          </a:prstGeom>
-          <a:noFill/>
-          <a:ln/>
-        </p:spPr>
-        <p:txBody>
-          <a:bodyPr wrap="square" rtlCol="0" anchor="ctr"/>
-          <a:lstStyle/>
-          <a:p>
-            <a:pPr indent="0" marL="0">
+            <a:ext cx="621792" cy="502920"/>
+          </a:xfrm>
+          <a:prstGeom prst="rect">
+            <a:avLst/>
+          </a:prstGeom>
+          <a:noFill/>
+          <a:ln/>
+        </p:spPr>
+        <p:txBody>
+          <a:bodyPr wrap="square" rtlCol="0" anchor="ctr"/>
+          <a:lstStyle/>
+          <a:p>
+            <a:pPr marL="0" indent="0">
               <a:buNone/>
             </a:pPr>
             <a:r>
@@ -7302,7 +7542,7 @@
           <a:bodyPr wrap="square" rtlCol="0" anchor="ctr"/>
           <a:lstStyle/>
           <a:p>
-            <a:pPr indent="0" marL="0">
+            <a:pPr marL="0" indent="0">
               <a:buNone/>
             </a:pPr>
             <a:r>
@@ -7341,7 +7581,7 @@
           <a:bodyPr wrap="square" rtlCol="0" anchor="ctr"/>
           <a:lstStyle/>
           <a:p>
-            <a:pPr indent="0" marL="0">
+            <a:pPr marL="0" indent="0">
               <a:buNone/>
             </a:pPr>
             <a:r>
@@ -7385,6 +7625,13 @@
             <a:prstDash val="solid"/>
           </a:ln>
         </p:spPr>
+        <p:txBody>
+          <a:bodyPr/>
+          <a:lstStyle/>
+          <a:p>
+            <a:endParaRPr lang="es-CO"/>
+          </a:p>
+        </p:txBody>
       </p:sp>
       <p:sp>
         <p:nvSpPr>
@@ -7395,19 +7642,19 @@
         <p:spPr>
           <a:xfrm>
             <a:off x="4892040" y="1764792"/>
-            <a:ext cx="502920" cy="502920"/>
-          </a:xfrm>
-          <a:prstGeom prst="rect">
-            <a:avLst/>
-          </a:prstGeom>
-          <a:noFill/>
-          <a:ln/>
-        </p:spPr>
-        <p:txBody>
-          <a:bodyPr wrap="square" rtlCol="0" anchor="ctr"/>
-          <a:lstStyle/>
-          <a:p>
-            <a:pPr indent="0" marL="0">
+            <a:ext cx="621792" cy="502920"/>
+          </a:xfrm>
+          <a:prstGeom prst="rect">
+            <a:avLst/>
+          </a:prstGeom>
+          <a:noFill/>
+          <a:ln/>
+        </p:spPr>
+        <p:txBody>
+          <a:bodyPr wrap="square" rtlCol="0" anchor="ctr"/>
+          <a:lstStyle/>
+          <a:p>
+            <a:pPr marL="0" indent="0">
               <a:buNone/>
             </a:pPr>
             <a:r>
@@ -7446,7 +7693,7 @@
           <a:bodyPr wrap="square" rtlCol="0" anchor="ctr"/>
           <a:lstStyle/>
           <a:p>
-            <a:pPr indent="0" marL="0">
+            <a:pPr marL="0" indent="0">
               <a:buNone/>
             </a:pPr>
             <a:r>
@@ -7485,7 +7732,7 @@
           <a:bodyPr wrap="square" rtlCol="0" anchor="ctr"/>
           <a:lstStyle/>
           <a:p>
-            <a:pPr indent="0" marL="0">
+            <a:pPr marL="0" indent="0">
               <a:buNone/>
             </a:pPr>
             <a:r>
@@ -7529,6 +7776,13 @@
             <a:prstDash val="solid"/>
           </a:ln>
         </p:spPr>
+        <p:txBody>
+          <a:bodyPr/>
+          <a:lstStyle/>
+          <a:p>
+            <a:endParaRPr lang="es-CO"/>
+          </a:p>
+        </p:txBody>
       </p:sp>
       <p:sp>
         <p:nvSpPr>
@@ -7539,19 +7793,19 @@
         <p:spPr>
           <a:xfrm>
             <a:off x="640080" y="3364992"/>
-            <a:ext cx="502920" cy="502920"/>
-          </a:xfrm>
-          <a:prstGeom prst="rect">
-            <a:avLst/>
-          </a:prstGeom>
-          <a:noFill/>
-          <a:ln/>
-        </p:spPr>
-        <p:txBody>
-          <a:bodyPr wrap="square" rtlCol="0" anchor="ctr"/>
-          <a:lstStyle/>
-          <a:p>
-            <a:pPr indent="0" marL="0">
+            <a:ext cx="621792" cy="502920"/>
+          </a:xfrm>
+          <a:prstGeom prst="rect">
+            <a:avLst/>
+          </a:prstGeom>
+          <a:noFill/>
+          <a:ln/>
+        </p:spPr>
+        <p:txBody>
+          <a:bodyPr wrap="square" rtlCol="0" anchor="ctr"/>
+          <a:lstStyle/>
+          <a:p>
+            <a:pPr marL="0" indent="0">
               <a:buNone/>
             </a:pPr>
             <a:r>
@@ -7590,7 +7844,7 @@
           <a:bodyPr wrap="square" rtlCol="0" anchor="ctr"/>
           <a:lstStyle/>
           <a:p>
-            <a:pPr indent="0" marL="0">
+            <a:pPr marL="0" indent="0">
               <a:buNone/>
             </a:pPr>
             <a:r>
@@ -7629,7 +7883,7 @@
           <a:bodyPr wrap="square" rtlCol="0" anchor="ctr"/>
           <a:lstStyle/>
           <a:p>
-            <a:pPr indent="0" marL="0">
+            <a:pPr marL="0" indent="0">
               <a:buNone/>
             </a:pPr>
             <a:r>
@@ -7673,6 +7927,13 @@
             <a:prstDash val="solid"/>
           </a:ln>
         </p:spPr>
+        <p:txBody>
+          <a:bodyPr/>
+          <a:lstStyle/>
+          <a:p>
+            <a:endParaRPr lang="es-CO"/>
+          </a:p>
+        </p:txBody>
       </p:sp>
       <p:sp>
         <p:nvSpPr>
@@ -7683,19 +7944,19 @@
         <p:spPr>
           <a:xfrm>
             <a:off x="4892040" y="3364992"/>
-            <a:ext cx="502920" cy="502920"/>
-          </a:xfrm>
-          <a:prstGeom prst="rect">
-            <a:avLst/>
-          </a:prstGeom>
-          <a:noFill/>
-          <a:ln/>
-        </p:spPr>
-        <p:txBody>
-          <a:bodyPr wrap="square" rtlCol="0" anchor="ctr"/>
-          <a:lstStyle/>
-          <a:p>
-            <a:pPr indent="0" marL="0">
+            <a:ext cx="621792" cy="502920"/>
+          </a:xfrm>
+          <a:prstGeom prst="rect">
+            <a:avLst/>
+          </a:prstGeom>
+          <a:noFill/>
+          <a:ln/>
+        </p:spPr>
+        <p:txBody>
+          <a:bodyPr wrap="square" rtlCol="0" anchor="ctr"/>
+          <a:lstStyle/>
+          <a:p>
+            <a:pPr marL="0" indent="0">
               <a:buNone/>
             </a:pPr>
             <a:r>
@@ -7734,7 +7995,7 @@
           <a:bodyPr wrap="square" rtlCol="0" anchor="ctr"/>
           <a:lstStyle/>
           <a:p>
-            <a:pPr indent="0" marL="0">
+            <a:pPr marL="0" indent="0">
               <a:buNone/>
             </a:pPr>
             <a:r>
@@ -7773,7 +8034,7 @@
           <a:bodyPr wrap="square" rtlCol="0" anchor="ctr"/>
           <a:lstStyle/>
           <a:p>
-            <a:pPr indent="0" marL="0">
+            <a:pPr marL="0" indent="0">
               <a:buNone/>
             </a:pPr>
             <a:r>
@@ -7791,6 +8052,36 @@
           </a:p>
         </p:txBody>
       </p:sp>
+      <p:pic>
+        <p:nvPicPr>
+          <p:cNvPr id="24" name="Imagen 23">
+            <a:extLst>
+              <a:ext uri="{FF2B5EF4-FFF2-40B4-BE49-F238E27FC236}">
+                <a16:creationId xmlns:a16="http://schemas.microsoft.com/office/drawing/2014/main" id="{7DD34E98-0867-F2CF-64EF-0925A1455FFE}"/>
+              </a:ext>
+            </a:extLst>
+          </p:cNvPr>
+          <p:cNvPicPr>
+            <a:picLocks noChangeAspect="1"/>
+          </p:cNvPicPr>
+          <p:nvPr/>
+        </p:nvPicPr>
+        <p:blipFill>
+          <a:blip r:embed="rId3"/>
+          <a:stretch>
+            <a:fillRect/>
+          </a:stretch>
+        </p:blipFill>
+        <p:spPr>
+          <a:xfrm>
+            <a:off x="7877556" y="143810"/>
+            <a:ext cx="1216152" cy="663356"/>
+          </a:xfrm>
+          <a:prstGeom prst="rect">
+            <a:avLst/>
+          </a:prstGeom>
+        </p:spPr>
+      </p:pic>
     </p:spTree>
   </p:cSld>
   <p:clrMapOvr>
@@ -7807,6 +8098,7 @@
         <a:solidFill>
           <a:srgbClr val="0F172A"/>
         </a:solidFill>
+        <a:effectLst/>
       </p:bgPr>
     </p:bg>
     <p:spTree>
@@ -7844,11 +8136,11 @@
           <a:bodyPr wrap="square" rtlCol="0" anchor="ctr"/>
           <a:lstStyle/>
           <a:p>
-            <a:pPr indent="0" marL="0">
-              <a:buNone/>
-            </a:pPr>
-            <a:r>
-              <a:rPr lang="en-US" sz="1200" b="1" spc="100" kern="0" dirty="0">
+            <a:pPr marL="0" indent="0">
+              <a:buNone/>
+            </a:pPr>
+            <a:r>
+              <a:rPr lang="en-US" sz="1200" b="1" kern="0" spc="100" dirty="0">
                 <a:solidFill>
                   <a:srgbClr val="F97316"/>
                 </a:solidFill>
@@ -7883,7 +8175,7 @@
           <a:bodyPr wrap="square" rtlCol="0" anchor="ctr"/>
           <a:lstStyle/>
           <a:p>
-            <a:pPr indent="0" marL="0">
+            <a:pPr marL="0" indent="0">
               <a:buNone/>
             </a:pPr>
             <a:r>
@@ -7927,6 +8219,13 @@
             <a:prstDash val="solid"/>
           </a:ln>
         </p:spPr>
+        <p:txBody>
+          <a:bodyPr/>
+          <a:lstStyle/>
+          <a:p>
+            <a:endParaRPr lang="es-CO"/>
+          </a:p>
+        </p:txBody>
       </p:sp>
       <p:sp>
         <p:nvSpPr>
@@ -7952,6 +8251,13 @@
             <a:prstDash val="solid"/>
           </a:ln>
         </p:spPr>
+        <p:txBody>
+          <a:bodyPr/>
+          <a:lstStyle/>
+          <a:p>
+            <a:endParaRPr lang="es-CO"/>
+          </a:p>
+        </p:txBody>
       </p:sp>
       <p:sp>
         <p:nvSpPr>
@@ -7977,6 +8283,13 @@
             <a:prstDash val="solid"/>
           </a:ln>
         </p:spPr>
+        <p:txBody>
+          <a:bodyPr/>
+          <a:lstStyle/>
+          <a:p>
+            <a:endParaRPr lang="es-CO"/>
+          </a:p>
+        </p:txBody>
       </p:sp>
       <p:sp>
         <p:nvSpPr>
@@ -8002,6 +8315,13 @@
             <a:prstDash val="solid"/>
           </a:ln>
         </p:spPr>
+        <p:txBody>
+          <a:bodyPr/>
+          <a:lstStyle/>
+          <a:p>
+            <a:endParaRPr lang="es-CO"/>
+          </a:p>
+        </p:txBody>
       </p:sp>
       <p:sp>
         <p:nvSpPr>
@@ -8024,7 +8344,7 @@
           <a:bodyPr wrap="square" rtlCol="0" anchor="ctr"/>
           <a:lstStyle/>
           <a:p>
-            <a:pPr indent="0" marL="0">
+            <a:pPr marL="0" indent="0">
               <a:buNone/>
             </a:pPr>
             <a:r>
@@ -8044,15 +8364,15 @@
       </p:sp>
       <p:pic>
         <p:nvPicPr>
-          <p:cNvPr id="9" name="Image 0" descr="C:\Users\cesar\OneDrive\Escritorio\FREELANCE\SpotU\docs\assets\site_landing.png">    </p:cNvPr>
+          <p:cNvPr id="9" name="Image 0" descr="C:\Users\cesar\OneDrive\Escritorio\FREELANCE\SpotU\docs\assets\site_landing.png"/>
           <p:cNvPicPr>
             <a:picLocks noChangeAspect="1"/>
           </p:cNvPicPr>
           <p:nvPr/>
         </p:nvPicPr>
         <p:blipFill>
-          <a:blip r:embed="rId1"/>
-          <a:srcRect l="0" r="0" t="0" b="0"/>
+          <a:blip r:embed="rId3"/>
+          <a:srcRect/>
           <a:stretch/>
         </p:blipFill>
         <p:spPr>
@@ -8067,844 +8387,2620 @@
       </p:pic>
       <p:sp>
         <p:nvSpPr>
-          <p:cNvPr id="10" name="Shape 7"/>
-          <p:cNvSpPr/>
-          <p:nvPr/>
-        </p:nvSpPr>
-        <p:spPr>
-          <a:xfrm>
-            <a:off x="5760720" y="1554480"/>
-            <a:ext cx="256032" cy="256032"/>
-          </a:xfrm>
-          <a:prstGeom prst="roundRect">
-            <a:avLst>
-              <a:gd name="adj" fmla="val 17857"/>
-            </a:avLst>
-          </a:prstGeom>
-          <a:solidFill>
-            <a:srgbClr val="10B981"/>
-          </a:solidFill>
-          <a:ln w="12700">
+          <p:cNvPr id="12" name="Text 9"/>
+          <p:cNvSpPr/>
+          <p:nvPr/>
+        </p:nvSpPr>
+        <p:spPr>
+          <a:xfrm>
+            <a:off x="6108192" y="1508760"/>
+            <a:ext cx="3108960" cy="365760"/>
+          </a:xfrm>
+          <a:prstGeom prst="rect">
+            <a:avLst/>
+          </a:prstGeom>
+          <a:noFill/>
+          <a:ln/>
+        </p:spPr>
+        <p:txBody>
+          <a:bodyPr wrap="square" rtlCol="0" anchor="ctr"/>
+          <a:lstStyle/>
+          <a:p>
+            <a:pPr marL="0" indent="0">
+              <a:buNone/>
+            </a:pPr>
+            <a:r>
+              <a:rPr lang="en-US" sz="1200" dirty="0">
+                <a:solidFill>
+                  <a:srgbClr val="CBD5E1"/>
+                </a:solidFill>
+                <a:latin typeface="Calibri" pitchFamily="34" charset="0"/>
+                <a:ea typeface="Calibri" pitchFamily="34" charset="-122"/>
+                <a:cs typeface="Calibri" pitchFamily="34" charset="-120"/>
+              </a:rPr>
+              <a:t>Auth (email + Google OAuth)</a:t>
+            </a:r>
+            <a:endParaRPr lang="en-US" sz="1200" dirty="0"/>
+          </a:p>
+        </p:txBody>
+      </p:sp>
+      <p:sp>
+        <p:nvSpPr>
+          <p:cNvPr id="15" name="Text 12"/>
+          <p:cNvSpPr/>
+          <p:nvPr/>
+        </p:nvSpPr>
+        <p:spPr>
+          <a:xfrm>
+            <a:off x="6108192" y="1920240"/>
+            <a:ext cx="3108960" cy="365760"/>
+          </a:xfrm>
+          <a:prstGeom prst="rect">
+            <a:avLst/>
+          </a:prstGeom>
+          <a:noFill/>
+          <a:ln/>
+        </p:spPr>
+        <p:txBody>
+          <a:bodyPr wrap="square" rtlCol="0" anchor="ctr"/>
+          <a:lstStyle/>
+          <a:p>
+            <a:pPr marL="0" indent="0">
+              <a:buNone/>
+            </a:pPr>
+            <a:r>
+              <a:rPr lang="en-US" sz="1200" dirty="0">
+                <a:solidFill>
+                  <a:srgbClr val="CBD5E1"/>
+                </a:solidFill>
+                <a:latin typeface="Calibri" pitchFamily="34" charset="0"/>
+                <a:ea typeface="Calibri" pitchFamily="34" charset="-122"/>
+                <a:cs typeface="Calibri" pitchFamily="34" charset="-120"/>
+              </a:rPr>
+              <a:t>Feed con búsqueda y filtros</a:t>
+            </a:r>
+            <a:endParaRPr lang="en-US" sz="1200" dirty="0"/>
+          </a:p>
+        </p:txBody>
+      </p:sp>
+      <p:sp>
+        <p:nvSpPr>
+          <p:cNvPr id="18" name="Text 15"/>
+          <p:cNvSpPr/>
+          <p:nvPr/>
+        </p:nvSpPr>
+        <p:spPr>
+          <a:xfrm>
+            <a:off x="6108192" y="2331720"/>
+            <a:ext cx="3108960" cy="365760"/>
+          </a:xfrm>
+          <a:prstGeom prst="rect">
+            <a:avLst/>
+          </a:prstGeom>
+          <a:noFill/>
+          <a:ln/>
+        </p:spPr>
+        <p:txBody>
+          <a:bodyPr wrap="square" rtlCol="0" anchor="ctr"/>
+          <a:lstStyle/>
+          <a:p>
+            <a:pPr marL="0" indent="0">
+              <a:buNone/>
+            </a:pPr>
+            <a:r>
+              <a:rPr lang="en-US" sz="1200" dirty="0">
+                <a:solidFill>
+                  <a:srgbClr val="CBD5E1"/>
+                </a:solidFill>
+                <a:latin typeface="Calibri" pitchFamily="34" charset="0"/>
+                <a:ea typeface="Calibri" pitchFamily="34" charset="-122"/>
+                <a:cs typeface="Calibri" pitchFamily="34" charset="-120"/>
+              </a:rPr>
+              <a:t>Pagos Stripe (trial, suscripción, boost)</a:t>
+            </a:r>
+            <a:endParaRPr lang="en-US" sz="1200" dirty="0"/>
+          </a:p>
+        </p:txBody>
+      </p:sp>
+      <p:sp>
+        <p:nvSpPr>
+          <p:cNvPr id="21" name="Text 18"/>
+          <p:cNvSpPr/>
+          <p:nvPr/>
+        </p:nvSpPr>
+        <p:spPr>
+          <a:xfrm>
+            <a:off x="6108192" y="2743200"/>
+            <a:ext cx="3108960" cy="365760"/>
+          </a:xfrm>
+          <a:prstGeom prst="rect">
+            <a:avLst/>
+          </a:prstGeom>
+          <a:noFill/>
+          <a:ln/>
+        </p:spPr>
+        <p:txBody>
+          <a:bodyPr wrap="square" rtlCol="0" anchor="ctr"/>
+          <a:lstStyle/>
+          <a:p>
+            <a:pPr marL="0" indent="0">
+              <a:buNone/>
+            </a:pPr>
+            <a:r>
+              <a:rPr lang="en-US" sz="1200" dirty="0">
+                <a:solidFill>
+                  <a:srgbClr val="CBD5E1"/>
+                </a:solidFill>
+                <a:latin typeface="Calibri" pitchFamily="34" charset="0"/>
+                <a:ea typeface="Calibri" pitchFamily="34" charset="-122"/>
+                <a:cs typeface="Calibri" pitchFamily="34" charset="-120"/>
+              </a:rPr>
+              <a:t>Dashboard con stats por publicación</a:t>
+            </a:r>
+            <a:endParaRPr lang="en-US" sz="1200" dirty="0"/>
+          </a:p>
+        </p:txBody>
+      </p:sp>
+      <p:sp>
+        <p:nvSpPr>
+          <p:cNvPr id="24" name="Text 21"/>
+          <p:cNvSpPr/>
+          <p:nvPr/>
+        </p:nvSpPr>
+        <p:spPr>
+          <a:xfrm>
+            <a:off x="6108192" y="3154680"/>
+            <a:ext cx="3108960" cy="365760"/>
+          </a:xfrm>
+          <a:prstGeom prst="rect">
+            <a:avLst/>
+          </a:prstGeom>
+          <a:noFill/>
+          <a:ln/>
+        </p:spPr>
+        <p:txBody>
+          <a:bodyPr wrap="square" rtlCol="0" anchor="ctr"/>
+          <a:lstStyle/>
+          <a:p>
+            <a:pPr marL="0" indent="0">
+              <a:buNone/>
+            </a:pPr>
+            <a:r>
+              <a:rPr lang="en-US" sz="1200" dirty="0">
+                <a:solidFill>
+                  <a:srgbClr val="CBD5E1"/>
+                </a:solidFill>
+                <a:latin typeface="Calibri" pitchFamily="34" charset="0"/>
+                <a:ea typeface="Calibri" pitchFamily="34" charset="-122"/>
+                <a:cs typeface="Calibri" pitchFamily="34" charset="-120"/>
+              </a:rPr>
+              <a:t>Favoritos y perfiles públicos</a:t>
+            </a:r>
+            <a:endParaRPr lang="en-US" sz="1200" dirty="0"/>
+          </a:p>
+        </p:txBody>
+      </p:sp>
+      <p:sp>
+        <p:nvSpPr>
+          <p:cNvPr id="27" name="Text 24"/>
+          <p:cNvSpPr/>
+          <p:nvPr/>
+        </p:nvSpPr>
+        <p:spPr>
+          <a:xfrm>
+            <a:off x="6108192" y="3566160"/>
+            <a:ext cx="3108960" cy="365760"/>
+          </a:xfrm>
+          <a:prstGeom prst="rect">
+            <a:avLst/>
+          </a:prstGeom>
+          <a:noFill/>
+          <a:ln/>
+        </p:spPr>
+        <p:txBody>
+          <a:bodyPr wrap="square" rtlCol="0" anchor="ctr"/>
+          <a:lstStyle/>
+          <a:p>
+            <a:pPr marL="0" indent="0">
+              <a:buNone/>
+            </a:pPr>
+            <a:r>
+              <a:rPr lang="en-US" sz="1200" dirty="0">
+                <a:solidFill>
+                  <a:srgbClr val="CBD5E1"/>
+                </a:solidFill>
+                <a:latin typeface="Calibri" pitchFamily="34" charset="0"/>
+                <a:ea typeface="Calibri" pitchFamily="34" charset="-122"/>
+                <a:cs typeface="Calibri" pitchFamily="34" charset="-120"/>
+              </a:rPr>
+              <a:t>Programa pioneros (250 — 1 año gratis)</a:t>
+            </a:r>
+            <a:endParaRPr lang="en-US" sz="1200" dirty="0"/>
+          </a:p>
+        </p:txBody>
+      </p:sp>
+      <p:sp>
+        <p:nvSpPr>
+          <p:cNvPr id="30" name="Text 27"/>
+          <p:cNvSpPr/>
+          <p:nvPr/>
+        </p:nvSpPr>
+        <p:spPr>
+          <a:xfrm>
+            <a:off x="6108192" y="3977640"/>
+            <a:ext cx="3108960" cy="365760"/>
+          </a:xfrm>
+          <a:prstGeom prst="rect">
+            <a:avLst/>
+          </a:prstGeom>
+          <a:noFill/>
+          <a:ln/>
+        </p:spPr>
+        <p:txBody>
+          <a:bodyPr wrap="square" rtlCol="0" anchor="ctr"/>
+          <a:lstStyle/>
+          <a:p>
+            <a:pPr marL="0" indent="0">
+              <a:buNone/>
+            </a:pPr>
+            <a:r>
+              <a:rPr lang="en-US" sz="1200" dirty="0">
+                <a:solidFill>
+                  <a:srgbClr val="CBD5E1"/>
+                </a:solidFill>
+                <a:latin typeface="Calibri" pitchFamily="34" charset="0"/>
+                <a:ea typeface="Calibri" pitchFamily="34" charset="-122"/>
+                <a:cs typeface="Calibri" pitchFamily="34" charset="-120"/>
+              </a:rPr>
+              <a:t>Emails transaccionales con Resend</a:t>
+            </a:r>
+            <a:endParaRPr lang="en-US" sz="1200" dirty="0"/>
+          </a:p>
+        </p:txBody>
+      </p:sp>
+      <p:sp>
+        <p:nvSpPr>
+          <p:cNvPr id="33" name="Text 30"/>
+          <p:cNvSpPr/>
+          <p:nvPr/>
+        </p:nvSpPr>
+        <p:spPr>
+          <a:xfrm>
+            <a:off x="6108192" y="4389120"/>
+            <a:ext cx="3108960" cy="365760"/>
+          </a:xfrm>
+          <a:prstGeom prst="rect">
+            <a:avLst/>
+          </a:prstGeom>
+          <a:noFill/>
+          <a:ln/>
+        </p:spPr>
+        <p:txBody>
+          <a:bodyPr wrap="square" rtlCol="0" anchor="ctr"/>
+          <a:lstStyle/>
+          <a:p>
+            <a:pPr marL="0" indent="0">
+              <a:buNone/>
+            </a:pPr>
+            <a:r>
+              <a:rPr lang="en-US" sz="1200" dirty="0">
+                <a:solidFill>
+                  <a:srgbClr val="CBD5E1"/>
+                </a:solidFill>
+                <a:latin typeface="Calibri" pitchFamily="34" charset="0"/>
+                <a:ea typeface="Calibri" pitchFamily="34" charset="-122"/>
+                <a:cs typeface="Calibri" pitchFamily="34" charset="-120"/>
+              </a:rPr>
+              <a:t>Cron jobs (expiración pioneros)</a:t>
+            </a:r>
+            <a:endParaRPr lang="en-US" sz="1200" dirty="0"/>
+          </a:p>
+        </p:txBody>
+      </p:sp>
+      <p:grpSp>
+        <p:nvGrpSpPr>
+          <p:cNvPr id="34" name="Grupo 33">
+            <a:extLst>
+              <a:ext uri="{FF2B5EF4-FFF2-40B4-BE49-F238E27FC236}">
+                <a16:creationId xmlns:a16="http://schemas.microsoft.com/office/drawing/2014/main" id="{D9B4DBCF-7F24-02F6-C3D9-DBEBB9EB1CEC}"/>
+              </a:ext>
+            </a:extLst>
+          </p:cNvPr>
+          <p:cNvGrpSpPr/>
+          <p:nvPr/>
+        </p:nvGrpSpPr>
+        <p:grpSpPr>
+          <a:xfrm>
+            <a:off x="5687195" y="1554776"/>
+            <a:ext cx="347472" cy="259764"/>
+            <a:chOff x="5760720" y="1550748"/>
+            <a:chExt cx="347472" cy="259764"/>
+          </a:xfrm>
+        </p:grpSpPr>
+        <p:sp>
+          <p:nvSpPr>
+            <p:cNvPr id="35" name="Shape 7">
+              <a:extLst>
+                <a:ext uri="{FF2B5EF4-FFF2-40B4-BE49-F238E27FC236}">
+                  <a16:creationId xmlns:a16="http://schemas.microsoft.com/office/drawing/2014/main" id="{EE7C22C6-F76A-6CF3-5616-191AED48014C}"/>
+                </a:ext>
+              </a:extLst>
+            </p:cNvPr>
+            <p:cNvSpPr/>
+            <p:nvPr/>
+          </p:nvSpPr>
+          <p:spPr>
+            <a:xfrm>
+              <a:off x="5760720" y="1554480"/>
+              <a:ext cx="347472" cy="256032"/>
+            </a:xfrm>
+            <a:prstGeom prst="roundRect">
+              <a:avLst>
+                <a:gd name="adj" fmla="val 17857"/>
+              </a:avLst>
+            </a:prstGeom>
             <a:solidFill>
               <a:srgbClr val="10B981"/>
             </a:solidFill>
-            <a:prstDash val="solid"/>
-          </a:ln>
-        </p:spPr>
-      </p:sp>
-      <p:sp>
-        <p:nvSpPr>
-          <p:cNvPr id="11" name="Text 8"/>
-          <p:cNvSpPr/>
-          <p:nvPr/>
-        </p:nvSpPr>
-        <p:spPr>
-          <a:xfrm>
-            <a:off x="5760720" y="1554480"/>
-            <a:ext cx="256032" cy="256032"/>
-          </a:xfrm>
-          <a:prstGeom prst="rect">
-            <a:avLst/>
-          </a:prstGeom>
-          <a:noFill/>
-          <a:ln/>
-        </p:spPr>
-        <p:txBody>
-          <a:bodyPr wrap="square" rtlCol="0" anchor="ctr"/>
-          <a:lstStyle/>
-          <a:p>
-            <a:pPr algn="ctr" indent="0" marL="0">
-              <a:buNone/>
-            </a:pPr>
-            <a:r>
-              <a:rPr lang="en-US" sz="800" b="1" dirty="0">
-                <a:solidFill>
-                  <a:srgbClr val="FFFFFF"/>
-                </a:solidFill>
-                <a:latin typeface="Calibri" pitchFamily="34" charset="0"/>
-                <a:ea typeface="Calibri" pitchFamily="34" charset="-122"/>
-                <a:cs typeface="Calibri" pitchFamily="34" charset="-120"/>
-              </a:rPr>
-              <a:t>OK</a:t>
-            </a:r>
-            <a:endParaRPr lang="en-US" sz="800" dirty="0"/>
-          </a:p>
-        </p:txBody>
-      </p:sp>
-      <p:sp>
-        <p:nvSpPr>
-          <p:cNvPr id="12" name="Text 9"/>
-          <p:cNvSpPr/>
-          <p:nvPr/>
-        </p:nvSpPr>
-        <p:spPr>
-          <a:xfrm>
-            <a:off x="6108192" y="1508760"/>
-            <a:ext cx="3108960" cy="365760"/>
-          </a:xfrm>
-          <a:prstGeom prst="rect">
-            <a:avLst/>
-          </a:prstGeom>
-          <a:noFill/>
-          <a:ln/>
-        </p:spPr>
-        <p:txBody>
-          <a:bodyPr wrap="square" rtlCol="0" anchor="ctr"/>
-          <a:lstStyle/>
-          <a:p>
-            <a:pPr indent="0" marL="0">
-              <a:buNone/>
-            </a:pPr>
-            <a:r>
-              <a:rPr lang="en-US" sz="1200" dirty="0">
-                <a:solidFill>
-                  <a:srgbClr val="CBD5E1"/>
-                </a:solidFill>
-                <a:latin typeface="Calibri" pitchFamily="34" charset="0"/>
-                <a:ea typeface="Calibri" pitchFamily="34" charset="-122"/>
-                <a:cs typeface="Calibri" pitchFamily="34" charset="-120"/>
-              </a:rPr>
-              <a:t>Auth (email + Google OAuth)</a:t>
-            </a:r>
-            <a:endParaRPr lang="en-US" sz="1200" dirty="0"/>
-          </a:p>
-        </p:txBody>
-      </p:sp>
-      <p:sp>
-        <p:nvSpPr>
-          <p:cNvPr id="13" name="Shape 10"/>
-          <p:cNvSpPr/>
-          <p:nvPr/>
-        </p:nvSpPr>
-        <p:spPr>
-          <a:xfrm>
-            <a:off x="5760720" y="1965960"/>
-            <a:ext cx="256032" cy="256032"/>
-          </a:xfrm>
-          <a:prstGeom prst="roundRect">
-            <a:avLst>
-              <a:gd name="adj" fmla="val 17857"/>
-            </a:avLst>
-          </a:prstGeom>
-          <a:solidFill>
-            <a:srgbClr val="10B981"/>
-          </a:solidFill>
-          <a:ln w="12700">
+            <a:ln w="12700">
+              <a:solidFill>
+                <a:srgbClr val="10B981"/>
+              </a:solidFill>
+              <a:prstDash val="solid"/>
+            </a:ln>
+          </p:spPr>
+          <p:txBody>
+            <a:bodyPr/>
+            <a:lstStyle>
+              <a:lvl1pPr marL="0" algn="l" defTabSz="914400" rtl="0" eaLnBrk="1" latinLnBrk="0" hangingPunct="1">
+                <a:defRPr sz="1800" kern="1200">
+                  <a:solidFill>
+                    <a:schemeClr val="tx1"/>
+                  </a:solidFill>
+                  <a:latin typeface="+mn-lt"/>
+                  <a:ea typeface="+mn-ea"/>
+                  <a:cs typeface="+mn-cs"/>
+                </a:defRPr>
+              </a:lvl1pPr>
+              <a:lvl2pPr marL="457200" algn="l" defTabSz="914400" rtl="0" eaLnBrk="1" latinLnBrk="0" hangingPunct="1">
+                <a:defRPr sz="1800" kern="1200">
+                  <a:solidFill>
+                    <a:schemeClr val="tx1"/>
+                  </a:solidFill>
+                  <a:latin typeface="+mn-lt"/>
+                  <a:ea typeface="+mn-ea"/>
+                  <a:cs typeface="+mn-cs"/>
+                </a:defRPr>
+              </a:lvl2pPr>
+              <a:lvl3pPr marL="914400" algn="l" defTabSz="914400" rtl="0" eaLnBrk="1" latinLnBrk="0" hangingPunct="1">
+                <a:defRPr sz="1800" kern="1200">
+                  <a:solidFill>
+                    <a:schemeClr val="tx1"/>
+                  </a:solidFill>
+                  <a:latin typeface="+mn-lt"/>
+                  <a:ea typeface="+mn-ea"/>
+                  <a:cs typeface="+mn-cs"/>
+                </a:defRPr>
+              </a:lvl3pPr>
+              <a:lvl4pPr marL="1371600" algn="l" defTabSz="914400" rtl="0" eaLnBrk="1" latinLnBrk="0" hangingPunct="1">
+                <a:defRPr sz="1800" kern="1200">
+                  <a:solidFill>
+                    <a:schemeClr val="tx1"/>
+                  </a:solidFill>
+                  <a:latin typeface="+mn-lt"/>
+                  <a:ea typeface="+mn-ea"/>
+                  <a:cs typeface="+mn-cs"/>
+                </a:defRPr>
+              </a:lvl4pPr>
+              <a:lvl5pPr marL="1828800" algn="l" defTabSz="914400" rtl="0" eaLnBrk="1" latinLnBrk="0" hangingPunct="1">
+                <a:defRPr sz="1800" kern="1200">
+                  <a:solidFill>
+                    <a:schemeClr val="tx1"/>
+                  </a:solidFill>
+                  <a:latin typeface="+mn-lt"/>
+                  <a:ea typeface="+mn-ea"/>
+                  <a:cs typeface="+mn-cs"/>
+                </a:defRPr>
+              </a:lvl5pPr>
+              <a:lvl6pPr marL="2286000" algn="l" defTabSz="914400" rtl="0" eaLnBrk="1" latinLnBrk="0" hangingPunct="1">
+                <a:defRPr sz="1800" kern="1200">
+                  <a:solidFill>
+                    <a:schemeClr val="tx1"/>
+                  </a:solidFill>
+                  <a:latin typeface="+mn-lt"/>
+                  <a:ea typeface="+mn-ea"/>
+                  <a:cs typeface="+mn-cs"/>
+                </a:defRPr>
+              </a:lvl6pPr>
+              <a:lvl7pPr marL="2743200" algn="l" defTabSz="914400" rtl="0" eaLnBrk="1" latinLnBrk="0" hangingPunct="1">
+                <a:defRPr sz="1800" kern="1200">
+                  <a:solidFill>
+                    <a:schemeClr val="tx1"/>
+                  </a:solidFill>
+                  <a:latin typeface="+mn-lt"/>
+                  <a:ea typeface="+mn-ea"/>
+                  <a:cs typeface="+mn-cs"/>
+                </a:defRPr>
+              </a:lvl7pPr>
+              <a:lvl8pPr marL="3200400" algn="l" defTabSz="914400" rtl="0" eaLnBrk="1" latinLnBrk="0" hangingPunct="1">
+                <a:defRPr sz="1800" kern="1200">
+                  <a:solidFill>
+                    <a:schemeClr val="tx1"/>
+                  </a:solidFill>
+                  <a:latin typeface="+mn-lt"/>
+                  <a:ea typeface="+mn-ea"/>
+                  <a:cs typeface="+mn-cs"/>
+                </a:defRPr>
+              </a:lvl8pPr>
+              <a:lvl9pPr marL="3657600" algn="l" defTabSz="914400" rtl="0" eaLnBrk="1" latinLnBrk="0" hangingPunct="1">
+                <a:defRPr sz="1800" kern="1200">
+                  <a:solidFill>
+                    <a:schemeClr val="tx1"/>
+                  </a:solidFill>
+                  <a:latin typeface="+mn-lt"/>
+                  <a:ea typeface="+mn-ea"/>
+                  <a:cs typeface="+mn-cs"/>
+                </a:defRPr>
+              </a:lvl9pPr>
+            </a:lstStyle>
+            <a:p>
+              <a:endParaRPr lang="es-CO" sz="1600" dirty="0"/>
+            </a:p>
+          </p:txBody>
+        </p:sp>
+        <p:sp>
+          <p:nvSpPr>
+            <p:cNvPr id="36" name="Text 8">
+              <a:extLst>
+                <a:ext uri="{FF2B5EF4-FFF2-40B4-BE49-F238E27FC236}">
+                  <a16:creationId xmlns:a16="http://schemas.microsoft.com/office/drawing/2014/main" id="{A821D619-E121-110B-10E1-D961309077D8}"/>
+                </a:ext>
+              </a:extLst>
+            </p:cNvPr>
+            <p:cNvSpPr/>
+            <p:nvPr/>
+          </p:nvSpPr>
+          <p:spPr>
+            <a:xfrm>
+              <a:off x="5760720" y="1550748"/>
+              <a:ext cx="347472" cy="256032"/>
+            </a:xfrm>
+            <a:prstGeom prst="rect">
+              <a:avLst/>
+            </a:prstGeom>
+            <a:noFill/>
+            <a:ln/>
+          </p:spPr>
+          <p:txBody>
+            <a:bodyPr wrap="square" rtlCol="0" anchor="ctr"/>
+            <a:lstStyle>
+              <a:lvl1pPr marL="0" algn="l" defTabSz="914400" rtl="0" eaLnBrk="1" latinLnBrk="0" hangingPunct="1">
+                <a:defRPr sz="1800" kern="1200">
+                  <a:solidFill>
+                    <a:schemeClr val="tx1"/>
+                  </a:solidFill>
+                  <a:latin typeface="+mn-lt"/>
+                  <a:ea typeface="+mn-ea"/>
+                  <a:cs typeface="+mn-cs"/>
+                </a:defRPr>
+              </a:lvl1pPr>
+              <a:lvl2pPr marL="457200" algn="l" defTabSz="914400" rtl="0" eaLnBrk="1" latinLnBrk="0" hangingPunct="1">
+                <a:defRPr sz="1800" kern="1200">
+                  <a:solidFill>
+                    <a:schemeClr val="tx1"/>
+                  </a:solidFill>
+                  <a:latin typeface="+mn-lt"/>
+                  <a:ea typeface="+mn-ea"/>
+                  <a:cs typeface="+mn-cs"/>
+                </a:defRPr>
+              </a:lvl2pPr>
+              <a:lvl3pPr marL="914400" algn="l" defTabSz="914400" rtl="0" eaLnBrk="1" latinLnBrk="0" hangingPunct="1">
+                <a:defRPr sz="1800" kern="1200">
+                  <a:solidFill>
+                    <a:schemeClr val="tx1"/>
+                  </a:solidFill>
+                  <a:latin typeface="+mn-lt"/>
+                  <a:ea typeface="+mn-ea"/>
+                  <a:cs typeface="+mn-cs"/>
+                </a:defRPr>
+              </a:lvl3pPr>
+              <a:lvl4pPr marL="1371600" algn="l" defTabSz="914400" rtl="0" eaLnBrk="1" latinLnBrk="0" hangingPunct="1">
+                <a:defRPr sz="1800" kern="1200">
+                  <a:solidFill>
+                    <a:schemeClr val="tx1"/>
+                  </a:solidFill>
+                  <a:latin typeface="+mn-lt"/>
+                  <a:ea typeface="+mn-ea"/>
+                  <a:cs typeface="+mn-cs"/>
+                </a:defRPr>
+              </a:lvl4pPr>
+              <a:lvl5pPr marL="1828800" algn="l" defTabSz="914400" rtl="0" eaLnBrk="1" latinLnBrk="0" hangingPunct="1">
+                <a:defRPr sz="1800" kern="1200">
+                  <a:solidFill>
+                    <a:schemeClr val="tx1"/>
+                  </a:solidFill>
+                  <a:latin typeface="+mn-lt"/>
+                  <a:ea typeface="+mn-ea"/>
+                  <a:cs typeface="+mn-cs"/>
+                </a:defRPr>
+              </a:lvl5pPr>
+              <a:lvl6pPr marL="2286000" algn="l" defTabSz="914400" rtl="0" eaLnBrk="1" latinLnBrk="0" hangingPunct="1">
+                <a:defRPr sz="1800" kern="1200">
+                  <a:solidFill>
+                    <a:schemeClr val="tx1"/>
+                  </a:solidFill>
+                  <a:latin typeface="+mn-lt"/>
+                  <a:ea typeface="+mn-ea"/>
+                  <a:cs typeface="+mn-cs"/>
+                </a:defRPr>
+              </a:lvl6pPr>
+              <a:lvl7pPr marL="2743200" algn="l" defTabSz="914400" rtl="0" eaLnBrk="1" latinLnBrk="0" hangingPunct="1">
+                <a:defRPr sz="1800" kern="1200">
+                  <a:solidFill>
+                    <a:schemeClr val="tx1"/>
+                  </a:solidFill>
+                  <a:latin typeface="+mn-lt"/>
+                  <a:ea typeface="+mn-ea"/>
+                  <a:cs typeface="+mn-cs"/>
+                </a:defRPr>
+              </a:lvl7pPr>
+              <a:lvl8pPr marL="3200400" algn="l" defTabSz="914400" rtl="0" eaLnBrk="1" latinLnBrk="0" hangingPunct="1">
+                <a:defRPr sz="1800" kern="1200">
+                  <a:solidFill>
+                    <a:schemeClr val="tx1"/>
+                  </a:solidFill>
+                  <a:latin typeface="+mn-lt"/>
+                  <a:ea typeface="+mn-ea"/>
+                  <a:cs typeface="+mn-cs"/>
+                </a:defRPr>
+              </a:lvl8pPr>
+              <a:lvl9pPr marL="3657600" algn="l" defTabSz="914400" rtl="0" eaLnBrk="1" latinLnBrk="0" hangingPunct="1">
+                <a:defRPr sz="1800" kern="1200">
+                  <a:solidFill>
+                    <a:schemeClr val="tx1"/>
+                  </a:solidFill>
+                  <a:latin typeface="+mn-lt"/>
+                  <a:ea typeface="+mn-ea"/>
+                  <a:cs typeface="+mn-cs"/>
+                </a:defRPr>
+              </a:lvl9pPr>
+            </a:lstStyle>
+            <a:p>
+              <a:pPr marL="0" indent="0" algn="ctr">
+                <a:buNone/>
+              </a:pPr>
+              <a:r>
+                <a:rPr lang="en-US" sz="800" b="1" dirty="0">
+                  <a:solidFill>
+                    <a:srgbClr val="FFFFFF"/>
+                  </a:solidFill>
+                  <a:latin typeface="Calibri" pitchFamily="34" charset="0"/>
+                  <a:ea typeface="Calibri" pitchFamily="34" charset="-122"/>
+                  <a:cs typeface="Calibri" pitchFamily="34" charset="-120"/>
+                </a:rPr>
+                <a:t>OK</a:t>
+              </a:r>
+              <a:endParaRPr lang="en-US" sz="800" dirty="0"/>
+            </a:p>
+          </p:txBody>
+        </p:sp>
+      </p:grpSp>
+      <p:grpSp>
+        <p:nvGrpSpPr>
+          <p:cNvPr id="37" name="Grupo 36">
+            <a:extLst>
+              <a:ext uri="{FF2B5EF4-FFF2-40B4-BE49-F238E27FC236}">
+                <a16:creationId xmlns:a16="http://schemas.microsoft.com/office/drawing/2014/main" id="{1DE49714-E54A-E6BB-7E57-BEE026905619}"/>
+              </a:ext>
+            </a:extLst>
+          </p:cNvPr>
+          <p:cNvGrpSpPr/>
+          <p:nvPr/>
+        </p:nvGrpSpPr>
+        <p:grpSpPr>
+          <a:xfrm>
+            <a:off x="5687195" y="1967420"/>
+            <a:ext cx="347472" cy="259764"/>
+            <a:chOff x="5760720" y="1550748"/>
+            <a:chExt cx="347472" cy="259764"/>
+          </a:xfrm>
+        </p:grpSpPr>
+        <p:sp>
+          <p:nvSpPr>
+            <p:cNvPr id="38" name="Shape 7">
+              <a:extLst>
+                <a:ext uri="{FF2B5EF4-FFF2-40B4-BE49-F238E27FC236}">
+                  <a16:creationId xmlns:a16="http://schemas.microsoft.com/office/drawing/2014/main" id="{A4C497AB-A50A-E329-164C-550E47FFA3B5}"/>
+                </a:ext>
+              </a:extLst>
+            </p:cNvPr>
+            <p:cNvSpPr/>
+            <p:nvPr/>
+          </p:nvSpPr>
+          <p:spPr>
+            <a:xfrm>
+              <a:off x="5760720" y="1554480"/>
+              <a:ext cx="347472" cy="256032"/>
+            </a:xfrm>
+            <a:prstGeom prst="roundRect">
+              <a:avLst>
+                <a:gd name="adj" fmla="val 17857"/>
+              </a:avLst>
+            </a:prstGeom>
             <a:solidFill>
               <a:srgbClr val="10B981"/>
             </a:solidFill>
-            <a:prstDash val="solid"/>
-          </a:ln>
-        </p:spPr>
-      </p:sp>
-      <p:sp>
-        <p:nvSpPr>
-          <p:cNvPr id="14" name="Text 11"/>
-          <p:cNvSpPr/>
-          <p:nvPr/>
-        </p:nvSpPr>
-        <p:spPr>
-          <a:xfrm>
-            <a:off x="5760720" y="1965960"/>
-            <a:ext cx="256032" cy="256032"/>
-          </a:xfrm>
-          <a:prstGeom prst="rect">
-            <a:avLst/>
-          </a:prstGeom>
-          <a:noFill/>
-          <a:ln/>
-        </p:spPr>
-        <p:txBody>
-          <a:bodyPr wrap="square" rtlCol="0" anchor="ctr"/>
-          <a:lstStyle/>
-          <a:p>
-            <a:pPr algn="ctr" indent="0" marL="0">
-              <a:buNone/>
-            </a:pPr>
-            <a:r>
-              <a:rPr lang="en-US" sz="800" b="1" dirty="0">
-                <a:solidFill>
-                  <a:srgbClr val="FFFFFF"/>
-                </a:solidFill>
-                <a:latin typeface="Calibri" pitchFamily="34" charset="0"/>
-                <a:ea typeface="Calibri" pitchFamily="34" charset="-122"/>
-                <a:cs typeface="Calibri" pitchFamily="34" charset="-120"/>
-              </a:rPr>
-              <a:t>OK</a:t>
-            </a:r>
-            <a:endParaRPr lang="en-US" sz="800" dirty="0"/>
-          </a:p>
-        </p:txBody>
-      </p:sp>
-      <p:sp>
-        <p:nvSpPr>
-          <p:cNvPr id="15" name="Text 12"/>
-          <p:cNvSpPr/>
-          <p:nvPr/>
-        </p:nvSpPr>
-        <p:spPr>
-          <a:xfrm>
-            <a:off x="6108192" y="1920240"/>
-            <a:ext cx="3108960" cy="365760"/>
-          </a:xfrm>
-          <a:prstGeom prst="rect">
-            <a:avLst/>
-          </a:prstGeom>
-          <a:noFill/>
-          <a:ln/>
-        </p:spPr>
-        <p:txBody>
-          <a:bodyPr wrap="square" rtlCol="0" anchor="ctr"/>
-          <a:lstStyle/>
-          <a:p>
-            <a:pPr indent="0" marL="0">
-              <a:buNone/>
-            </a:pPr>
-            <a:r>
-              <a:rPr lang="en-US" sz="1200" dirty="0">
-                <a:solidFill>
-                  <a:srgbClr val="CBD5E1"/>
-                </a:solidFill>
-                <a:latin typeface="Calibri" pitchFamily="34" charset="0"/>
-                <a:ea typeface="Calibri" pitchFamily="34" charset="-122"/>
-                <a:cs typeface="Calibri" pitchFamily="34" charset="-120"/>
-              </a:rPr>
-              <a:t>Feed con búsqueda y filtros</a:t>
-            </a:r>
-            <a:endParaRPr lang="en-US" sz="1200" dirty="0"/>
-          </a:p>
-        </p:txBody>
-      </p:sp>
-      <p:sp>
-        <p:nvSpPr>
-          <p:cNvPr id="16" name="Shape 13"/>
-          <p:cNvSpPr/>
-          <p:nvPr/>
-        </p:nvSpPr>
-        <p:spPr>
-          <a:xfrm>
-            <a:off x="5760720" y="2377440"/>
-            <a:ext cx="256032" cy="256032"/>
-          </a:xfrm>
-          <a:prstGeom prst="roundRect">
-            <a:avLst>
-              <a:gd name="adj" fmla="val 17857"/>
-            </a:avLst>
-          </a:prstGeom>
-          <a:solidFill>
-            <a:srgbClr val="10B981"/>
-          </a:solidFill>
-          <a:ln w="12700">
+            <a:ln w="12700">
+              <a:solidFill>
+                <a:srgbClr val="10B981"/>
+              </a:solidFill>
+              <a:prstDash val="solid"/>
+            </a:ln>
+          </p:spPr>
+          <p:txBody>
+            <a:bodyPr/>
+            <a:lstStyle>
+              <a:lvl1pPr marL="0" algn="l" defTabSz="914400" rtl="0" eaLnBrk="1" latinLnBrk="0" hangingPunct="1">
+                <a:defRPr sz="1800" kern="1200">
+                  <a:solidFill>
+                    <a:schemeClr val="tx1"/>
+                  </a:solidFill>
+                  <a:latin typeface="+mn-lt"/>
+                  <a:ea typeface="+mn-ea"/>
+                  <a:cs typeface="+mn-cs"/>
+                </a:defRPr>
+              </a:lvl1pPr>
+              <a:lvl2pPr marL="457200" algn="l" defTabSz="914400" rtl="0" eaLnBrk="1" latinLnBrk="0" hangingPunct="1">
+                <a:defRPr sz="1800" kern="1200">
+                  <a:solidFill>
+                    <a:schemeClr val="tx1"/>
+                  </a:solidFill>
+                  <a:latin typeface="+mn-lt"/>
+                  <a:ea typeface="+mn-ea"/>
+                  <a:cs typeface="+mn-cs"/>
+                </a:defRPr>
+              </a:lvl2pPr>
+              <a:lvl3pPr marL="914400" algn="l" defTabSz="914400" rtl="0" eaLnBrk="1" latinLnBrk="0" hangingPunct="1">
+                <a:defRPr sz="1800" kern="1200">
+                  <a:solidFill>
+                    <a:schemeClr val="tx1"/>
+                  </a:solidFill>
+                  <a:latin typeface="+mn-lt"/>
+                  <a:ea typeface="+mn-ea"/>
+                  <a:cs typeface="+mn-cs"/>
+                </a:defRPr>
+              </a:lvl3pPr>
+              <a:lvl4pPr marL="1371600" algn="l" defTabSz="914400" rtl="0" eaLnBrk="1" latinLnBrk="0" hangingPunct="1">
+                <a:defRPr sz="1800" kern="1200">
+                  <a:solidFill>
+                    <a:schemeClr val="tx1"/>
+                  </a:solidFill>
+                  <a:latin typeface="+mn-lt"/>
+                  <a:ea typeface="+mn-ea"/>
+                  <a:cs typeface="+mn-cs"/>
+                </a:defRPr>
+              </a:lvl4pPr>
+              <a:lvl5pPr marL="1828800" algn="l" defTabSz="914400" rtl="0" eaLnBrk="1" latinLnBrk="0" hangingPunct="1">
+                <a:defRPr sz="1800" kern="1200">
+                  <a:solidFill>
+                    <a:schemeClr val="tx1"/>
+                  </a:solidFill>
+                  <a:latin typeface="+mn-lt"/>
+                  <a:ea typeface="+mn-ea"/>
+                  <a:cs typeface="+mn-cs"/>
+                </a:defRPr>
+              </a:lvl5pPr>
+              <a:lvl6pPr marL="2286000" algn="l" defTabSz="914400" rtl="0" eaLnBrk="1" latinLnBrk="0" hangingPunct="1">
+                <a:defRPr sz="1800" kern="1200">
+                  <a:solidFill>
+                    <a:schemeClr val="tx1"/>
+                  </a:solidFill>
+                  <a:latin typeface="+mn-lt"/>
+                  <a:ea typeface="+mn-ea"/>
+                  <a:cs typeface="+mn-cs"/>
+                </a:defRPr>
+              </a:lvl6pPr>
+              <a:lvl7pPr marL="2743200" algn="l" defTabSz="914400" rtl="0" eaLnBrk="1" latinLnBrk="0" hangingPunct="1">
+                <a:defRPr sz="1800" kern="1200">
+                  <a:solidFill>
+                    <a:schemeClr val="tx1"/>
+                  </a:solidFill>
+                  <a:latin typeface="+mn-lt"/>
+                  <a:ea typeface="+mn-ea"/>
+                  <a:cs typeface="+mn-cs"/>
+                </a:defRPr>
+              </a:lvl7pPr>
+              <a:lvl8pPr marL="3200400" algn="l" defTabSz="914400" rtl="0" eaLnBrk="1" latinLnBrk="0" hangingPunct="1">
+                <a:defRPr sz="1800" kern="1200">
+                  <a:solidFill>
+                    <a:schemeClr val="tx1"/>
+                  </a:solidFill>
+                  <a:latin typeface="+mn-lt"/>
+                  <a:ea typeface="+mn-ea"/>
+                  <a:cs typeface="+mn-cs"/>
+                </a:defRPr>
+              </a:lvl8pPr>
+              <a:lvl9pPr marL="3657600" algn="l" defTabSz="914400" rtl="0" eaLnBrk="1" latinLnBrk="0" hangingPunct="1">
+                <a:defRPr sz="1800" kern="1200">
+                  <a:solidFill>
+                    <a:schemeClr val="tx1"/>
+                  </a:solidFill>
+                  <a:latin typeface="+mn-lt"/>
+                  <a:ea typeface="+mn-ea"/>
+                  <a:cs typeface="+mn-cs"/>
+                </a:defRPr>
+              </a:lvl9pPr>
+            </a:lstStyle>
+            <a:p>
+              <a:endParaRPr lang="es-CO" sz="1600" dirty="0"/>
+            </a:p>
+          </p:txBody>
+        </p:sp>
+        <p:sp>
+          <p:nvSpPr>
+            <p:cNvPr id="39" name="Text 8">
+              <a:extLst>
+                <a:ext uri="{FF2B5EF4-FFF2-40B4-BE49-F238E27FC236}">
+                  <a16:creationId xmlns:a16="http://schemas.microsoft.com/office/drawing/2014/main" id="{FA69E69E-7DBB-B055-D2DE-9291C31285CA}"/>
+                </a:ext>
+              </a:extLst>
+            </p:cNvPr>
+            <p:cNvSpPr/>
+            <p:nvPr/>
+          </p:nvSpPr>
+          <p:spPr>
+            <a:xfrm>
+              <a:off x="5760720" y="1550748"/>
+              <a:ext cx="347472" cy="256032"/>
+            </a:xfrm>
+            <a:prstGeom prst="rect">
+              <a:avLst/>
+            </a:prstGeom>
+            <a:noFill/>
+            <a:ln/>
+          </p:spPr>
+          <p:txBody>
+            <a:bodyPr wrap="square" rtlCol="0" anchor="ctr"/>
+            <a:lstStyle>
+              <a:lvl1pPr marL="0" algn="l" defTabSz="914400" rtl="0" eaLnBrk="1" latinLnBrk="0" hangingPunct="1">
+                <a:defRPr sz="1800" kern="1200">
+                  <a:solidFill>
+                    <a:schemeClr val="tx1"/>
+                  </a:solidFill>
+                  <a:latin typeface="+mn-lt"/>
+                  <a:ea typeface="+mn-ea"/>
+                  <a:cs typeface="+mn-cs"/>
+                </a:defRPr>
+              </a:lvl1pPr>
+              <a:lvl2pPr marL="457200" algn="l" defTabSz="914400" rtl="0" eaLnBrk="1" latinLnBrk="0" hangingPunct="1">
+                <a:defRPr sz="1800" kern="1200">
+                  <a:solidFill>
+                    <a:schemeClr val="tx1"/>
+                  </a:solidFill>
+                  <a:latin typeface="+mn-lt"/>
+                  <a:ea typeface="+mn-ea"/>
+                  <a:cs typeface="+mn-cs"/>
+                </a:defRPr>
+              </a:lvl2pPr>
+              <a:lvl3pPr marL="914400" algn="l" defTabSz="914400" rtl="0" eaLnBrk="1" latinLnBrk="0" hangingPunct="1">
+                <a:defRPr sz="1800" kern="1200">
+                  <a:solidFill>
+                    <a:schemeClr val="tx1"/>
+                  </a:solidFill>
+                  <a:latin typeface="+mn-lt"/>
+                  <a:ea typeface="+mn-ea"/>
+                  <a:cs typeface="+mn-cs"/>
+                </a:defRPr>
+              </a:lvl3pPr>
+              <a:lvl4pPr marL="1371600" algn="l" defTabSz="914400" rtl="0" eaLnBrk="1" latinLnBrk="0" hangingPunct="1">
+                <a:defRPr sz="1800" kern="1200">
+                  <a:solidFill>
+                    <a:schemeClr val="tx1"/>
+                  </a:solidFill>
+                  <a:latin typeface="+mn-lt"/>
+                  <a:ea typeface="+mn-ea"/>
+                  <a:cs typeface="+mn-cs"/>
+                </a:defRPr>
+              </a:lvl4pPr>
+              <a:lvl5pPr marL="1828800" algn="l" defTabSz="914400" rtl="0" eaLnBrk="1" latinLnBrk="0" hangingPunct="1">
+                <a:defRPr sz="1800" kern="1200">
+                  <a:solidFill>
+                    <a:schemeClr val="tx1"/>
+                  </a:solidFill>
+                  <a:latin typeface="+mn-lt"/>
+                  <a:ea typeface="+mn-ea"/>
+                  <a:cs typeface="+mn-cs"/>
+                </a:defRPr>
+              </a:lvl5pPr>
+              <a:lvl6pPr marL="2286000" algn="l" defTabSz="914400" rtl="0" eaLnBrk="1" latinLnBrk="0" hangingPunct="1">
+                <a:defRPr sz="1800" kern="1200">
+                  <a:solidFill>
+                    <a:schemeClr val="tx1"/>
+                  </a:solidFill>
+                  <a:latin typeface="+mn-lt"/>
+                  <a:ea typeface="+mn-ea"/>
+                  <a:cs typeface="+mn-cs"/>
+                </a:defRPr>
+              </a:lvl6pPr>
+              <a:lvl7pPr marL="2743200" algn="l" defTabSz="914400" rtl="0" eaLnBrk="1" latinLnBrk="0" hangingPunct="1">
+                <a:defRPr sz="1800" kern="1200">
+                  <a:solidFill>
+                    <a:schemeClr val="tx1"/>
+                  </a:solidFill>
+                  <a:latin typeface="+mn-lt"/>
+                  <a:ea typeface="+mn-ea"/>
+                  <a:cs typeface="+mn-cs"/>
+                </a:defRPr>
+              </a:lvl7pPr>
+              <a:lvl8pPr marL="3200400" algn="l" defTabSz="914400" rtl="0" eaLnBrk="1" latinLnBrk="0" hangingPunct="1">
+                <a:defRPr sz="1800" kern="1200">
+                  <a:solidFill>
+                    <a:schemeClr val="tx1"/>
+                  </a:solidFill>
+                  <a:latin typeface="+mn-lt"/>
+                  <a:ea typeface="+mn-ea"/>
+                  <a:cs typeface="+mn-cs"/>
+                </a:defRPr>
+              </a:lvl8pPr>
+              <a:lvl9pPr marL="3657600" algn="l" defTabSz="914400" rtl="0" eaLnBrk="1" latinLnBrk="0" hangingPunct="1">
+                <a:defRPr sz="1800" kern="1200">
+                  <a:solidFill>
+                    <a:schemeClr val="tx1"/>
+                  </a:solidFill>
+                  <a:latin typeface="+mn-lt"/>
+                  <a:ea typeface="+mn-ea"/>
+                  <a:cs typeface="+mn-cs"/>
+                </a:defRPr>
+              </a:lvl9pPr>
+            </a:lstStyle>
+            <a:p>
+              <a:pPr marL="0" indent="0" algn="ctr">
+                <a:buNone/>
+              </a:pPr>
+              <a:r>
+                <a:rPr lang="en-US" sz="800" b="1" dirty="0">
+                  <a:solidFill>
+                    <a:srgbClr val="FFFFFF"/>
+                  </a:solidFill>
+                  <a:latin typeface="Calibri" pitchFamily="34" charset="0"/>
+                  <a:ea typeface="Calibri" pitchFamily="34" charset="-122"/>
+                  <a:cs typeface="Calibri" pitchFamily="34" charset="-120"/>
+                </a:rPr>
+                <a:t>OK</a:t>
+              </a:r>
+              <a:endParaRPr lang="en-US" sz="800" dirty="0"/>
+            </a:p>
+          </p:txBody>
+        </p:sp>
+      </p:grpSp>
+      <p:grpSp>
+        <p:nvGrpSpPr>
+          <p:cNvPr id="40" name="Grupo 39">
+            <a:extLst>
+              <a:ext uri="{FF2B5EF4-FFF2-40B4-BE49-F238E27FC236}">
+                <a16:creationId xmlns:a16="http://schemas.microsoft.com/office/drawing/2014/main" id="{0E11298A-85DC-F70D-9383-8F0409FD9AEB}"/>
+              </a:ext>
+            </a:extLst>
+          </p:cNvPr>
+          <p:cNvGrpSpPr/>
+          <p:nvPr/>
+        </p:nvGrpSpPr>
+        <p:grpSpPr>
+          <a:xfrm>
+            <a:off x="5687195" y="2380064"/>
+            <a:ext cx="347472" cy="259764"/>
+            <a:chOff x="5760720" y="1550748"/>
+            <a:chExt cx="347472" cy="259764"/>
+          </a:xfrm>
+        </p:grpSpPr>
+        <p:sp>
+          <p:nvSpPr>
+            <p:cNvPr id="41" name="Shape 7">
+              <a:extLst>
+                <a:ext uri="{FF2B5EF4-FFF2-40B4-BE49-F238E27FC236}">
+                  <a16:creationId xmlns:a16="http://schemas.microsoft.com/office/drawing/2014/main" id="{3C03007A-E637-81F5-8E34-1FB01BBCEB71}"/>
+                </a:ext>
+              </a:extLst>
+            </p:cNvPr>
+            <p:cNvSpPr/>
+            <p:nvPr/>
+          </p:nvSpPr>
+          <p:spPr>
+            <a:xfrm>
+              <a:off x="5760720" y="1554480"/>
+              <a:ext cx="347472" cy="256032"/>
+            </a:xfrm>
+            <a:prstGeom prst="roundRect">
+              <a:avLst>
+                <a:gd name="adj" fmla="val 17857"/>
+              </a:avLst>
+            </a:prstGeom>
             <a:solidFill>
               <a:srgbClr val="10B981"/>
             </a:solidFill>
-            <a:prstDash val="solid"/>
-          </a:ln>
-        </p:spPr>
-      </p:sp>
-      <p:sp>
-        <p:nvSpPr>
-          <p:cNvPr id="17" name="Text 14"/>
-          <p:cNvSpPr/>
-          <p:nvPr/>
-        </p:nvSpPr>
-        <p:spPr>
-          <a:xfrm>
-            <a:off x="5760720" y="2377440"/>
-            <a:ext cx="256032" cy="256032"/>
-          </a:xfrm>
-          <a:prstGeom prst="rect">
-            <a:avLst/>
-          </a:prstGeom>
-          <a:noFill/>
-          <a:ln/>
-        </p:spPr>
-        <p:txBody>
-          <a:bodyPr wrap="square" rtlCol="0" anchor="ctr"/>
-          <a:lstStyle/>
-          <a:p>
-            <a:pPr algn="ctr" indent="0" marL="0">
-              <a:buNone/>
-            </a:pPr>
-            <a:r>
-              <a:rPr lang="en-US" sz="800" b="1" dirty="0">
-                <a:solidFill>
-                  <a:srgbClr val="FFFFFF"/>
-                </a:solidFill>
-                <a:latin typeface="Calibri" pitchFamily="34" charset="0"/>
-                <a:ea typeface="Calibri" pitchFamily="34" charset="-122"/>
-                <a:cs typeface="Calibri" pitchFamily="34" charset="-120"/>
-              </a:rPr>
-              <a:t>OK</a:t>
-            </a:r>
-            <a:endParaRPr lang="en-US" sz="800" dirty="0"/>
-          </a:p>
-        </p:txBody>
-      </p:sp>
-      <p:sp>
-        <p:nvSpPr>
-          <p:cNvPr id="18" name="Text 15"/>
-          <p:cNvSpPr/>
-          <p:nvPr/>
-        </p:nvSpPr>
-        <p:spPr>
-          <a:xfrm>
-            <a:off x="6108192" y="2331720"/>
-            <a:ext cx="3108960" cy="365760"/>
-          </a:xfrm>
-          <a:prstGeom prst="rect">
-            <a:avLst/>
-          </a:prstGeom>
-          <a:noFill/>
-          <a:ln/>
-        </p:spPr>
-        <p:txBody>
-          <a:bodyPr wrap="square" rtlCol="0" anchor="ctr"/>
-          <a:lstStyle/>
-          <a:p>
-            <a:pPr indent="0" marL="0">
-              <a:buNone/>
-            </a:pPr>
-            <a:r>
-              <a:rPr lang="en-US" sz="1200" dirty="0">
-                <a:solidFill>
-                  <a:srgbClr val="CBD5E1"/>
-                </a:solidFill>
-                <a:latin typeface="Calibri" pitchFamily="34" charset="0"/>
-                <a:ea typeface="Calibri" pitchFamily="34" charset="-122"/>
-                <a:cs typeface="Calibri" pitchFamily="34" charset="-120"/>
-              </a:rPr>
-              <a:t>Pagos Stripe (trial, suscripción, boost)</a:t>
-            </a:r>
-            <a:endParaRPr lang="en-US" sz="1200" dirty="0"/>
-          </a:p>
-        </p:txBody>
-      </p:sp>
-      <p:sp>
-        <p:nvSpPr>
-          <p:cNvPr id="19" name="Shape 16"/>
-          <p:cNvSpPr/>
-          <p:nvPr/>
-        </p:nvSpPr>
-        <p:spPr>
-          <a:xfrm>
-            <a:off x="5760720" y="2788920"/>
-            <a:ext cx="256032" cy="256032"/>
-          </a:xfrm>
-          <a:prstGeom prst="roundRect">
-            <a:avLst>
-              <a:gd name="adj" fmla="val 17857"/>
-            </a:avLst>
-          </a:prstGeom>
-          <a:solidFill>
-            <a:srgbClr val="10B981"/>
-          </a:solidFill>
-          <a:ln w="12700">
+            <a:ln w="12700">
+              <a:solidFill>
+                <a:srgbClr val="10B981"/>
+              </a:solidFill>
+              <a:prstDash val="solid"/>
+            </a:ln>
+          </p:spPr>
+          <p:txBody>
+            <a:bodyPr/>
+            <a:lstStyle>
+              <a:lvl1pPr marL="0" algn="l" defTabSz="914400" rtl="0" eaLnBrk="1" latinLnBrk="0" hangingPunct="1">
+                <a:defRPr sz="1800" kern="1200">
+                  <a:solidFill>
+                    <a:schemeClr val="tx1"/>
+                  </a:solidFill>
+                  <a:latin typeface="+mn-lt"/>
+                  <a:ea typeface="+mn-ea"/>
+                  <a:cs typeface="+mn-cs"/>
+                </a:defRPr>
+              </a:lvl1pPr>
+              <a:lvl2pPr marL="457200" algn="l" defTabSz="914400" rtl="0" eaLnBrk="1" latinLnBrk="0" hangingPunct="1">
+                <a:defRPr sz="1800" kern="1200">
+                  <a:solidFill>
+                    <a:schemeClr val="tx1"/>
+                  </a:solidFill>
+                  <a:latin typeface="+mn-lt"/>
+                  <a:ea typeface="+mn-ea"/>
+                  <a:cs typeface="+mn-cs"/>
+                </a:defRPr>
+              </a:lvl2pPr>
+              <a:lvl3pPr marL="914400" algn="l" defTabSz="914400" rtl="0" eaLnBrk="1" latinLnBrk="0" hangingPunct="1">
+                <a:defRPr sz="1800" kern="1200">
+                  <a:solidFill>
+                    <a:schemeClr val="tx1"/>
+                  </a:solidFill>
+                  <a:latin typeface="+mn-lt"/>
+                  <a:ea typeface="+mn-ea"/>
+                  <a:cs typeface="+mn-cs"/>
+                </a:defRPr>
+              </a:lvl3pPr>
+              <a:lvl4pPr marL="1371600" algn="l" defTabSz="914400" rtl="0" eaLnBrk="1" latinLnBrk="0" hangingPunct="1">
+                <a:defRPr sz="1800" kern="1200">
+                  <a:solidFill>
+                    <a:schemeClr val="tx1"/>
+                  </a:solidFill>
+                  <a:latin typeface="+mn-lt"/>
+                  <a:ea typeface="+mn-ea"/>
+                  <a:cs typeface="+mn-cs"/>
+                </a:defRPr>
+              </a:lvl4pPr>
+              <a:lvl5pPr marL="1828800" algn="l" defTabSz="914400" rtl="0" eaLnBrk="1" latinLnBrk="0" hangingPunct="1">
+                <a:defRPr sz="1800" kern="1200">
+                  <a:solidFill>
+                    <a:schemeClr val="tx1"/>
+                  </a:solidFill>
+                  <a:latin typeface="+mn-lt"/>
+                  <a:ea typeface="+mn-ea"/>
+                  <a:cs typeface="+mn-cs"/>
+                </a:defRPr>
+              </a:lvl5pPr>
+              <a:lvl6pPr marL="2286000" algn="l" defTabSz="914400" rtl="0" eaLnBrk="1" latinLnBrk="0" hangingPunct="1">
+                <a:defRPr sz="1800" kern="1200">
+                  <a:solidFill>
+                    <a:schemeClr val="tx1"/>
+                  </a:solidFill>
+                  <a:latin typeface="+mn-lt"/>
+                  <a:ea typeface="+mn-ea"/>
+                  <a:cs typeface="+mn-cs"/>
+                </a:defRPr>
+              </a:lvl6pPr>
+              <a:lvl7pPr marL="2743200" algn="l" defTabSz="914400" rtl="0" eaLnBrk="1" latinLnBrk="0" hangingPunct="1">
+                <a:defRPr sz="1800" kern="1200">
+                  <a:solidFill>
+                    <a:schemeClr val="tx1"/>
+                  </a:solidFill>
+                  <a:latin typeface="+mn-lt"/>
+                  <a:ea typeface="+mn-ea"/>
+                  <a:cs typeface="+mn-cs"/>
+                </a:defRPr>
+              </a:lvl7pPr>
+              <a:lvl8pPr marL="3200400" algn="l" defTabSz="914400" rtl="0" eaLnBrk="1" latinLnBrk="0" hangingPunct="1">
+                <a:defRPr sz="1800" kern="1200">
+                  <a:solidFill>
+                    <a:schemeClr val="tx1"/>
+                  </a:solidFill>
+                  <a:latin typeface="+mn-lt"/>
+                  <a:ea typeface="+mn-ea"/>
+                  <a:cs typeface="+mn-cs"/>
+                </a:defRPr>
+              </a:lvl8pPr>
+              <a:lvl9pPr marL="3657600" algn="l" defTabSz="914400" rtl="0" eaLnBrk="1" latinLnBrk="0" hangingPunct="1">
+                <a:defRPr sz="1800" kern="1200">
+                  <a:solidFill>
+                    <a:schemeClr val="tx1"/>
+                  </a:solidFill>
+                  <a:latin typeface="+mn-lt"/>
+                  <a:ea typeface="+mn-ea"/>
+                  <a:cs typeface="+mn-cs"/>
+                </a:defRPr>
+              </a:lvl9pPr>
+            </a:lstStyle>
+            <a:p>
+              <a:endParaRPr lang="es-CO" sz="1600" dirty="0"/>
+            </a:p>
+          </p:txBody>
+        </p:sp>
+        <p:sp>
+          <p:nvSpPr>
+            <p:cNvPr id="42" name="Text 8">
+              <a:extLst>
+                <a:ext uri="{FF2B5EF4-FFF2-40B4-BE49-F238E27FC236}">
+                  <a16:creationId xmlns:a16="http://schemas.microsoft.com/office/drawing/2014/main" id="{425BD244-8D75-744B-175D-7C74AF455A76}"/>
+                </a:ext>
+              </a:extLst>
+            </p:cNvPr>
+            <p:cNvSpPr/>
+            <p:nvPr/>
+          </p:nvSpPr>
+          <p:spPr>
+            <a:xfrm>
+              <a:off x="5760720" y="1550748"/>
+              <a:ext cx="347472" cy="256032"/>
+            </a:xfrm>
+            <a:prstGeom prst="rect">
+              <a:avLst/>
+            </a:prstGeom>
+            <a:noFill/>
+            <a:ln/>
+          </p:spPr>
+          <p:txBody>
+            <a:bodyPr wrap="square" rtlCol="0" anchor="ctr"/>
+            <a:lstStyle>
+              <a:lvl1pPr marL="0" algn="l" defTabSz="914400" rtl="0" eaLnBrk="1" latinLnBrk="0" hangingPunct="1">
+                <a:defRPr sz="1800" kern="1200">
+                  <a:solidFill>
+                    <a:schemeClr val="tx1"/>
+                  </a:solidFill>
+                  <a:latin typeface="+mn-lt"/>
+                  <a:ea typeface="+mn-ea"/>
+                  <a:cs typeface="+mn-cs"/>
+                </a:defRPr>
+              </a:lvl1pPr>
+              <a:lvl2pPr marL="457200" algn="l" defTabSz="914400" rtl="0" eaLnBrk="1" latinLnBrk="0" hangingPunct="1">
+                <a:defRPr sz="1800" kern="1200">
+                  <a:solidFill>
+                    <a:schemeClr val="tx1"/>
+                  </a:solidFill>
+                  <a:latin typeface="+mn-lt"/>
+                  <a:ea typeface="+mn-ea"/>
+                  <a:cs typeface="+mn-cs"/>
+                </a:defRPr>
+              </a:lvl2pPr>
+              <a:lvl3pPr marL="914400" algn="l" defTabSz="914400" rtl="0" eaLnBrk="1" latinLnBrk="0" hangingPunct="1">
+                <a:defRPr sz="1800" kern="1200">
+                  <a:solidFill>
+                    <a:schemeClr val="tx1"/>
+                  </a:solidFill>
+                  <a:latin typeface="+mn-lt"/>
+                  <a:ea typeface="+mn-ea"/>
+                  <a:cs typeface="+mn-cs"/>
+                </a:defRPr>
+              </a:lvl3pPr>
+              <a:lvl4pPr marL="1371600" algn="l" defTabSz="914400" rtl="0" eaLnBrk="1" latinLnBrk="0" hangingPunct="1">
+                <a:defRPr sz="1800" kern="1200">
+                  <a:solidFill>
+                    <a:schemeClr val="tx1"/>
+                  </a:solidFill>
+                  <a:latin typeface="+mn-lt"/>
+                  <a:ea typeface="+mn-ea"/>
+                  <a:cs typeface="+mn-cs"/>
+                </a:defRPr>
+              </a:lvl4pPr>
+              <a:lvl5pPr marL="1828800" algn="l" defTabSz="914400" rtl="0" eaLnBrk="1" latinLnBrk="0" hangingPunct="1">
+                <a:defRPr sz="1800" kern="1200">
+                  <a:solidFill>
+                    <a:schemeClr val="tx1"/>
+                  </a:solidFill>
+                  <a:latin typeface="+mn-lt"/>
+                  <a:ea typeface="+mn-ea"/>
+                  <a:cs typeface="+mn-cs"/>
+                </a:defRPr>
+              </a:lvl5pPr>
+              <a:lvl6pPr marL="2286000" algn="l" defTabSz="914400" rtl="0" eaLnBrk="1" latinLnBrk="0" hangingPunct="1">
+                <a:defRPr sz="1800" kern="1200">
+                  <a:solidFill>
+                    <a:schemeClr val="tx1"/>
+                  </a:solidFill>
+                  <a:latin typeface="+mn-lt"/>
+                  <a:ea typeface="+mn-ea"/>
+                  <a:cs typeface="+mn-cs"/>
+                </a:defRPr>
+              </a:lvl6pPr>
+              <a:lvl7pPr marL="2743200" algn="l" defTabSz="914400" rtl="0" eaLnBrk="1" latinLnBrk="0" hangingPunct="1">
+                <a:defRPr sz="1800" kern="1200">
+                  <a:solidFill>
+                    <a:schemeClr val="tx1"/>
+                  </a:solidFill>
+                  <a:latin typeface="+mn-lt"/>
+                  <a:ea typeface="+mn-ea"/>
+                  <a:cs typeface="+mn-cs"/>
+                </a:defRPr>
+              </a:lvl7pPr>
+              <a:lvl8pPr marL="3200400" algn="l" defTabSz="914400" rtl="0" eaLnBrk="1" latinLnBrk="0" hangingPunct="1">
+                <a:defRPr sz="1800" kern="1200">
+                  <a:solidFill>
+                    <a:schemeClr val="tx1"/>
+                  </a:solidFill>
+                  <a:latin typeface="+mn-lt"/>
+                  <a:ea typeface="+mn-ea"/>
+                  <a:cs typeface="+mn-cs"/>
+                </a:defRPr>
+              </a:lvl8pPr>
+              <a:lvl9pPr marL="3657600" algn="l" defTabSz="914400" rtl="0" eaLnBrk="1" latinLnBrk="0" hangingPunct="1">
+                <a:defRPr sz="1800" kern="1200">
+                  <a:solidFill>
+                    <a:schemeClr val="tx1"/>
+                  </a:solidFill>
+                  <a:latin typeface="+mn-lt"/>
+                  <a:ea typeface="+mn-ea"/>
+                  <a:cs typeface="+mn-cs"/>
+                </a:defRPr>
+              </a:lvl9pPr>
+            </a:lstStyle>
+            <a:p>
+              <a:pPr marL="0" indent="0" algn="ctr">
+                <a:buNone/>
+              </a:pPr>
+              <a:r>
+                <a:rPr lang="en-US" sz="800" b="1" dirty="0">
+                  <a:solidFill>
+                    <a:srgbClr val="FFFFFF"/>
+                  </a:solidFill>
+                  <a:latin typeface="Calibri" pitchFamily="34" charset="0"/>
+                  <a:ea typeface="Calibri" pitchFamily="34" charset="-122"/>
+                  <a:cs typeface="Calibri" pitchFamily="34" charset="-120"/>
+                </a:rPr>
+                <a:t>OK</a:t>
+              </a:r>
+              <a:endParaRPr lang="en-US" sz="800" dirty="0"/>
+            </a:p>
+          </p:txBody>
+        </p:sp>
+      </p:grpSp>
+      <p:grpSp>
+        <p:nvGrpSpPr>
+          <p:cNvPr id="43" name="Grupo 42">
+            <a:extLst>
+              <a:ext uri="{FF2B5EF4-FFF2-40B4-BE49-F238E27FC236}">
+                <a16:creationId xmlns:a16="http://schemas.microsoft.com/office/drawing/2014/main" id="{FEE0418A-EBE8-904B-3594-F021CC8D445D}"/>
+              </a:ext>
+            </a:extLst>
+          </p:cNvPr>
+          <p:cNvGrpSpPr/>
+          <p:nvPr/>
+        </p:nvGrpSpPr>
+        <p:grpSpPr>
+          <a:xfrm>
+            <a:off x="5687195" y="2792708"/>
+            <a:ext cx="347472" cy="259764"/>
+            <a:chOff x="5760720" y="1550748"/>
+            <a:chExt cx="347472" cy="259764"/>
+          </a:xfrm>
+        </p:grpSpPr>
+        <p:sp>
+          <p:nvSpPr>
+            <p:cNvPr id="44" name="Shape 7">
+              <a:extLst>
+                <a:ext uri="{FF2B5EF4-FFF2-40B4-BE49-F238E27FC236}">
+                  <a16:creationId xmlns:a16="http://schemas.microsoft.com/office/drawing/2014/main" id="{65DC4A60-5682-6443-4B26-219EB41AD99E}"/>
+                </a:ext>
+              </a:extLst>
+            </p:cNvPr>
+            <p:cNvSpPr/>
+            <p:nvPr/>
+          </p:nvSpPr>
+          <p:spPr>
+            <a:xfrm>
+              <a:off x="5760720" y="1554480"/>
+              <a:ext cx="347472" cy="256032"/>
+            </a:xfrm>
+            <a:prstGeom prst="roundRect">
+              <a:avLst>
+                <a:gd name="adj" fmla="val 17857"/>
+              </a:avLst>
+            </a:prstGeom>
             <a:solidFill>
               <a:srgbClr val="10B981"/>
             </a:solidFill>
-            <a:prstDash val="solid"/>
-          </a:ln>
-        </p:spPr>
-      </p:sp>
-      <p:sp>
-        <p:nvSpPr>
-          <p:cNvPr id="20" name="Text 17"/>
-          <p:cNvSpPr/>
-          <p:nvPr/>
-        </p:nvSpPr>
-        <p:spPr>
-          <a:xfrm>
-            <a:off x="5760720" y="2788920"/>
-            <a:ext cx="256032" cy="256032"/>
-          </a:xfrm>
-          <a:prstGeom prst="rect">
-            <a:avLst/>
-          </a:prstGeom>
-          <a:noFill/>
-          <a:ln/>
-        </p:spPr>
-        <p:txBody>
-          <a:bodyPr wrap="square" rtlCol="0" anchor="ctr"/>
-          <a:lstStyle/>
-          <a:p>
-            <a:pPr algn="ctr" indent="0" marL="0">
-              <a:buNone/>
-            </a:pPr>
-            <a:r>
-              <a:rPr lang="en-US" sz="800" b="1" dirty="0">
-                <a:solidFill>
-                  <a:srgbClr val="FFFFFF"/>
-                </a:solidFill>
-                <a:latin typeface="Calibri" pitchFamily="34" charset="0"/>
-                <a:ea typeface="Calibri" pitchFamily="34" charset="-122"/>
-                <a:cs typeface="Calibri" pitchFamily="34" charset="-120"/>
-              </a:rPr>
-              <a:t>OK</a:t>
-            </a:r>
-            <a:endParaRPr lang="en-US" sz="800" dirty="0"/>
-          </a:p>
-        </p:txBody>
-      </p:sp>
-      <p:sp>
-        <p:nvSpPr>
-          <p:cNvPr id="21" name="Text 18"/>
-          <p:cNvSpPr/>
-          <p:nvPr/>
-        </p:nvSpPr>
-        <p:spPr>
-          <a:xfrm>
-            <a:off x="6108192" y="2743200"/>
-            <a:ext cx="3108960" cy="365760"/>
-          </a:xfrm>
-          <a:prstGeom prst="rect">
-            <a:avLst/>
-          </a:prstGeom>
-          <a:noFill/>
-          <a:ln/>
-        </p:spPr>
-        <p:txBody>
-          <a:bodyPr wrap="square" rtlCol="0" anchor="ctr"/>
-          <a:lstStyle/>
-          <a:p>
-            <a:pPr indent="0" marL="0">
-              <a:buNone/>
-            </a:pPr>
-            <a:r>
-              <a:rPr lang="en-US" sz="1200" dirty="0">
-                <a:solidFill>
-                  <a:srgbClr val="CBD5E1"/>
-                </a:solidFill>
-                <a:latin typeface="Calibri" pitchFamily="34" charset="0"/>
-                <a:ea typeface="Calibri" pitchFamily="34" charset="-122"/>
-                <a:cs typeface="Calibri" pitchFamily="34" charset="-120"/>
-              </a:rPr>
-              <a:t>Dashboard con stats por publicación</a:t>
-            </a:r>
-            <a:endParaRPr lang="en-US" sz="1200" dirty="0"/>
-          </a:p>
-        </p:txBody>
-      </p:sp>
-      <p:sp>
-        <p:nvSpPr>
-          <p:cNvPr id="22" name="Shape 19"/>
-          <p:cNvSpPr/>
-          <p:nvPr/>
-        </p:nvSpPr>
-        <p:spPr>
-          <a:xfrm>
-            <a:off x="5760720" y="3200400"/>
-            <a:ext cx="256032" cy="256032"/>
-          </a:xfrm>
-          <a:prstGeom prst="roundRect">
-            <a:avLst>
-              <a:gd name="adj" fmla="val 17857"/>
-            </a:avLst>
-          </a:prstGeom>
-          <a:solidFill>
-            <a:srgbClr val="10B981"/>
-          </a:solidFill>
-          <a:ln w="12700">
+            <a:ln w="12700">
+              <a:solidFill>
+                <a:srgbClr val="10B981"/>
+              </a:solidFill>
+              <a:prstDash val="solid"/>
+            </a:ln>
+          </p:spPr>
+          <p:txBody>
+            <a:bodyPr/>
+            <a:lstStyle>
+              <a:lvl1pPr marL="0" algn="l" defTabSz="914400" rtl="0" eaLnBrk="1" latinLnBrk="0" hangingPunct="1">
+                <a:defRPr sz="1800" kern="1200">
+                  <a:solidFill>
+                    <a:schemeClr val="tx1"/>
+                  </a:solidFill>
+                  <a:latin typeface="+mn-lt"/>
+                  <a:ea typeface="+mn-ea"/>
+                  <a:cs typeface="+mn-cs"/>
+                </a:defRPr>
+              </a:lvl1pPr>
+              <a:lvl2pPr marL="457200" algn="l" defTabSz="914400" rtl="0" eaLnBrk="1" latinLnBrk="0" hangingPunct="1">
+                <a:defRPr sz="1800" kern="1200">
+                  <a:solidFill>
+                    <a:schemeClr val="tx1"/>
+                  </a:solidFill>
+                  <a:latin typeface="+mn-lt"/>
+                  <a:ea typeface="+mn-ea"/>
+                  <a:cs typeface="+mn-cs"/>
+                </a:defRPr>
+              </a:lvl2pPr>
+              <a:lvl3pPr marL="914400" algn="l" defTabSz="914400" rtl="0" eaLnBrk="1" latinLnBrk="0" hangingPunct="1">
+                <a:defRPr sz="1800" kern="1200">
+                  <a:solidFill>
+                    <a:schemeClr val="tx1"/>
+                  </a:solidFill>
+                  <a:latin typeface="+mn-lt"/>
+                  <a:ea typeface="+mn-ea"/>
+                  <a:cs typeface="+mn-cs"/>
+                </a:defRPr>
+              </a:lvl3pPr>
+              <a:lvl4pPr marL="1371600" algn="l" defTabSz="914400" rtl="0" eaLnBrk="1" latinLnBrk="0" hangingPunct="1">
+                <a:defRPr sz="1800" kern="1200">
+                  <a:solidFill>
+                    <a:schemeClr val="tx1"/>
+                  </a:solidFill>
+                  <a:latin typeface="+mn-lt"/>
+                  <a:ea typeface="+mn-ea"/>
+                  <a:cs typeface="+mn-cs"/>
+                </a:defRPr>
+              </a:lvl4pPr>
+              <a:lvl5pPr marL="1828800" algn="l" defTabSz="914400" rtl="0" eaLnBrk="1" latinLnBrk="0" hangingPunct="1">
+                <a:defRPr sz="1800" kern="1200">
+                  <a:solidFill>
+                    <a:schemeClr val="tx1"/>
+                  </a:solidFill>
+                  <a:latin typeface="+mn-lt"/>
+                  <a:ea typeface="+mn-ea"/>
+                  <a:cs typeface="+mn-cs"/>
+                </a:defRPr>
+              </a:lvl5pPr>
+              <a:lvl6pPr marL="2286000" algn="l" defTabSz="914400" rtl="0" eaLnBrk="1" latinLnBrk="0" hangingPunct="1">
+                <a:defRPr sz="1800" kern="1200">
+                  <a:solidFill>
+                    <a:schemeClr val="tx1"/>
+                  </a:solidFill>
+                  <a:latin typeface="+mn-lt"/>
+                  <a:ea typeface="+mn-ea"/>
+                  <a:cs typeface="+mn-cs"/>
+                </a:defRPr>
+              </a:lvl6pPr>
+              <a:lvl7pPr marL="2743200" algn="l" defTabSz="914400" rtl="0" eaLnBrk="1" latinLnBrk="0" hangingPunct="1">
+                <a:defRPr sz="1800" kern="1200">
+                  <a:solidFill>
+                    <a:schemeClr val="tx1"/>
+                  </a:solidFill>
+                  <a:latin typeface="+mn-lt"/>
+                  <a:ea typeface="+mn-ea"/>
+                  <a:cs typeface="+mn-cs"/>
+                </a:defRPr>
+              </a:lvl7pPr>
+              <a:lvl8pPr marL="3200400" algn="l" defTabSz="914400" rtl="0" eaLnBrk="1" latinLnBrk="0" hangingPunct="1">
+                <a:defRPr sz="1800" kern="1200">
+                  <a:solidFill>
+                    <a:schemeClr val="tx1"/>
+                  </a:solidFill>
+                  <a:latin typeface="+mn-lt"/>
+                  <a:ea typeface="+mn-ea"/>
+                  <a:cs typeface="+mn-cs"/>
+                </a:defRPr>
+              </a:lvl8pPr>
+              <a:lvl9pPr marL="3657600" algn="l" defTabSz="914400" rtl="0" eaLnBrk="1" latinLnBrk="0" hangingPunct="1">
+                <a:defRPr sz="1800" kern="1200">
+                  <a:solidFill>
+                    <a:schemeClr val="tx1"/>
+                  </a:solidFill>
+                  <a:latin typeface="+mn-lt"/>
+                  <a:ea typeface="+mn-ea"/>
+                  <a:cs typeface="+mn-cs"/>
+                </a:defRPr>
+              </a:lvl9pPr>
+            </a:lstStyle>
+            <a:p>
+              <a:endParaRPr lang="es-CO" sz="1600" dirty="0"/>
+            </a:p>
+          </p:txBody>
+        </p:sp>
+        <p:sp>
+          <p:nvSpPr>
+            <p:cNvPr id="45" name="Text 8">
+              <a:extLst>
+                <a:ext uri="{FF2B5EF4-FFF2-40B4-BE49-F238E27FC236}">
+                  <a16:creationId xmlns:a16="http://schemas.microsoft.com/office/drawing/2014/main" id="{258CF8AB-8BED-4233-E99D-DBF7B46A2904}"/>
+                </a:ext>
+              </a:extLst>
+            </p:cNvPr>
+            <p:cNvSpPr/>
+            <p:nvPr/>
+          </p:nvSpPr>
+          <p:spPr>
+            <a:xfrm>
+              <a:off x="5760720" y="1550748"/>
+              <a:ext cx="347472" cy="256032"/>
+            </a:xfrm>
+            <a:prstGeom prst="rect">
+              <a:avLst/>
+            </a:prstGeom>
+            <a:noFill/>
+            <a:ln/>
+          </p:spPr>
+          <p:txBody>
+            <a:bodyPr wrap="square" rtlCol="0" anchor="ctr"/>
+            <a:lstStyle>
+              <a:lvl1pPr marL="0" algn="l" defTabSz="914400" rtl="0" eaLnBrk="1" latinLnBrk="0" hangingPunct="1">
+                <a:defRPr sz="1800" kern="1200">
+                  <a:solidFill>
+                    <a:schemeClr val="tx1"/>
+                  </a:solidFill>
+                  <a:latin typeface="+mn-lt"/>
+                  <a:ea typeface="+mn-ea"/>
+                  <a:cs typeface="+mn-cs"/>
+                </a:defRPr>
+              </a:lvl1pPr>
+              <a:lvl2pPr marL="457200" algn="l" defTabSz="914400" rtl="0" eaLnBrk="1" latinLnBrk="0" hangingPunct="1">
+                <a:defRPr sz="1800" kern="1200">
+                  <a:solidFill>
+                    <a:schemeClr val="tx1"/>
+                  </a:solidFill>
+                  <a:latin typeface="+mn-lt"/>
+                  <a:ea typeface="+mn-ea"/>
+                  <a:cs typeface="+mn-cs"/>
+                </a:defRPr>
+              </a:lvl2pPr>
+              <a:lvl3pPr marL="914400" algn="l" defTabSz="914400" rtl="0" eaLnBrk="1" latinLnBrk="0" hangingPunct="1">
+                <a:defRPr sz="1800" kern="1200">
+                  <a:solidFill>
+                    <a:schemeClr val="tx1"/>
+                  </a:solidFill>
+                  <a:latin typeface="+mn-lt"/>
+                  <a:ea typeface="+mn-ea"/>
+                  <a:cs typeface="+mn-cs"/>
+                </a:defRPr>
+              </a:lvl3pPr>
+              <a:lvl4pPr marL="1371600" algn="l" defTabSz="914400" rtl="0" eaLnBrk="1" latinLnBrk="0" hangingPunct="1">
+                <a:defRPr sz="1800" kern="1200">
+                  <a:solidFill>
+                    <a:schemeClr val="tx1"/>
+                  </a:solidFill>
+                  <a:latin typeface="+mn-lt"/>
+                  <a:ea typeface="+mn-ea"/>
+                  <a:cs typeface="+mn-cs"/>
+                </a:defRPr>
+              </a:lvl4pPr>
+              <a:lvl5pPr marL="1828800" algn="l" defTabSz="914400" rtl="0" eaLnBrk="1" latinLnBrk="0" hangingPunct="1">
+                <a:defRPr sz="1800" kern="1200">
+                  <a:solidFill>
+                    <a:schemeClr val="tx1"/>
+                  </a:solidFill>
+                  <a:latin typeface="+mn-lt"/>
+                  <a:ea typeface="+mn-ea"/>
+                  <a:cs typeface="+mn-cs"/>
+                </a:defRPr>
+              </a:lvl5pPr>
+              <a:lvl6pPr marL="2286000" algn="l" defTabSz="914400" rtl="0" eaLnBrk="1" latinLnBrk="0" hangingPunct="1">
+                <a:defRPr sz="1800" kern="1200">
+                  <a:solidFill>
+                    <a:schemeClr val="tx1"/>
+                  </a:solidFill>
+                  <a:latin typeface="+mn-lt"/>
+                  <a:ea typeface="+mn-ea"/>
+                  <a:cs typeface="+mn-cs"/>
+                </a:defRPr>
+              </a:lvl6pPr>
+              <a:lvl7pPr marL="2743200" algn="l" defTabSz="914400" rtl="0" eaLnBrk="1" latinLnBrk="0" hangingPunct="1">
+                <a:defRPr sz="1800" kern="1200">
+                  <a:solidFill>
+                    <a:schemeClr val="tx1"/>
+                  </a:solidFill>
+                  <a:latin typeface="+mn-lt"/>
+                  <a:ea typeface="+mn-ea"/>
+                  <a:cs typeface="+mn-cs"/>
+                </a:defRPr>
+              </a:lvl7pPr>
+              <a:lvl8pPr marL="3200400" algn="l" defTabSz="914400" rtl="0" eaLnBrk="1" latinLnBrk="0" hangingPunct="1">
+                <a:defRPr sz="1800" kern="1200">
+                  <a:solidFill>
+                    <a:schemeClr val="tx1"/>
+                  </a:solidFill>
+                  <a:latin typeface="+mn-lt"/>
+                  <a:ea typeface="+mn-ea"/>
+                  <a:cs typeface="+mn-cs"/>
+                </a:defRPr>
+              </a:lvl8pPr>
+              <a:lvl9pPr marL="3657600" algn="l" defTabSz="914400" rtl="0" eaLnBrk="1" latinLnBrk="0" hangingPunct="1">
+                <a:defRPr sz="1800" kern="1200">
+                  <a:solidFill>
+                    <a:schemeClr val="tx1"/>
+                  </a:solidFill>
+                  <a:latin typeface="+mn-lt"/>
+                  <a:ea typeface="+mn-ea"/>
+                  <a:cs typeface="+mn-cs"/>
+                </a:defRPr>
+              </a:lvl9pPr>
+            </a:lstStyle>
+            <a:p>
+              <a:pPr marL="0" indent="0" algn="ctr">
+                <a:buNone/>
+              </a:pPr>
+              <a:r>
+                <a:rPr lang="en-US" sz="800" b="1" dirty="0">
+                  <a:solidFill>
+                    <a:srgbClr val="FFFFFF"/>
+                  </a:solidFill>
+                  <a:latin typeface="Calibri" pitchFamily="34" charset="0"/>
+                  <a:ea typeface="Calibri" pitchFamily="34" charset="-122"/>
+                  <a:cs typeface="Calibri" pitchFamily="34" charset="-120"/>
+                </a:rPr>
+                <a:t>OK</a:t>
+              </a:r>
+              <a:endParaRPr lang="en-US" sz="800" dirty="0"/>
+            </a:p>
+          </p:txBody>
+        </p:sp>
+      </p:grpSp>
+      <p:grpSp>
+        <p:nvGrpSpPr>
+          <p:cNvPr id="46" name="Grupo 45">
+            <a:extLst>
+              <a:ext uri="{FF2B5EF4-FFF2-40B4-BE49-F238E27FC236}">
+                <a16:creationId xmlns:a16="http://schemas.microsoft.com/office/drawing/2014/main" id="{08F4701B-D05E-E379-0815-9C6664163BDB}"/>
+              </a:ext>
+            </a:extLst>
+          </p:cNvPr>
+          <p:cNvGrpSpPr/>
+          <p:nvPr/>
+        </p:nvGrpSpPr>
+        <p:grpSpPr>
+          <a:xfrm>
+            <a:off x="5687195" y="3205352"/>
+            <a:ext cx="347472" cy="259764"/>
+            <a:chOff x="5760720" y="1550748"/>
+            <a:chExt cx="347472" cy="259764"/>
+          </a:xfrm>
+        </p:grpSpPr>
+        <p:sp>
+          <p:nvSpPr>
+            <p:cNvPr id="47" name="Shape 7">
+              <a:extLst>
+                <a:ext uri="{FF2B5EF4-FFF2-40B4-BE49-F238E27FC236}">
+                  <a16:creationId xmlns:a16="http://schemas.microsoft.com/office/drawing/2014/main" id="{ED09ABEB-0DED-A45D-4091-CF3080C5D51C}"/>
+                </a:ext>
+              </a:extLst>
+            </p:cNvPr>
+            <p:cNvSpPr/>
+            <p:nvPr/>
+          </p:nvSpPr>
+          <p:spPr>
+            <a:xfrm>
+              <a:off x="5760720" y="1554480"/>
+              <a:ext cx="347472" cy="256032"/>
+            </a:xfrm>
+            <a:prstGeom prst="roundRect">
+              <a:avLst>
+                <a:gd name="adj" fmla="val 17857"/>
+              </a:avLst>
+            </a:prstGeom>
             <a:solidFill>
               <a:srgbClr val="10B981"/>
             </a:solidFill>
-            <a:prstDash val="solid"/>
-          </a:ln>
-        </p:spPr>
-      </p:sp>
-      <p:sp>
-        <p:nvSpPr>
-          <p:cNvPr id="23" name="Text 20"/>
-          <p:cNvSpPr/>
-          <p:nvPr/>
-        </p:nvSpPr>
-        <p:spPr>
-          <a:xfrm>
-            <a:off x="5760720" y="3200400"/>
-            <a:ext cx="256032" cy="256032"/>
-          </a:xfrm>
-          <a:prstGeom prst="rect">
-            <a:avLst/>
-          </a:prstGeom>
-          <a:noFill/>
-          <a:ln/>
-        </p:spPr>
-        <p:txBody>
-          <a:bodyPr wrap="square" rtlCol="0" anchor="ctr"/>
-          <a:lstStyle/>
-          <a:p>
-            <a:pPr algn="ctr" indent="0" marL="0">
-              <a:buNone/>
-            </a:pPr>
-            <a:r>
-              <a:rPr lang="en-US" sz="800" b="1" dirty="0">
-                <a:solidFill>
-                  <a:srgbClr val="FFFFFF"/>
-                </a:solidFill>
-                <a:latin typeface="Calibri" pitchFamily="34" charset="0"/>
-                <a:ea typeface="Calibri" pitchFamily="34" charset="-122"/>
-                <a:cs typeface="Calibri" pitchFamily="34" charset="-120"/>
-              </a:rPr>
-              <a:t>OK</a:t>
-            </a:r>
-            <a:endParaRPr lang="en-US" sz="800" dirty="0"/>
-          </a:p>
-        </p:txBody>
-      </p:sp>
-      <p:sp>
-        <p:nvSpPr>
-          <p:cNvPr id="24" name="Text 21"/>
-          <p:cNvSpPr/>
-          <p:nvPr/>
-        </p:nvSpPr>
-        <p:spPr>
-          <a:xfrm>
-            <a:off x="6108192" y="3154680"/>
-            <a:ext cx="3108960" cy="365760"/>
-          </a:xfrm>
-          <a:prstGeom prst="rect">
-            <a:avLst/>
-          </a:prstGeom>
-          <a:noFill/>
-          <a:ln/>
-        </p:spPr>
-        <p:txBody>
-          <a:bodyPr wrap="square" rtlCol="0" anchor="ctr"/>
-          <a:lstStyle/>
-          <a:p>
-            <a:pPr indent="0" marL="0">
-              <a:buNone/>
-            </a:pPr>
-            <a:r>
-              <a:rPr lang="en-US" sz="1200" dirty="0">
-                <a:solidFill>
-                  <a:srgbClr val="CBD5E1"/>
-                </a:solidFill>
-                <a:latin typeface="Calibri" pitchFamily="34" charset="0"/>
-                <a:ea typeface="Calibri" pitchFamily="34" charset="-122"/>
-                <a:cs typeface="Calibri" pitchFamily="34" charset="-120"/>
-              </a:rPr>
-              <a:t>Favoritos y perfiles públicos</a:t>
-            </a:r>
-            <a:endParaRPr lang="en-US" sz="1200" dirty="0"/>
-          </a:p>
-        </p:txBody>
-      </p:sp>
-      <p:sp>
-        <p:nvSpPr>
-          <p:cNvPr id="25" name="Shape 22"/>
-          <p:cNvSpPr/>
-          <p:nvPr/>
-        </p:nvSpPr>
-        <p:spPr>
-          <a:xfrm>
-            <a:off x="5760720" y="3611880"/>
-            <a:ext cx="256032" cy="256032"/>
-          </a:xfrm>
-          <a:prstGeom prst="roundRect">
-            <a:avLst>
-              <a:gd name="adj" fmla="val 17857"/>
-            </a:avLst>
-          </a:prstGeom>
-          <a:solidFill>
-            <a:srgbClr val="10B981"/>
-          </a:solidFill>
-          <a:ln w="12700">
+            <a:ln w="12700">
+              <a:solidFill>
+                <a:srgbClr val="10B981"/>
+              </a:solidFill>
+              <a:prstDash val="solid"/>
+            </a:ln>
+          </p:spPr>
+          <p:txBody>
+            <a:bodyPr/>
+            <a:lstStyle>
+              <a:lvl1pPr marL="0" algn="l" defTabSz="914400" rtl="0" eaLnBrk="1" latinLnBrk="0" hangingPunct="1">
+                <a:defRPr sz="1800" kern="1200">
+                  <a:solidFill>
+                    <a:schemeClr val="tx1"/>
+                  </a:solidFill>
+                  <a:latin typeface="+mn-lt"/>
+                  <a:ea typeface="+mn-ea"/>
+                  <a:cs typeface="+mn-cs"/>
+                </a:defRPr>
+              </a:lvl1pPr>
+              <a:lvl2pPr marL="457200" algn="l" defTabSz="914400" rtl="0" eaLnBrk="1" latinLnBrk="0" hangingPunct="1">
+                <a:defRPr sz="1800" kern="1200">
+                  <a:solidFill>
+                    <a:schemeClr val="tx1"/>
+                  </a:solidFill>
+                  <a:latin typeface="+mn-lt"/>
+                  <a:ea typeface="+mn-ea"/>
+                  <a:cs typeface="+mn-cs"/>
+                </a:defRPr>
+              </a:lvl2pPr>
+              <a:lvl3pPr marL="914400" algn="l" defTabSz="914400" rtl="0" eaLnBrk="1" latinLnBrk="0" hangingPunct="1">
+                <a:defRPr sz="1800" kern="1200">
+                  <a:solidFill>
+                    <a:schemeClr val="tx1"/>
+                  </a:solidFill>
+                  <a:latin typeface="+mn-lt"/>
+                  <a:ea typeface="+mn-ea"/>
+                  <a:cs typeface="+mn-cs"/>
+                </a:defRPr>
+              </a:lvl3pPr>
+              <a:lvl4pPr marL="1371600" algn="l" defTabSz="914400" rtl="0" eaLnBrk="1" latinLnBrk="0" hangingPunct="1">
+                <a:defRPr sz="1800" kern="1200">
+                  <a:solidFill>
+                    <a:schemeClr val="tx1"/>
+                  </a:solidFill>
+                  <a:latin typeface="+mn-lt"/>
+                  <a:ea typeface="+mn-ea"/>
+                  <a:cs typeface="+mn-cs"/>
+                </a:defRPr>
+              </a:lvl4pPr>
+              <a:lvl5pPr marL="1828800" algn="l" defTabSz="914400" rtl="0" eaLnBrk="1" latinLnBrk="0" hangingPunct="1">
+                <a:defRPr sz="1800" kern="1200">
+                  <a:solidFill>
+                    <a:schemeClr val="tx1"/>
+                  </a:solidFill>
+                  <a:latin typeface="+mn-lt"/>
+                  <a:ea typeface="+mn-ea"/>
+                  <a:cs typeface="+mn-cs"/>
+                </a:defRPr>
+              </a:lvl5pPr>
+              <a:lvl6pPr marL="2286000" algn="l" defTabSz="914400" rtl="0" eaLnBrk="1" latinLnBrk="0" hangingPunct="1">
+                <a:defRPr sz="1800" kern="1200">
+                  <a:solidFill>
+                    <a:schemeClr val="tx1"/>
+                  </a:solidFill>
+                  <a:latin typeface="+mn-lt"/>
+                  <a:ea typeface="+mn-ea"/>
+                  <a:cs typeface="+mn-cs"/>
+                </a:defRPr>
+              </a:lvl6pPr>
+              <a:lvl7pPr marL="2743200" algn="l" defTabSz="914400" rtl="0" eaLnBrk="1" latinLnBrk="0" hangingPunct="1">
+                <a:defRPr sz="1800" kern="1200">
+                  <a:solidFill>
+                    <a:schemeClr val="tx1"/>
+                  </a:solidFill>
+                  <a:latin typeface="+mn-lt"/>
+                  <a:ea typeface="+mn-ea"/>
+                  <a:cs typeface="+mn-cs"/>
+                </a:defRPr>
+              </a:lvl7pPr>
+              <a:lvl8pPr marL="3200400" algn="l" defTabSz="914400" rtl="0" eaLnBrk="1" latinLnBrk="0" hangingPunct="1">
+                <a:defRPr sz="1800" kern="1200">
+                  <a:solidFill>
+                    <a:schemeClr val="tx1"/>
+                  </a:solidFill>
+                  <a:latin typeface="+mn-lt"/>
+                  <a:ea typeface="+mn-ea"/>
+                  <a:cs typeface="+mn-cs"/>
+                </a:defRPr>
+              </a:lvl8pPr>
+              <a:lvl9pPr marL="3657600" algn="l" defTabSz="914400" rtl="0" eaLnBrk="1" latinLnBrk="0" hangingPunct="1">
+                <a:defRPr sz="1800" kern="1200">
+                  <a:solidFill>
+                    <a:schemeClr val="tx1"/>
+                  </a:solidFill>
+                  <a:latin typeface="+mn-lt"/>
+                  <a:ea typeface="+mn-ea"/>
+                  <a:cs typeface="+mn-cs"/>
+                </a:defRPr>
+              </a:lvl9pPr>
+            </a:lstStyle>
+            <a:p>
+              <a:endParaRPr lang="es-CO" sz="1600" dirty="0"/>
+            </a:p>
+          </p:txBody>
+        </p:sp>
+        <p:sp>
+          <p:nvSpPr>
+            <p:cNvPr id="48" name="Text 8">
+              <a:extLst>
+                <a:ext uri="{FF2B5EF4-FFF2-40B4-BE49-F238E27FC236}">
+                  <a16:creationId xmlns:a16="http://schemas.microsoft.com/office/drawing/2014/main" id="{4CE1FEA8-3FFF-16C6-8E85-728DB055D381}"/>
+                </a:ext>
+              </a:extLst>
+            </p:cNvPr>
+            <p:cNvSpPr/>
+            <p:nvPr/>
+          </p:nvSpPr>
+          <p:spPr>
+            <a:xfrm>
+              <a:off x="5760720" y="1550748"/>
+              <a:ext cx="347472" cy="256032"/>
+            </a:xfrm>
+            <a:prstGeom prst="rect">
+              <a:avLst/>
+            </a:prstGeom>
+            <a:noFill/>
+            <a:ln/>
+          </p:spPr>
+          <p:txBody>
+            <a:bodyPr wrap="square" rtlCol="0" anchor="ctr"/>
+            <a:lstStyle>
+              <a:lvl1pPr marL="0" algn="l" defTabSz="914400" rtl="0" eaLnBrk="1" latinLnBrk="0" hangingPunct="1">
+                <a:defRPr sz="1800" kern="1200">
+                  <a:solidFill>
+                    <a:schemeClr val="tx1"/>
+                  </a:solidFill>
+                  <a:latin typeface="+mn-lt"/>
+                  <a:ea typeface="+mn-ea"/>
+                  <a:cs typeface="+mn-cs"/>
+                </a:defRPr>
+              </a:lvl1pPr>
+              <a:lvl2pPr marL="457200" algn="l" defTabSz="914400" rtl="0" eaLnBrk="1" latinLnBrk="0" hangingPunct="1">
+                <a:defRPr sz="1800" kern="1200">
+                  <a:solidFill>
+                    <a:schemeClr val="tx1"/>
+                  </a:solidFill>
+                  <a:latin typeface="+mn-lt"/>
+                  <a:ea typeface="+mn-ea"/>
+                  <a:cs typeface="+mn-cs"/>
+                </a:defRPr>
+              </a:lvl2pPr>
+              <a:lvl3pPr marL="914400" algn="l" defTabSz="914400" rtl="0" eaLnBrk="1" latinLnBrk="0" hangingPunct="1">
+                <a:defRPr sz="1800" kern="1200">
+                  <a:solidFill>
+                    <a:schemeClr val="tx1"/>
+                  </a:solidFill>
+                  <a:latin typeface="+mn-lt"/>
+                  <a:ea typeface="+mn-ea"/>
+                  <a:cs typeface="+mn-cs"/>
+                </a:defRPr>
+              </a:lvl3pPr>
+              <a:lvl4pPr marL="1371600" algn="l" defTabSz="914400" rtl="0" eaLnBrk="1" latinLnBrk="0" hangingPunct="1">
+                <a:defRPr sz="1800" kern="1200">
+                  <a:solidFill>
+                    <a:schemeClr val="tx1"/>
+                  </a:solidFill>
+                  <a:latin typeface="+mn-lt"/>
+                  <a:ea typeface="+mn-ea"/>
+                  <a:cs typeface="+mn-cs"/>
+                </a:defRPr>
+              </a:lvl4pPr>
+              <a:lvl5pPr marL="1828800" algn="l" defTabSz="914400" rtl="0" eaLnBrk="1" latinLnBrk="0" hangingPunct="1">
+                <a:defRPr sz="1800" kern="1200">
+                  <a:solidFill>
+                    <a:schemeClr val="tx1"/>
+                  </a:solidFill>
+                  <a:latin typeface="+mn-lt"/>
+                  <a:ea typeface="+mn-ea"/>
+                  <a:cs typeface="+mn-cs"/>
+                </a:defRPr>
+              </a:lvl5pPr>
+              <a:lvl6pPr marL="2286000" algn="l" defTabSz="914400" rtl="0" eaLnBrk="1" latinLnBrk="0" hangingPunct="1">
+                <a:defRPr sz="1800" kern="1200">
+                  <a:solidFill>
+                    <a:schemeClr val="tx1"/>
+                  </a:solidFill>
+                  <a:latin typeface="+mn-lt"/>
+                  <a:ea typeface="+mn-ea"/>
+                  <a:cs typeface="+mn-cs"/>
+                </a:defRPr>
+              </a:lvl6pPr>
+              <a:lvl7pPr marL="2743200" algn="l" defTabSz="914400" rtl="0" eaLnBrk="1" latinLnBrk="0" hangingPunct="1">
+                <a:defRPr sz="1800" kern="1200">
+                  <a:solidFill>
+                    <a:schemeClr val="tx1"/>
+                  </a:solidFill>
+                  <a:latin typeface="+mn-lt"/>
+                  <a:ea typeface="+mn-ea"/>
+                  <a:cs typeface="+mn-cs"/>
+                </a:defRPr>
+              </a:lvl7pPr>
+              <a:lvl8pPr marL="3200400" algn="l" defTabSz="914400" rtl="0" eaLnBrk="1" latinLnBrk="0" hangingPunct="1">
+                <a:defRPr sz="1800" kern="1200">
+                  <a:solidFill>
+                    <a:schemeClr val="tx1"/>
+                  </a:solidFill>
+                  <a:latin typeface="+mn-lt"/>
+                  <a:ea typeface="+mn-ea"/>
+                  <a:cs typeface="+mn-cs"/>
+                </a:defRPr>
+              </a:lvl8pPr>
+              <a:lvl9pPr marL="3657600" algn="l" defTabSz="914400" rtl="0" eaLnBrk="1" latinLnBrk="0" hangingPunct="1">
+                <a:defRPr sz="1800" kern="1200">
+                  <a:solidFill>
+                    <a:schemeClr val="tx1"/>
+                  </a:solidFill>
+                  <a:latin typeface="+mn-lt"/>
+                  <a:ea typeface="+mn-ea"/>
+                  <a:cs typeface="+mn-cs"/>
+                </a:defRPr>
+              </a:lvl9pPr>
+            </a:lstStyle>
+            <a:p>
+              <a:pPr marL="0" indent="0" algn="ctr">
+                <a:buNone/>
+              </a:pPr>
+              <a:r>
+                <a:rPr lang="en-US" sz="800" b="1" dirty="0">
+                  <a:solidFill>
+                    <a:srgbClr val="FFFFFF"/>
+                  </a:solidFill>
+                  <a:latin typeface="Calibri" pitchFamily="34" charset="0"/>
+                  <a:ea typeface="Calibri" pitchFamily="34" charset="-122"/>
+                  <a:cs typeface="Calibri" pitchFamily="34" charset="-120"/>
+                </a:rPr>
+                <a:t>OK</a:t>
+              </a:r>
+              <a:endParaRPr lang="en-US" sz="800" dirty="0"/>
+            </a:p>
+          </p:txBody>
+        </p:sp>
+      </p:grpSp>
+      <p:grpSp>
+        <p:nvGrpSpPr>
+          <p:cNvPr id="49" name="Grupo 48">
+            <a:extLst>
+              <a:ext uri="{FF2B5EF4-FFF2-40B4-BE49-F238E27FC236}">
+                <a16:creationId xmlns:a16="http://schemas.microsoft.com/office/drawing/2014/main" id="{3D50C493-7FFF-5FCC-680C-E6D96A019C74}"/>
+              </a:ext>
+            </a:extLst>
+          </p:cNvPr>
+          <p:cNvGrpSpPr/>
+          <p:nvPr/>
+        </p:nvGrpSpPr>
+        <p:grpSpPr>
+          <a:xfrm>
+            <a:off x="5687195" y="3617996"/>
+            <a:ext cx="347472" cy="259764"/>
+            <a:chOff x="5760720" y="1550748"/>
+            <a:chExt cx="347472" cy="259764"/>
+          </a:xfrm>
+        </p:grpSpPr>
+        <p:sp>
+          <p:nvSpPr>
+            <p:cNvPr id="50" name="Shape 7">
+              <a:extLst>
+                <a:ext uri="{FF2B5EF4-FFF2-40B4-BE49-F238E27FC236}">
+                  <a16:creationId xmlns:a16="http://schemas.microsoft.com/office/drawing/2014/main" id="{FDDD173D-0859-567F-4442-2E09E8A3693E}"/>
+                </a:ext>
+              </a:extLst>
+            </p:cNvPr>
+            <p:cNvSpPr/>
+            <p:nvPr/>
+          </p:nvSpPr>
+          <p:spPr>
+            <a:xfrm>
+              <a:off x="5760720" y="1554480"/>
+              <a:ext cx="347472" cy="256032"/>
+            </a:xfrm>
+            <a:prstGeom prst="roundRect">
+              <a:avLst>
+                <a:gd name="adj" fmla="val 17857"/>
+              </a:avLst>
+            </a:prstGeom>
             <a:solidFill>
               <a:srgbClr val="10B981"/>
             </a:solidFill>
-            <a:prstDash val="solid"/>
-          </a:ln>
-        </p:spPr>
-      </p:sp>
-      <p:sp>
-        <p:nvSpPr>
-          <p:cNvPr id="26" name="Text 23"/>
-          <p:cNvSpPr/>
-          <p:nvPr/>
-        </p:nvSpPr>
-        <p:spPr>
-          <a:xfrm>
-            <a:off x="5760720" y="3611880"/>
-            <a:ext cx="256032" cy="256032"/>
-          </a:xfrm>
-          <a:prstGeom prst="rect">
-            <a:avLst/>
-          </a:prstGeom>
-          <a:noFill/>
-          <a:ln/>
-        </p:spPr>
-        <p:txBody>
-          <a:bodyPr wrap="square" rtlCol="0" anchor="ctr"/>
-          <a:lstStyle/>
-          <a:p>
-            <a:pPr algn="ctr" indent="0" marL="0">
-              <a:buNone/>
-            </a:pPr>
-            <a:r>
-              <a:rPr lang="en-US" sz="800" b="1" dirty="0">
-                <a:solidFill>
-                  <a:srgbClr val="FFFFFF"/>
-                </a:solidFill>
-                <a:latin typeface="Calibri" pitchFamily="34" charset="0"/>
-                <a:ea typeface="Calibri" pitchFamily="34" charset="-122"/>
-                <a:cs typeface="Calibri" pitchFamily="34" charset="-120"/>
-              </a:rPr>
-              <a:t>OK</a:t>
-            </a:r>
-            <a:endParaRPr lang="en-US" sz="800" dirty="0"/>
-          </a:p>
-        </p:txBody>
-      </p:sp>
-      <p:sp>
-        <p:nvSpPr>
-          <p:cNvPr id="27" name="Text 24"/>
-          <p:cNvSpPr/>
-          <p:nvPr/>
-        </p:nvSpPr>
-        <p:spPr>
-          <a:xfrm>
-            <a:off x="6108192" y="3566160"/>
-            <a:ext cx="3108960" cy="365760"/>
-          </a:xfrm>
-          <a:prstGeom prst="rect">
-            <a:avLst/>
-          </a:prstGeom>
-          <a:noFill/>
-          <a:ln/>
-        </p:spPr>
-        <p:txBody>
-          <a:bodyPr wrap="square" rtlCol="0" anchor="ctr"/>
-          <a:lstStyle/>
-          <a:p>
-            <a:pPr indent="0" marL="0">
-              <a:buNone/>
-            </a:pPr>
-            <a:r>
-              <a:rPr lang="en-US" sz="1200" dirty="0">
-                <a:solidFill>
-                  <a:srgbClr val="CBD5E1"/>
-                </a:solidFill>
-                <a:latin typeface="Calibri" pitchFamily="34" charset="0"/>
-                <a:ea typeface="Calibri" pitchFamily="34" charset="-122"/>
-                <a:cs typeface="Calibri" pitchFamily="34" charset="-120"/>
-              </a:rPr>
-              <a:t>Programa pioneros (250 — 1 año gratis)</a:t>
-            </a:r>
-            <a:endParaRPr lang="en-US" sz="1200" dirty="0"/>
-          </a:p>
-        </p:txBody>
-      </p:sp>
-      <p:sp>
-        <p:nvSpPr>
-          <p:cNvPr id="28" name="Shape 25"/>
-          <p:cNvSpPr/>
-          <p:nvPr/>
-        </p:nvSpPr>
-        <p:spPr>
-          <a:xfrm>
-            <a:off x="5760720" y="4023360"/>
-            <a:ext cx="256032" cy="256032"/>
-          </a:xfrm>
-          <a:prstGeom prst="roundRect">
-            <a:avLst>
-              <a:gd name="adj" fmla="val 17857"/>
-            </a:avLst>
-          </a:prstGeom>
-          <a:solidFill>
-            <a:srgbClr val="10B981"/>
-          </a:solidFill>
-          <a:ln w="12700">
+            <a:ln w="12700">
+              <a:solidFill>
+                <a:srgbClr val="10B981"/>
+              </a:solidFill>
+              <a:prstDash val="solid"/>
+            </a:ln>
+          </p:spPr>
+          <p:txBody>
+            <a:bodyPr/>
+            <a:lstStyle>
+              <a:lvl1pPr marL="0" algn="l" defTabSz="914400" rtl="0" eaLnBrk="1" latinLnBrk="0" hangingPunct="1">
+                <a:defRPr sz="1800" kern="1200">
+                  <a:solidFill>
+                    <a:schemeClr val="tx1"/>
+                  </a:solidFill>
+                  <a:latin typeface="+mn-lt"/>
+                  <a:ea typeface="+mn-ea"/>
+                  <a:cs typeface="+mn-cs"/>
+                </a:defRPr>
+              </a:lvl1pPr>
+              <a:lvl2pPr marL="457200" algn="l" defTabSz="914400" rtl="0" eaLnBrk="1" latinLnBrk="0" hangingPunct="1">
+                <a:defRPr sz="1800" kern="1200">
+                  <a:solidFill>
+                    <a:schemeClr val="tx1"/>
+                  </a:solidFill>
+                  <a:latin typeface="+mn-lt"/>
+                  <a:ea typeface="+mn-ea"/>
+                  <a:cs typeface="+mn-cs"/>
+                </a:defRPr>
+              </a:lvl2pPr>
+              <a:lvl3pPr marL="914400" algn="l" defTabSz="914400" rtl="0" eaLnBrk="1" latinLnBrk="0" hangingPunct="1">
+                <a:defRPr sz="1800" kern="1200">
+                  <a:solidFill>
+                    <a:schemeClr val="tx1"/>
+                  </a:solidFill>
+                  <a:latin typeface="+mn-lt"/>
+                  <a:ea typeface="+mn-ea"/>
+                  <a:cs typeface="+mn-cs"/>
+                </a:defRPr>
+              </a:lvl3pPr>
+              <a:lvl4pPr marL="1371600" algn="l" defTabSz="914400" rtl="0" eaLnBrk="1" latinLnBrk="0" hangingPunct="1">
+                <a:defRPr sz="1800" kern="1200">
+                  <a:solidFill>
+                    <a:schemeClr val="tx1"/>
+                  </a:solidFill>
+                  <a:latin typeface="+mn-lt"/>
+                  <a:ea typeface="+mn-ea"/>
+                  <a:cs typeface="+mn-cs"/>
+                </a:defRPr>
+              </a:lvl4pPr>
+              <a:lvl5pPr marL="1828800" algn="l" defTabSz="914400" rtl="0" eaLnBrk="1" latinLnBrk="0" hangingPunct="1">
+                <a:defRPr sz="1800" kern="1200">
+                  <a:solidFill>
+                    <a:schemeClr val="tx1"/>
+                  </a:solidFill>
+                  <a:latin typeface="+mn-lt"/>
+                  <a:ea typeface="+mn-ea"/>
+                  <a:cs typeface="+mn-cs"/>
+                </a:defRPr>
+              </a:lvl5pPr>
+              <a:lvl6pPr marL="2286000" algn="l" defTabSz="914400" rtl="0" eaLnBrk="1" latinLnBrk="0" hangingPunct="1">
+                <a:defRPr sz="1800" kern="1200">
+                  <a:solidFill>
+                    <a:schemeClr val="tx1"/>
+                  </a:solidFill>
+                  <a:latin typeface="+mn-lt"/>
+                  <a:ea typeface="+mn-ea"/>
+                  <a:cs typeface="+mn-cs"/>
+                </a:defRPr>
+              </a:lvl6pPr>
+              <a:lvl7pPr marL="2743200" algn="l" defTabSz="914400" rtl="0" eaLnBrk="1" latinLnBrk="0" hangingPunct="1">
+                <a:defRPr sz="1800" kern="1200">
+                  <a:solidFill>
+                    <a:schemeClr val="tx1"/>
+                  </a:solidFill>
+                  <a:latin typeface="+mn-lt"/>
+                  <a:ea typeface="+mn-ea"/>
+                  <a:cs typeface="+mn-cs"/>
+                </a:defRPr>
+              </a:lvl7pPr>
+              <a:lvl8pPr marL="3200400" algn="l" defTabSz="914400" rtl="0" eaLnBrk="1" latinLnBrk="0" hangingPunct="1">
+                <a:defRPr sz="1800" kern="1200">
+                  <a:solidFill>
+                    <a:schemeClr val="tx1"/>
+                  </a:solidFill>
+                  <a:latin typeface="+mn-lt"/>
+                  <a:ea typeface="+mn-ea"/>
+                  <a:cs typeface="+mn-cs"/>
+                </a:defRPr>
+              </a:lvl8pPr>
+              <a:lvl9pPr marL="3657600" algn="l" defTabSz="914400" rtl="0" eaLnBrk="1" latinLnBrk="0" hangingPunct="1">
+                <a:defRPr sz="1800" kern="1200">
+                  <a:solidFill>
+                    <a:schemeClr val="tx1"/>
+                  </a:solidFill>
+                  <a:latin typeface="+mn-lt"/>
+                  <a:ea typeface="+mn-ea"/>
+                  <a:cs typeface="+mn-cs"/>
+                </a:defRPr>
+              </a:lvl9pPr>
+            </a:lstStyle>
+            <a:p>
+              <a:endParaRPr lang="es-CO" sz="1600" dirty="0"/>
+            </a:p>
+          </p:txBody>
+        </p:sp>
+        <p:sp>
+          <p:nvSpPr>
+            <p:cNvPr id="51" name="Text 8">
+              <a:extLst>
+                <a:ext uri="{FF2B5EF4-FFF2-40B4-BE49-F238E27FC236}">
+                  <a16:creationId xmlns:a16="http://schemas.microsoft.com/office/drawing/2014/main" id="{6CD4B2F9-5691-1723-5884-8A5468211A78}"/>
+                </a:ext>
+              </a:extLst>
+            </p:cNvPr>
+            <p:cNvSpPr/>
+            <p:nvPr/>
+          </p:nvSpPr>
+          <p:spPr>
+            <a:xfrm>
+              <a:off x="5760720" y="1550748"/>
+              <a:ext cx="347472" cy="256032"/>
+            </a:xfrm>
+            <a:prstGeom prst="rect">
+              <a:avLst/>
+            </a:prstGeom>
+            <a:noFill/>
+            <a:ln/>
+          </p:spPr>
+          <p:txBody>
+            <a:bodyPr wrap="square" rtlCol="0" anchor="ctr"/>
+            <a:lstStyle>
+              <a:lvl1pPr marL="0" algn="l" defTabSz="914400" rtl="0" eaLnBrk="1" latinLnBrk="0" hangingPunct="1">
+                <a:defRPr sz="1800" kern="1200">
+                  <a:solidFill>
+                    <a:schemeClr val="tx1"/>
+                  </a:solidFill>
+                  <a:latin typeface="+mn-lt"/>
+                  <a:ea typeface="+mn-ea"/>
+                  <a:cs typeface="+mn-cs"/>
+                </a:defRPr>
+              </a:lvl1pPr>
+              <a:lvl2pPr marL="457200" algn="l" defTabSz="914400" rtl="0" eaLnBrk="1" latinLnBrk="0" hangingPunct="1">
+                <a:defRPr sz="1800" kern="1200">
+                  <a:solidFill>
+                    <a:schemeClr val="tx1"/>
+                  </a:solidFill>
+                  <a:latin typeface="+mn-lt"/>
+                  <a:ea typeface="+mn-ea"/>
+                  <a:cs typeface="+mn-cs"/>
+                </a:defRPr>
+              </a:lvl2pPr>
+              <a:lvl3pPr marL="914400" algn="l" defTabSz="914400" rtl="0" eaLnBrk="1" latinLnBrk="0" hangingPunct="1">
+                <a:defRPr sz="1800" kern="1200">
+                  <a:solidFill>
+                    <a:schemeClr val="tx1"/>
+                  </a:solidFill>
+                  <a:latin typeface="+mn-lt"/>
+                  <a:ea typeface="+mn-ea"/>
+                  <a:cs typeface="+mn-cs"/>
+                </a:defRPr>
+              </a:lvl3pPr>
+              <a:lvl4pPr marL="1371600" algn="l" defTabSz="914400" rtl="0" eaLnBrk="1" latinLnBrk="0" hangingPunct="1">
+                <a:defRPr sz="1800" kern="1200">
+                  <a:solidFill>
+                    <a:schemeClr val="tx1"/>
+                  </a:solidFill>
+                  <a:latin typeface="+mn-lt"/>
+                  <a:ea typeface="+mn-ea"/>
+                  <a:cs typeface="+mn-cs"/>
+                </a:defRPr>
+              </a:lvl4pPr>
+              <a:lvl5pPr marL="1828800" algn="l" defTabSz="914400" rtl="0" eaLnBrk="1" latinLnBrk="0" hangingPunct="1">
+                <a:defRPr sz="1800" kern="1200">
+                  <a:solidFill>
+                    <a:schemeClr val="tx1"/>
+                  </a:solidFill>
+                  <a:latin typeface="+mn-lt"/>
+                  <a:ea typeface="+mn-ea"/>
+                  <a:cs typeface="+mn-cs"/>
+                </a:defRPr>
+              </a:lvl5pPr>
+              <a:lvl6pPr marL="2286000" algn="l" defTabSz="914400" rtl="0" eaLnBrk="1" latinLnBrk="0" hangingPunct="1">
+                <a:defRPr sz="1800" kern="1200">
+                  <a:solidFill>
+                    <a:schemeClr val="tx1"/>
+                  </a:solidFill>
+                  <a:latin typeface="+mn-lt"/>
+                  <a:ea typeface="+mn-ea"/>
+                  <a:cs typeface="+mn-cs"/>
+                </a:defRPr>
+              </a:lvl6pPr>
+              <a:lvl7pPr marL="2743200" algn="l" defTabSz="914400" rtl="0" eaLnBrk="1" latinLnBrk="0" hangingPunct="1">
+                <a:defRPr sz="1800" kern="1200">
+                  <a:solidFill>
+                    <a:schemeClr val="tx1"/>
+                  </a:solidFill>
+                  <a:latin typeface="+mn-lt"/>
+                  <a:ea typeface="+mn-ea"/>
+                  <a:cs typeface="+mn-cs"/>
+                </a:defRPr>
+              </a:lvl7pPr>
+              <a:lvl8pPr marL="3200400" algn="l" defTabSz="914400" rtl="0" eaLnBrk="1" latinLnBrk="0" hangingPunct="1">
+                <a:defRPr sz="1800" kern="1200">
+                  <a:solidFill>
+                    <a:schemeClr val="tx1"/>
+                  </a:solidFill>
+                  <a:latin typeface="+mn-lt"/>
+                  <a:ea typeface="+mn-ea"/>
+                  <a:cs typeface="+mn-cs"/>
+                </a:defRPr>
+              </a:lvl8pPr>
+              <a:lvl9pPr marL="3657600" algn="l" defTabSz="914400" rtl="0" eaLnBrk="1" latinLnBrk="0" hangingPunct="1">
+                <a:defRPr sz="1800" kern="1200">
+                  <a:solidFill>
+                    <a:schemeClr val="tx1"/>
+                  </a:solidFill>
+                  <a:latin typeface="+mn-lt"/>
+                  <a:ea typeface="+mn-ea"/>
+                  <a:cs typeface="+mn-cs"/>
+                </a:defRPr>
+              </a:lvl9pPr>
+            </a:lstStyle>
+            <a:p>
+              <a:pPr marL="0" indent="0" algn="ctr">
+                <a:buNone/>
+              </a:pPr>
+              <a:r>
+                <a:rPr lang="en-US" sz="800" b="1" dirty="0">
+                  <a:solidFill>
+                    <a:srgbClr val="FFFFFF"/>
+                  </a:solidFill>
+                  <a:latin typeface="Calibri" pitchFamily="34" charset="0"/>
+                  <a:ea typeface="Calibri" pitchFamily="34" charset="-122"/>
+                  <a:cs typeface="Calibri" pitchFamily="34" charset="-120"/>
+                </a:rPr>
+                <a:t>OK</a:t>
+              </a:r>
+              <a:endParaRPr lang="en-US" sz="800" dirty="0"/>
+            </a:p>
+          </p:txBody>
+        </p:sp>
+      </p:grpSp>
+      <p:grpSp>
+        <p:nvGrpSpPr>
+          <p:cNvPr id="52" name="Grupo 51">
+            <a:extLst>
+              <a:ext uri="{FF2B5EF4-FFF2-40B4-BE49-F238E27FC236}">
+                <a16:creationId xmlns:a16="http://schemas.microsoft.com/office/drawing/2014/main" id="{3FB5497F-846B-F237-399F-EB7CB90D40E7}"/>
+              </a:ext>
+            </a:extLst>
+          </p:cNvPr>
+          <p:cNvGrpSpPr/>
+          <p:nvPr/>
+        </p:nvGrpSpPr>
+        <p:grpSpPr>
+          <a:xfrm>
+            <a:off x="5687195" y="4030640"/>
+            <a:ext cx="347472" cy="259764"/>
+            <a:chOff x="5760720" y="1550748"/>
+            <a:chExt cx="347472" cy="259764"/>
+          </a:xfrm>
+        </p:grpSpPr>
+        <p:sp>
+          <p:nvSpPr>
+            <p:cNvPr id="53" name="Shape 7">
+              <a:extLst>
+                <a:ext uri="{FF2B5EF4-FFF2-40B4-BE49-F238E27FC236}">
+                  <a16:creationId xmlns:a16="http://schemas.microsoft.com/office/drawing/2014/main" id="{ACE5C0FB-D642-7E7D-69ED-E6D6FFD2B2A9}"/>
+                </a:ext>
+              </a:extLst>
+            </p:cNvPr>
+            <p:cNvSpPr/>
+            <p:nvPr/>
+          </p:nvSpPr>
+          <p:spPr>
+            <a:xfrm>
+              <a:off x="5760720" y="1554480"/>
+              <a:ext cx="347472" cy="256032"/>
+            </a:xfrm>
+            <a:prstGeom prst="roundRect">
+              <a:avLst>
+                <a:gd name="adj" fmla="val 17857"/>
+              </a:avLst>
+            </a:prstGeom>
             <a:solidFill>
               <a:srgbClr val="10B981"/>
             </a:solidFill>
-            <a:prstDash val="solid"/>
-          </a:ln>
-        </p:spPr>
-      </p:sp>
-      <p:sp>
-        <p:nvSpPr>
-          <p:cNvPr id="29" name="Text 26"/>
-          <p:cNvSpPr/>
-          <p:nvPr/>
-        </p:nvSpPr>
-        <p:spPr>
-          <a:xfrm>
-            <a:off x="5760720" y="4023360"/>
-            <a:ext cx="256032" cy="256032"/>
-          </a:xfrm>
-          <a:prstGeom prst="rect">
-            <a:avLst/>
-          </a:prstGeom>
-          <a:noFill/>
-          <a:ln/>
-        </p:spPr>
-        <p:txBody>
-          <a:bodyPr wrap="square" rtlCol="0" anchor="ctr"/>
-          <a:lstStyle/>
-          <a:p>
-            <a:pPr algn="ctr" indent="0" marL="0">
-              <a:buNone/>
-            </a:pPr>
-            <a:r>
-              <a:rPr lang="en-US" sz="800" b="1" dirty="0">
-                <a:solidFill>
-                  <a:srgbClr val="FFFFFF"/>
-                </a:solidFill>
-                <a:latin typeface="Calibri" pitchFamily="34" charset="0"/>
-                <a:ea typeface="Calibri" pitchFamily="34" charset="-122"/>
-                <a:cs typeface="Calibri" pitchFamily="34" charset="-120"/>
-              </a:rPr>
-              <a:t>OK</a:t>
-            </a:r>
-            <a:endParaRPr lang="en-US" sz="800" dirty="0"/>
-          </a:p>
-        </p:txBody>
-      </p:sp>
-      <p:sp>
-        <p:nvSpPr>
-          <p:cNvPr id="30" name="Text 27"/>
-          <p:cNvSpPr/>
-          <p:nvPr/>
-        </p:nvSpPr>
-        <p:spPr>
-          <a:xfrm>
-            <a:off x="6108192" y="3977640"/>
-            <a:ext cx="3108960" cy="365760"/>
-          </a:xfrm>
-          <a:prstGeom prst="rect">
-            <a:avLst/>
-          </a:prstGeom>
-          <a:noFill/>
-          <a:ln/>
-        </p:spPr>
-        <p:txBody>
-          <a:bodyPr wrap="square" rtlCol="0" anchor="ctr"/>
-          <a:lstStyle/>
-          <a:p>
-            <a:pPr indent="0" marL="0">
-              <a:buNone/>
-            </a:pPr>
-            <a:r>
-              <a:rPr lang="en-US" sz="1200" dirty="0">
-                <a:solidFill>
-                  <a:srgbClr val="CBD5E1"/>
-                </a:solidFill>
-                <a:latin typeface="Calibri" pitchFamily="34" charset="0"/>
-                <a:ea typeface="Calibri" pitchFamily="34" charset="-122"/>
-                <a:cs typeface="Calibri" pitchFamily="34" charset="-120"/>
-              </a:rPr>
-              <a:t>Emails transaccionales con Resend</a:t>
-            </a:r>
-            <a:endParaRPr lang="en-US" sz="1200" dirty="0"/>
-          </a:p>
-        </p:txBody>
-      </p:sp>
-      <p:sp>
-        <p:nvSpPr>
-          <p:cNvPr id="31" name="Shape 28"/>
-          <p:cNvSpPr/>
-          <p:nvPr/>
-        </p:nvSpPr>
-        <p:spPr>
-          <a:xfrm>
-            <a:off x="5760720" y="4434840"/>
-            <a:ext cx="256032" cy="256032"/>
-          </a:xfrm>
-          <a:prstGeom prst="roundRect">
-            <a:avLst>
-              <a:gd name="adj" fmla="val 17857"/>
-            </a:avLst>
-          </a:prstGeom>
-          <a:solidFill>
-            <a:srgbClr val="10B981"/>
-          </a:solidFill>
-          <a:ln w="12700">
+            <a:ln w="12700">
+              <a:solidFill>
+                <a:srgbClr val="10B981"/>
+              </a:solidFill>
+              <a:prstDash val="solid"/>
+            </a:ln>
+          </p:spPr>
+          <p:txBody>
+            <a:bodyPr/>
+            <a:lstStyle>
+              <a:lvl1pPr marL="0" algn="l" defTabSz="914400" rtl="0" eaLnBrk="1" latinLnBrk="0" hangingPunct="1">
+                <a:defRPr sz="1800" kern="1200">
+                  <a:solidFill>
+                    <a:schemeClr val="tx1"/>
+                  </a:solidFill>
+                  <a:latin typeface="+mn-lt"/>
+                  <a:ea typeface="+mn-ea"/>
+                  <a:cs typeface="+mn-cs"/>
+                </a:defRPr>
+              </a:lvl1pPr>
+              <a:lvl2pPr marL="457200" algn="l" defTabSz="914400" rtl="0" eaLnBrk="1" latinLnBrk="0" hangingPunct="1">
+                <a:defRPr sz="1800" kern="1200">
+                  <a:solidFill>
+                    <a:schemeClr val="tx1"/>
+                  </a:solidFill>
+                  <a:latin typeface="+mn-lt"/>
+                  <a:ea typeface="+mn-ea"/>
+                  <a:cs typeface="+mn-cs"/>
+                </a:defRPr>
+              </a:lvl2pPr>
+              <a:lvl3pPr marL="914400" algn="l" defTabSz="914400" rtl="0" eaLnBrk="1" latinLnBrk="0" hangingPunct="1">
+                <a:defRPr sz="1800" kern="1200">
+                  <a:solidFill>
+                    <a:schemeClr val="tx1"/>
+                  </a:solidFill>
+                  <a:latin typeface="+mn-lt"/>
+                  <a:ea typeface="+mn-ea"/>
+                  <a:cs typeface="+mn-cs"/>
+                </a:defRPr>
+              </a:lvl3pPr>
+              <a:lvl4pPr marL="1371600" algn="l" defTabSz="914400" rtl="0" eaLnBrk="1" latinLnBrk="0" hangingPunct="1">
+                <a:defRPr sz="1800" kern="1200">
+                  <a:solidFill>
+                    <a:schemeClr val="tx1"/>
+                  </a:solidFill>
+                  <a:latin typeface="+mn-lt"/>
+                  <a:ea typeface="+mn-ea"/>
+                  <a:cs typeface="+mn-cs"/>
+                </a:defRPr>
+              </a:lvl4pPr>
+              <a:lvl5pPr marL="1828800" algn="l" defTabSz="914400" rtl="0" eaLnBrk="1" latinLnBrk="0" hangingPunct="1">
+                <a:defRPr sz="1800" kern="1200">
+                  <a:solidFill>
+                    <a:schemeClr val="tx1"/>
+                  </a:solidFill>
+                  <a:latin typeface="+mn-lt"/>
+                  <a:ea typeface="+mn-ea"/>
+                  <a:cs typeface="+mn-cs"/>
+                </a:defRPr>
+              </a:lvl5pPr>
+              <a:lvl6pPr marL="2286000" algn="l" defTabSz="914400" rtl="0" eaLnBrk="1" latinLnBrk="0" hangingPunct="1">
+                <a:defRPr sz="1800" kern="1200">
+                  <a:solidFill>
+                    <a:schemeClr val="tx1"/>
+                  </a:solidFill>
+                  <a:latin typeface="+mn-lt"/>
+                  <a:ea typeface="+mn-ea"/>
+                  <a:cs typeface="+mn-cs"/>
+                </a:defRPr>
+              </a:lvl6pPr>
+              <a:lvl7pPr marL="2743200" algn="l" defTabSz="914400" rtl="0" eaLnBrk="1" latinLnBrk="0" hangingPunct="1">
+                <a:defRPr sz="1800" kern="1200">
+                  <a:solidFill>
+                    <a:schemeClr val="tx1"/>
+                  </a:solidFill>
+                  <a:latin typeface="+mn-lt"/>
+                  <a:ea typeface="+mn-ea"/>
+                  <a:cs typeface="+mn-cs"/>
+                </a:defRPr>
+              </a:lvl7pPr>
+              <a:lvl8pPr marL="3200400" algn="l" defTabSz="914400" rtl="0" eaLnBrk="1" latinLnBrk="0" hangingPunct="1">
+                <a:defRPr sz="1800" kern="1200">
+                  <a:solidFill>
+                    <a:schemeClr val="tx1"/>
+                  </a:solidFill>
+                  <a:latin typeface="+mn-lt"/>
+                  <a:ea typeface="+mn-ea"/>
+                  <a:cs typeface="+mn-cs"/>
+                </a:defRPr>
+              </a:lvl8pPr>
+              <a:lvl9pPr marL="3657600" algn="l" defTabSz="914400" rtl="0" eaLnBrk="1" latinLnBrk="0" hangingPunct="1">
+                <a:defRPr sz="1800" kern="1200">
+                  <a:solidFill>
+                    <a:schemeClr val="tx1"/>
+                  </a:solidFill>
+                  <a:latin typeface="+mn-lt"/>
+                  <a:ea typeface="+mn-ea"/>
+                  <a:cs typeface="+mn-cs"/>
+                </a:defRPr>
+              </a:lvl9pPr>
+            </a:lstStyle>
+            <a:p>
+              <a:endParaRPr lang="es-CO" sz="1600" dirty="0"/>
+            </a:p>
+          </p:txBody>
+        </p:sp>
+        <p:sp>
+          <p:nvSpPr>
+            <p:cNvPr id="54" name="Text 8">
+              <a:extLst>
+                <a:ext uri="{FF2B5EF4-FFF2-40B4-BE49-F238E27FC236}">
+                  <a16:creationId xmlns:a16="http://schemas.microsoft.com/office/drawing/2014/main" id="{19AABF50-2681-9DDB-6219-64F56EDEBF43}"/>
+                </a:ext>
+              </a:extLst>
+            </p:cNvPr>
+            <p:cNvSpPr/>
+            <p:nvPr/>
+          </p:nvSpPr>
+          <p:spPr>
+            <a:xfrm>
+              <a:off x="5760720" y="1550748"/>
+              <a:ext cx="347472" cy="256032"/>
+            </a:xfrm>
+            <a:prstGeom prst="rect">
+              <a:avLst/>
+            </a:prstGeom>
+            <a:noFill/>
+            <a:ln/>
+          </p:spPr>
+          <p:txBody>
+            <a:bodyPr wrap="square" rtlCol="0" anchor="ctr"/>
+            <a:lstStyle>
+              <a:lvl1pPr marL="0" algn="l" defTabSz="914400" rtl="0" eaLnBrk="1" latinLnBrk="0" hangingPunct="1">
+                <a:defRPr sz="1800" kern="1200">
+                  <a:solidFill>
+                    <a:schemeClr val="tx1"/>
+                  </a:solidFill>
+                  <a:latin typeface="+mn-lt"/>
+                  <a:ea typeface="+mn-ea"/>
+                  <a:cs typeface="+mn-cs"/>
+                </a:defRPr>
+              </a:lvl1pPr>
+              <a:lvl2pPr marL="457200" algn="l" defTabSz="914400" rtl="0" eaLnBrk="1" latinLnBrk="0" hangingPunct="1">
+                <a:defRPr sz="1800" kern="1200">
+                  <a:solidFill>
+                    <a:schemeClr val="tx1"/>
+                  </a:solidFill>
+                  <a:latin typeface="+mn-lt"/>
+                  <a:ea typeface="+mn-ea"/>
+                  <a:cs typeface="+mn-cs"/>
+                </a:defRPr>
+              </a:lvl2pPr>
+              <a:lvl3pPr marL="914400" algn="l" defTabSz="914400" rtl="0" eaLnBrk="1" latinLnBrk="0" hangingPunct="1">
+                <a:defRPr sz="1800" kern="1200">
+                  <a:solidFill>
+                    <a:schemeClr val="tx1"/>
+                  </a:solidFill>
+                  <a:latin typeface="+mn-lt"/>
+                  <a:ea typeface="+mn-ea"/>
+                  <a:cs typeface="+mn-cs"/>
+                </a:defRPr>
+              </a:lvl3pPr>
+              <a:lvl4pPr marL="1371600" algn="l" defTabSz="914400" rtl="0" eaLnBrk="1" latinLnBrk="0" hangingPunct="1">
+                <a:defRPr sz="1800" kern="1200">
+                  <a:solidFill>
+                    <a:schemeClr val="tx1"/>
+                  </a:solidFill>
+                  <a:latin typeface="+mn-lt"/>
+                  <a:ea typeface="+mn-ea"/>
+                  <a:cs typeface="+mn-cs"/>
+                </a:defRPr>
+              </a:lvl4pPr>
+              <a:lvl5pPr marL="1828800" algn="l" defTabSz="914400" rtl="0" eaLnBrk="1" latinLnBrk="0" hangingPunct="1">
+                <a:defRPr sz="1800" kern="1200">
+                  <a:solidFill>
+                    <a:schemeClr val="tx1"/>
+                  </a:solidFill>
+                  <a:latin typeface="+mn-lt"/>
+                  <a:ea typeface="+mn-ea"/>
+                  <a:cs typeface="+mn-cs"/>
+                </a:defRPr>
+              </a:lvl5pPr>
+              <a:lvl6pPr marL="2286000" algn="l" defTabSz="914400" rtl="0" eaLnBrk="1" latinLnBrk="0" hangingPunct="1">
+                <a:defRPr sz="1800" kern="1200">
+                  <a:solidFill>
+                    <a:schemeClr val="tx1"/>
+                  </a:solidFill>
+                  <a:latin typeface="+mn-lt"/>
+                  <a:ea typeface="+mn-ea"/>
+                  <a:cs typeface="+mn-cs"/>
+                </a:defRPr>
+              </a:lvl6pPr>
+              <a:lvl7pPr marL="2743200" algn="l" defTabSz="914400" rtl="0" eaLnBrk="1" latinLnBrk="0" hangingPunct="1">
+                <a:defRPr sz="1800" kern="1200">
+                  <a:solidFill>
+                    <a:schemeClr val="tx1"/>
+                  </a:solidFill>
+                  <a:latin typeface="+mn-lt"/>
+                  <a:ea typeface="+mn-ea"/>
+                  <a:cs typeface="+mn-cs"/>
+                </a:defRPr>
+              </a:lvl7pPr>
+              <a:lvl8pPr marL="3200400" algn="l" defTabSz="914400" rtl="0" eaLnBrk="1" latinLnBrk="0" hangingPunct="1">
+                <a:defRPr sz="1800" kern="1200">
+                  <a:solidFill>
+                    <a:schemeClr val="tx1"/>
+                  </a:solidFill>
+                  <a:latin typeface="+mn-lt"/>
+                  <a:ea typeface="+mn-ea"/>
+                  <a:cs typeface="+mn-cs"/>
+                </a:defRPr>
+              </a:lvl8pPr>
+              <a:lvl9pPr marL="3657600" algn="l" defTabSz="914400" rtl="0" eaLnBrk="1" latinLnBrk="0" hangingPunct="1">
+                <a:defRPr sz="1800" kern="1200">
+                  <a:solidFill>
+                    <a:schemeClr val="tx1"/>
+                  </a:solidFill>
+                  <a:latin typeface="+mn-lt"/>
+                  <a:ea typeface="+mn-ea"/>
+                  <a:cs typeface="+mn-cs"/>
+                </a:defRPr>
+              </a:lvl9pPr>
+            </a:lstStyle>
+            <a:p>
+              <a:pPr marL="0" indent="0" algn="ctr">
+                <a:buNone/>
+              </a:pPr>
+              <a:r>
+                <a:rPr lang="en-US" sz="800" b="1" dirty="0">
+                  <a:solidFill>
+                    <a:srgbClr val="FFFFFF"/>
+                  </a:solidFill>
+                  <a:latin typeface="Calibri" pitchFamily="34" charset="0"/>
+                  <a:ea typeface="Calibri" pitchFamily="34" charset="-122"/>
+                  <a:cs typeface="Calibri" pitchFamily="34" charset="-120"/>
+                </a:rPr>
+                <a:t>OK</a:t>
+              </a:r>
+              <a:endParaRPr lang="en-US" sz="800" dirty="0"/>
+            </a:p>
+          </p:txBody>
+        </p:sp>
+      </p:grpSp>
+      <p:grpSp>
+        <p:nvGrpSpPr>
+          <p:cNvPr id="55" name="Grupo 54">
+            <a:extLst>
+              <a:ext uri="{FF2B5EF4-FFF2-40B4-BE49-F238E27FC236}">
+                <a16:creationId xmlns:a16="http://schemas.microsoft.com/office/drawing/2014/main" id="{5202F08A-ED61-9B8C-8AD3-F5EB832DD790}"/>
+              </a:ext>
+            </a:extLst>
+          </p:cNvPr>
+          <p:cNvGrpSpPr/>
+          <p:nvPr/>
+        </p:nvGrpSpPr>
+        <p:grpSpPr>
+          <a:xfrm>
+            <a:off x="5687195" y="4443285"/>
+            <a:ext cx="347472" cy="259764"/>
+            <a:chOff x="5760720" y="1550748"/>
+            <a:chExt cx="347472" cy="259764"/>
+          </a:xfrm>
+        </p:grpSpPr>
+        <p:sp>
+          <p:nvSpPr>
+            <p:cNvPr id="56" name="Shape 7">
+              <a:extLst>
+                <a:ext uri="{FF2B5EF4-FFF2-40B4-BE49-F238E27FC236}">
+                  <a16:creationId xmlns:a16="http://schemas.microsoft.com/office/drawing/2014/main" id="{C55BFE77-B7E0-C91E-3A8B-A37959A10A7C}"/>
+                </a:ext>
+              </a:extLst>
+            </p:cNvPr>
+            <p:cNvSpPr/>
+            <p:nvPr/>
+          </p:nvSpPr>
+          <p:spPr>
+            <a:xfrm>
+              <a:off x="5760720" y="1554480"/>
+              <a:ext cx="347472" cy="256032"/>
+            </a:xfrm>
+            <a:prstGeom prst="roundRect">
+              <a:avLst>
+                <a:gd name="adj" fmla="val 17857"/>
+              </a:avLst>
+            </a:prstGeom>
             <a:solidFill>
               <a:srgbClr val="10B981"/>
             </a:solidFill>
-            <a:prstDash val="solid"/>
-          </a:ln>
-        </p:spPr>
-      </p:sp>
-      <p:sp>
-        <p:nvSpPr>
-          <p:cNvPr id="32" name="Text 29"/>
-          <p:cNvSpPr/>
-          <p:nvPr/>
-        </p:nvSpPr>
-        <p:spPr>
-          <a:xfrm>
-            <a:off x="5760720" y="4434840"/>
-            <a:ext cx="256032" cy="256032"/>
-          </a:xfrm>
-          <a:prstGeom prst="rect">
-            <a:avLst/>
-          </a:prstGeom>
-          <a:noFill/>
-          <a:ln/>
-        </p:spPr>
-        <p:txBody>
-          <a:bodyPr wrap="square" rtlCol="0" anchor="ctr"/>
-          <a:lstStyle/>
-          <a:p>
-            <a:pPr algn="ctr" indent="0" marL="0">
-              <a:buNone/>
-            </a:pPr>
-            <a:r>
-              <a:rPr lang="en-US" sz="800" b="1" dirty="0">
-                <a:solidFill>
-                  <a:srgbClr val="FFFFFF"/>
-                </a:solidFill>
-                <a:latin typeface="Calibri" pitchFamily="34" charset="0"/>
-                <a:ea typeface="Calibri" pitchFamily="34" charset="-122"/>
-                <a:cs typeface="Calibri" pitchFamily="34" charset="-120"/>
-              </a:rPr>
-              <a:t>OK</a:t>
-            </a:r>
-            <a:endParaRPr lang="en-US" sz="800" dirty="0"/>
-          </a:p>
-        </p:txBody>
-      </p:sp>
-      <p:sp>
-        <p:nvSpPr>
-          <p:cNvPr id="33" name="Text 30"/>
-          <p:cNvSpPr/>
-          <p:nvPr/>
-        </p:nvSpPr>
-        <p:spPr>
-          <a:xfrm>
-            <a:off x="6108192" y="4389120"/>
-            <a:ext cx="3108960" cy="365760"/>
-          </a:xfrm>
-          <a:prstGeom prst="rect">
-            <a:avLst/>
-          </a:prstGeom>
-          <a:noFill/>
-          <a:ln/>
-        </p:spPr>
-        <p:txBody>
-          <a:bodyPr wrap="square" rtlCol="0" anchor="ctr"/>
-          <a:lstStyle/>
-          <a:p>
-            <a:pPr indent="0" marL="0">
-              <a:buNone/>
-            </a:pPr>
-            <a:r>
-              <a:rPr lang="en-US" sz="1200" dirty="0">
-                <a:solidFill>
-                  <a:srgbClr val="CBD5E1"/>
-                </a:solidFill>
-                <a:latin typeface="Calibri" pitchFamily="34" charset="0"/>
-                <a:ea typeface="Calibri" pitchFamily="34" charset="-122"/>
-                <a:cs typeface="Calibri" pitchFamily="34" charset="-120"/>
-              </a:rPr>
-              <a:t>Cron jobs (expiración pioneros)</a:t>
-            </a:r>
-            <a:endParaRPr lang="en-US" sz="1200" dirty="0"/>
-          </a:p>
-        </p:txBody>
-      </p:sp>
+            <a:ln w="12700">
+              <a:solidFill>
+                <a:srgbClr val="10B981"/>
+              </a:solidFill>
+              <a:prstDash val="solid"/>
+            </a:ln>
+          </p:spPr>
+          <p:txBody>
+            <a:bodyPr/>
+            <a:lstStyle>
+              <a:lvl1pPr marL="0" algn="l" defTabSz="914400" rtl="0" eaLnBrk="1" latinLnBrk="0" hangingPunct="1">
+                <a:defRPr sz="1800" kern="1200">
+                  <a:solidFill>
+                    <a:schemeClr val="tx1"/>
+                  </a:solidFill>
+                  <a:latin typeface="+mn-lt"/>
+                  <a:ea typeface="+mn-ea"/>
+                  <a:cs typeface="+mn-cs"/>
+                </a:defRPr>
+              </a:lvl1pPr>
+              <a:lvl2pPr marL="457200" algn="l" defTabSz="914400" rtl="0" eaLnBrk="1" latinLnBrk="0" hangingPunct="1">
+                <a:defRPr sz="1800" kern="1200">
+                  <a:solidFill>
+                    <a:schemeClr val="tx1"/>
+                  </a:solidFill>
+                  <a:latin typeface="+mn-lt"/>
+                  <a:ea typeface="+mn-ea"/>
+                  <a:cs typeface="+mn-cs"/>
+                </a:defRPr>
+              </a:lvl2pPr>
+              <a:lvl3pPr marL="914400" algn="l" defTabSz="914400" rtl="0" eaLnBrk="1" latinLnBrk="0" hangingPunct="1">
+                <a:defRPr sz="1800" kern="1200">
+                  <a:solidFill>
+                    <a:schemeClr val="tx1"/>
+                  </a:solidFill>
+                  <a:latin typeface="+mn-lt"/>
+                  <a:ea typeface="+mn-ea"/>
+                  <a:cs typeface="+mn-cs"/>
+                </a:defRPr>
+              </a:lvl3pPr>
+              <a:lvl4pPr marL="1371600" algn="l" defTabSz="914400" rtl="0" eaLnBrk="1" latinLnBrk="0" hangingPunct="1">
+                <a:defRPr sz="1800" kern="1200">
+                  <a:solidFill>
+                    <a:schemeClr val="tx1"/>
+                  </a:solidFill>
+                  <a:latin typeface="+mn-lt"/>
+                  <a:ea typeface="+mn-ea"/>
+                  <a:cs typeface="+mn-cs"/>
+                </a:defRPr>
+              </a:lvl4pPr>
+              <a:lvl5pPr marL="1828800" algn="l" defTabSz="914400" rtl="0" eaLnBrk="1" latinLnBrk="0" hangingPunct="1">
+                <a:defRPr sz="1800" kern="1200">
+                  <a:solidFill>
+                    <a:schemeClr val="tx1"/>
+                  </a:solidFill>
+                  <a:latin typeface="+mn-lt"/>
+                  <a:ea typeface="+mn-ea"/>
+                  <a:cs typeface="+mn-cs"/>
+                </a:defRPr>
+              </a:lvl5pPr>
+              <a:lvl6pPr marL="2286000" algn="l" defTabSz="914400" rtl="0" eaLnBrk="1" latinLnBrk="0" hangingPunct="1">
+                <a:defRPr sz="1800" kern="1200">
+                  <a:solidFill>
+                    <a:schemeClr val="tx1"/>
+                  </a:solidFill>
+                  <a:latin typeface="+mn-lt"/>
+                  <a:ea typeface="+mn-ea"/>
+                  <a:cs typeface="+mn-cs"/>
+                </a:defRPr>
+              </a:lvl6pPr>
+              <a:lvl7pPr marL="2743200" algn="l" defTabSz="914400" rtl="0" eaLnBrk="1" latinLnBrk="0" hangingPunct="1">
+                <a:defRPr sz="1800" kern="1200">
+                  <a:solidFill>
+                    <a:schemeClr val="tx1"/>
+                  </a:solidFill>
+                  <a:latin typeface="+mn-lt"/>
+                  <a:ea typeface="+mn-ea"/>
+                  <a:cs typeface="+mn-cs"/>
+                </a:defRPr>
+              </a:lvl7pPr>
+              <a:lvl8pPr marL="3200400" algn="l" defTabSz="914400" rtl="0" eaLnBrk="1" latinLnBrk="0" hangingPunct="1">
+                <a:defRPr sz="1800" kern="1200">
+                  <a:solidFill>
+                    <a:schemeClr val="tx1"/>
+                  </a:solidFill>
+                  <a:latin typeface="+mn-lt"/>
+                  <a:ea typeface="+mn-ea"/>
+                  <a:cs typeface="+mn-cs"/>
+                </a:defRPr>
+              </a:lvl8pPr>
+              <a:lvl9pPr marL="3657600" algn="l" defTabSz="914400" rtl="0" eaLnBrk="1" latinLnBrk="0" hangingPunct="1">
+                <a:defRPr sz="1800" kern="1200">
+                  <a:solidFill>
+                    <a:schemeClr val="tx1"/>
+                  </a:solidFill>
+                  <a:latin typeface="+mn-lt"/>
+                  <a:ea typeface="+mn-ea"/>
+                  <a:cs typeface="+mn-cs"/>
+                </a:defRPr>
+              </a:lvl9pPr>
+            </a:lstStyle>
+            <a:p>
+              <a:endParaRPr lang="es-CO" sz="1600" dirty="0"/>
+            </a:p>
+          </p:txBody>
+        </p:sp>
+        <p:sp>
+          <p:nvSpPr>
+            <p:cNvPr id="57" name="Text 8">
+              <a:extLst>
+                <a:ext uri="{FF2B5EF4-FFF2-40B4-BE49-F238E27FC236}">
+                  <a16:creationId xmlns:a16="http://schemas.microsoft.com/office/drawing/2014/main" id="{57D85F29-D9B7-5810-8761-BAE0E958BF64}"/>
+                </a:ext>
+              </a:extLst>
+            </p:cNvPr>
+            <p:cNvSpPr/>
+            <p:nvPr/>
+          </p:nvSpPr>
+          <p:spPr>
+            <a:xfrm>
+              <a:off x="5760720" y="1550748"/>
+              <a:ext cx="347472" cy="256032"/>
+            </a:xfrm>
+            <a:prstGeom prst="rect">
+              <a:avLst/>
+            </a:prstGeom>
+            <a:noFill/>
+            <a:ln/>
+          </p:spPr>
+          <p:txBody>
+            <a:bodyPr wrap="square" rtlCol="0" anchor="ctr"/>
+            <a:lstStyle>
+              <a:lvl1pPr marL="0" algn="l" defTabSz="914400" rtl="0" eaLnBrk="1" latinLnBrk="0" hangingPunct="1">
+                <a:defRPr sz="1800" kern="1200">
+                  <a:solidFill>
+                    <a:schemeClr val="tx1"/>
+                  </a:solidFill>
+                  <a:latin typeface="+mn-lt"/>
+                  <a:ea typeface="+mn-ea"/>
+                  <a:cs typeface="+mn-cs"/>
+                </a:defRPr>
+              </a:lvl1pPr>
+              <a:lvl2pPr marL="457200" algn="l" defTabSz="914400" rtl="0" eaLnBrk="1" latinLnBrk="0" hangingPunct="1">
+                <a:defRPr sz="1800" kern="1200">
+                  <a:solidFill>
+                    <a:schemeClr val="tx1"/>
+                  </a:solidFill>
+                  <a:latin typeface="+mn-lt"/>
+                  <a:ea typeface="+mn-ea"/>
+                  <a:cs typeface="+mn-cs"/>
+                </a:defRPr>
+              </a:lvl2pPr>
+              <a:lvl3pPr marL="914400" algn="l" defTabSz="914400" rtl="0" eaLnBrk="1" latinLnBrk="0" hangingPunct="1">
+                <a:defRPr sz="1800" kern="1200">
+                  <a:solidFill>
+                    <a:schemeClr val="tx1"/>
+                  </a:solidFill>
+                  <a:latin typeface="+mn-lt"/>
+                  <a:ea typeface="+mn-ea"/>
+                  <a:cs typeface="+mn-cs"/>
+                </a:defRPr>
+              </a:lvl3pPr>
+              <a:lvl4pPr marL="1371600" algn="l" defTabSz="914400" rtl="0" eaLnBrk="1" latinLnBrk="0" hangingPunct="1">
+                <a:defRPr sz="1800" kern="1200">
+                  <a:solidFill>
+                    <a:schemeClr val="tx1"/>
+                  </a:solidFill>
+                  <a:latin typeface="+mn-lt"/>
+                  <a:ea typeface="+mn-ea"/>
+                  <a:cs typeface="+mn-cs"/>
+                </a:defRPr>
+              </a:lvl4pPr>
+              <a:lvl5pPr marL="1828800" algn="l" defTabSz="914400" rtl="0" eaLnBrk="1" latinLnBrk="0" hangingPunct="1">
+                <a:defRPr sz="1800" kern="1200">
+                  <a:solidFill>
+                    <a:schemeClr val="tx1"/>
+                  </a:solidFill>
+                  <a:latin typeface="+mn-lt"/>
+                  <a:ea typeface="+mn-ea"/>
+                  <a:cs typeface="+mn-cs"/>
+                </a:defRPr>
+              </a:lvl5pPr>
+              <a:lvl6pPr marL="2286000" algn="l" defTabSz="914400" rtl="0" eaLnBrk="1" latinLnBrk="0" hangingPunct="1">
+                <a:defRPr sz="1800" kern="1200">
+                  <a:solidFill>
+                    <a:schemeClr val="tx1"/>
+                  </a:solidFill>
+                  <a:latin typeface="+mn-lt"/>
+                  <a:ea typeface="+mn-ea"/>
+                  <a:cs typeface="+mn-cs"/>
+                </a:defRPr>
+              </a:lvl6pPr>
+              <a:lvl7pPr marL="2743200" algn="l" defTabSz="914400" rtl="0" eaLnBrk="1" latinLnBrk="0" hangingPunct="1">
+                <a:defRPr sz="1800" kern="1200">
+                  <a:solidFill>
+                    <a:schemeClr val="tx1"/>
+                  </a:solidFill>
+                  <a:latin typeface="+mn-lt"/>
+                  <a:ea typeface="+mn-ea"/>
+                  <a:cs typeface="+mn-cs"/>
+                </a:defRPr>
+              </a:lvl7pPr>
+              <a:lvl8pPr marL="3200400" algn="l" defTabSz="914400" rtl="0" eaLnBrk="1" latinLnBrk="0" hangingPunct="1">
+                <a:defRPr sz="1800" kern="1200">
+                  <a:solidFill>
+                    <a:schemeClr val="tx1"/>
+                  </a:solidFill>
+                  <a:latin typeface="+mn-lt"/>
+                  <a:ea typeface="+mn-ea"/>
+                  <a:cs typeface="+mn-cs"/>
+                </a:defRPr>
+              </a:lvl8pPr>
+              <a:lvl9pPr marL="3657600" algn="l" defTabSz="914400" rtl="0" eaLnBrk="1" latinLnBrk="0" hangingPunct="1">
+                <a:defRPr sz="1800" kern="1200">
+                  <a:solidFill>
+                    <a:schemeClr val="tx1"/>
+                  </a:solidFill>
+                  <a:latin typeface="+mn-lt"/>
+                  <a:ea typeface="+mn-ea"/>
+                  <a:cs typeface="+mn-cs"/>
+                </a:defRPr>
+              </a:lvl9pPr>
+            </a:lstStyle>
+            <a:p>
+              <a:pPr marL="0" indent="0" algn="ctr">
+                <a:buNone/>
+              </a:pPr>
+              <a:r>
+                <a:rPr lang="en-US" sz="800" b="1" dirty="0">
+                  <a:solidFill>
+                    <a:srgbClr val="FFFFFF"/>
+                  </a:solidFill>
+                  <a:latin typeface="Calibri" pitchFamily="34" charset="0"/>
+                  <a:ea typeface="Calibri" pitchFamily="34" charset="-122"/>
+                  <a:cs typeface="Calibri" pitchFamily="34" charset="-120"/>
+                </a:rPr>
+                <a:t>OK</a:t>
+              </a:r>
+              <a:endParaRPr lang="en-US" sz="800" dirty="0"/>
+            </a:p>
+          </p:txBody>
+        </p:sp>
+      </p:grpSp>
     </p:spTree>
   </p:cSld>
   <p:clrMapOvr>
@@ -8921,6 +11017,7 @@
         <a:solidFill>
           <a:srgbClr val="FFFFFF"/>
         </a:solidFill>
+        <a:effectLst/>
       </p:bgPr>
     </p:bg>
     <p:spTree>
@@ -8961,6 +11058,13 @@
             <a:prstDash val="solid"/>
           </a:ln>
         </p:spPr>
+        <p:txBody>
+          <a:bodyPr/>
+          <a:lstStyle/>
+          <a:p>
+            <a:endParaRPr lang="es-CO"/>
+          </a:p>
+        </p:txBody>
       </p:sp>
       <p:sp>
         <p:nvSpPr>
@@ -8983,11 +11087,11 @@
           <a:bodyPr wrap="square" rtlCol="0" anchor="ctr"/>
           <a:lstStyle/>
           <a:p>
-            <a:pPr indent="0" marL="0">
-              <a:buNone/>
-            </a:pPr>
-            <a:r>
-              <a:rPr lang="en-US" sz="900" b="1" spc="200" kern="0" dirty="0">
+            <a:pPr marL="0" indent="0">
+              <a:buNone/>
+            </a:pPr>
+            <a:r>
+              <a:rPr lang="en-US" sz="900" b="1" kern="0" spc="200" dirty="0">
                 <a:solidFill>
                   <a:srgbClr val="F97316"/>
                 </a:solidFill>
@@ -9001,29 +11105,6 @@
           </a:p>
         </p:txBody>
       </p:sp>
-      <p:pic>
-        <p:nvPicPr>
-          <p:cNvPr id="4" name="Image 0" descr="C:\Users\cesar\OneDrive\Escritorio\FREELANCE\SpotU\docs\assets\logo-horizontal.png">    </p:cNvPr>
-          <p:cNvPicPr>
-            <a:picLocks noChangeAspect="1"/>
-          </p:cNvPicPr>
-          <p:nvPr/>
-        </p:nvPicPr>
-        <p:blipFill>
-          <a:blip r:embed="rId1"/>
-          <a:srcRect l="0" r="0" t="0" b="0"/>
-          <a:stretch/>
-        </p:blipFill>
-        <p:spPr>
-          <a:xfrm>
-            <a:off x="7315200" y="292608"/>
-            <a:ext cx="1371600" cy="384048"/>
-          </a:xfrm>
-          <a:prstGeom prst="rect">
-            <a:avLst/>
-          </a:prstGeom>
-        </p:spPr>
-      </p:pic>
       <p:sp>
         <p:nvSpPr>
           <p:cNvPr id="5" name="Text 2"/>
@@ -9045,7 +11126,7 @@
           <a:bodyPr wrap="square" rtlCol="0" anchor="ctr"/>
           <a:lstStyle/>
           <a:p>
-            <a:pPr indent="0" marL="0">
+            <a:pPr marL="0" indent="0">
               <a:buNone/>
             </a:pPr>
             <a:r>
@@ -9085,6 +11166,13 @@
             <a:prstDash val="solid"/>
           </a:ln>
         </p:spPr>
+        <p:txBody>
+          <a:bodyPr/>
+          <a:lstStyle/>
+          <a:p>
+            <a:endParaRPr lang="es-CO"/>
+          </a:p>
+        </p:txBody>
       </p:sp>
       <p:sp>
         <p:nvSpPr>
@@ -9112,6 +11200,13 @@
             <a:prstDash val="solid"/>
           </a:ln>
         </p:spPr>
+        <p:txBody>
+          <a:bodyPr/>
+          <a:lstStyle/>
+          <a:p>
+            <a:endParaRPr lang="es-CO"/>
+          </a:p>
+        </p:txBody>
       </p:sp>
       <p:sp>
         <p:nvSpPr>
@@ -9134,7 +11229,7 @@
           <a:bodyPr wrap="square" rtlCol="0" anchor="ctr"/>
           <a:lstStyle/>
           <a:p>
-            <a:pPr algn="ctr" indent="0" marL="0">
+            <a:pPr marL="0" indent="0" algn="ctr">
               <a:buNone/>
             </a:pPr>
             <a:r>
@@ -9173,7 +11268,7 @@
           <a:bodyPr wrap="square" rtlCol="0" anchor="ctr"/>
           <a:lstStyle/>
           <a:p>
-            <a:pPr algn="ctr" indent="0" marL="0">
+            <a:pPr marL="0" indent="0" algn="ctr">
               <a:buNone/>
             </a:pPr>
             <a:r>
@@ -9212,7 +11307,7 @@
           <a:bodyPr wrap="square" rtlCol="0" anchor="ctr"/>
           <a:lstStyle/>
           <a:p>
-            <a:pPr algn="ctr" indent="0" marL="0">
+            <a:pPr marL="0" indent="0" algn="ctr">
               <a:buNone/>
             </a:pPr>
             <a:r>
@@ -9256,6 +11351,13 @@
             <a:prstDash val="solid"/>
           </a:ln>
         </p:spPr>
+        <p:txBody>
+          <a:bodyPr/>
+          <a:lstStyle/>
+          <a:p>
+            <a:endParaRPr lang="es-CO"/>
+          </a:p>
+        </p:txBody>
       </p:sp>
       <p:sp>
         <p:nvSpPr>
@@ -9278,7 +11380,7 @@
           <a:bodyPr wrap="square" rtlCol="0" anchor="ctr"/>
           <a:lstStyle/>
           <a:p>
-            <a:pPr algn="ctr" indent="0" marL="0">
+            <a:pPr marL="0" indent="0" algn="ctr">
               <a:buNone/>
             </a:pPr>
             <a:r>
@@ -9317,7 +11419,7 @@
           <a:bodyPr wrap="square" rtlCol="0" anchor="ctr"/>
           <a:lstStyle/>
           <a:p>
-            <a:pPr algn="ctr" indent="0" marL="0">
+            <a:pPr marL="0" indent="0" algn="ctr">
               <a:buNone/>
             </a:pPr>
             <a:r>
@@ -9356,7 +11458,7 @@
           <a:bodyPr wrap="square" rtlCol="0" anchor="ctr"/>
           <a:lstStyle/>
           <a:p>
-            <a:pPr algn="ctr" indent="0" marL="0">
+            <a:pPr marL="0" indent="0" algn="ctr">
               <a:buNone/>
             </a:pPr>
             <a:r>
@@ -9400,6 +11502,13 @@
             <a:prstDash val="solid"/>
           </a:ln>
         </p:spPr>
+        <p:txBody>
+          <a:bodyPr/>
+          <a:lstStyle/>
+          <a:p>
+            <a:endParaRPr lang="es-CO"/>
+          </a:p>
+        </p:txBody>
       </p:sp>
       <p:sp>
         <p:nvSpPr>
@@ -9422,7 +11531,7 @@
           <a:bodyPr wrap="square" rtlCol="0" anchor="ctr"/>
           <a:lstStyle/>
           <a:p>
-            <a:pPr algn="ctr" indent="0" marL="0">
+            <a:pPr marL="0" indent="0" algn="ctr">
               <a:buNone/>
             </a:pPr>
             <a:r>
@@ -9461,7 +11570,7 @@
           <a:bodyPr wrap="square" rtlCol="0" anchor="ctr"/>
           <a:lstStyle/>
           <a:p>
-            <a:pPr algn="ctr" indent="0" marL="0">
+            <a:pPr marL="0" indent="0" algn="ctr">
               <a:buNone/>
             </a:pPr>
             <a:r>
@@ -9500,7 +11609,7 @@
           <a:bodyPr wrap="square" rtlCol="0" anchor="ctr"/>
           <a:lstStyle/>
           <a:p>
-            <a:pPr algn="ctr" indent="0" marL="0">
+            <a:pPr marL="0" indent="0" algn="ctr">
               <a:buNone/>
             </a:pPr>
             <a:r>
@@ -9539,7 +11648,7 @@
           <a:bodyPr wrap="square" rtlCol="0" anchor="ctr"/>
           <a:lstStyle/>
           <a:p>
-            <a:pPr algn="ctr" indent="0" marL="0">
+            <a:pPr marL="0" indent="0" algn="ctr">
               <a:buNone/>
             </a:pPr>
             <a:r>
@@ -9578,7 +11687,7 @@
           <a:bodyPr wrap="square" rtlCol="0" anchor="ctr"/>
           <a:lstStyle/>
           <a:p>
-            <a:pPr algn="ctr" indent="0" marL="0">
+            <a:pPr marL="0" indent="0" algn="ctr">
               <a:buNone/>
             </a:pPr>
             <a:r>
@@ -9617,7 +11726,7 @@
           <a:bodyPr wrap="square" rtlCol="0" anchor="ctr"/>
           <a:lstStyle/>
           <a:p>
-            <a:pPr algn="ctr" indent="0" marL="0">
+            <a:pPr marL="0" indent="0" algn="ctr">
               <a:buNone/>
             </a:pPr>
             <a:r>
@@ -9656,7 +11765,7 @@
           <a:bodyPr wrap="square" rtlCol="0" anchor="ctr"/>
           <a:lstStyle/>
           <a:p>
-            <a:pPr algn="ctr" indent="0" marL="0">
+            <a:pPr marL="0" indent="0" algn="ctr">
               <a:buNone/>
             </a:pPr>
             <a:r>
@@ -9695,7 +11804,7 @@
           <a:bodyPr wrap="square" rtlCol="0" anchor="ctr"/>
           <a:lstStyle/>
           <a:p>
-            <a:pPr algn="ctr" indent="0" marL="0">
+            <a:pPr marL="0" indent="0" algn="ctr">
               <a:buNone/>
             </a:pPr>
             <a:r>
@@ -9734,7 +11843,7 @@
           <a:bodyPr wrap="square" rtlCol="0" anchor="ctr"/>
           <a:lstStyle/>
           <a:p>
-            <a:pPr algn="ctr" indent="0" marL="0">
+            <a:pPr marL="0" indent="0" algn="ctr">
               <a:buNone/>
             </a:pPr>
             <a:r>
@@ -9773,7 +11882,7 @@
           <a:bodyPr wrap="square" rtlCol="0" anchor="ctr"/>
           <a:lstStyle/>
           <a:p>
-            <a:pPr algn="ctr" indent="0" marL="0">
+            <a:pPr marL="0" indent="0" algn="ctr">
               <a:buNone/>
             </a:pPr>
             <a:r>
@@ -9791,6 +11900,36 @@
           </a:p>
         </p:txBody>
       </p:sp>
+      <p:pic>
+        <p:nvPicPr>
+          <p:cNvPr id="27" name="Imagen 26">
+            <a:extLst>
+              <a:ext uri="{FF2B5EF4-FFF2-40B4-BE49-F238E27FC236}">
+                <a16:creationId xmlns:a16="http://schemas.microsoft.com/office/drawing/2014/main" id="{8412979D-0B72-721B-38BB-387F508E818A}"/>
+              </a:ext>
+            </a:extLst>
+          </p:cNvPr>
+          <p:cNvPicPr>
+            <a:picLocks noChangeAspect="1"/>
+          </p:cNvPicPr>
+          <p:nvPr/>
+        </p:nvPicPr>
+        <p:blipFill>
+          <a:blip r:embed="rId3"/>
+          <a:stretch>
+            <a:fillRect/>
+          </a:stretch>
+        </p:blipFill>
+        <p:spPr>
+          <a:xfrm>
+            <a:off x="7877556" y="143810"/>
+            <a:ext cx="1216152" cy="663356"/>
+          </a:xfrm>
+          <a:prstGeom prst="rect">
+            <a:avLst/>
+          </a:prstGeom>
+        </p:spPr>
+      </p:pic>
     </p:spTree>
   </p:cSld>
   <p:clrMapOvr>
@@ -9807,6 +11946,7 @@
         <a:solidFill>
           <a:srgbClr val="FFFFFF"/>
         </a:solidFill>
+        <a:effectLst/>
       </p:bgPr>
     </p:bg>
     <p:spTree>
@@ -9847,6 +11987,13 @@
             <a:prstDash val="solid"/>
           </a:ln>
         </p:spPr>
+        <p:txBody>
+          <a:bodyPr/>
+          <a:lstStyle/>
+          <a:p>
+            <a:endParaRPr lang="es-CO"/>
+          </a:p>
+        </p:txBody>
       </p:sp>
       <p:sp>
         <p:nvSpPr>
@@ -9869,11 +12016,11 @@
           <a:bodyPr wrap="square" rtlCol="0" anchor="ctr"/>
           <a:lstStyle/>
           <a:p>
-            <a:pPr indent="0" marL="0">
-              <a:buNone/>
-            </a:pPr>
-            <a:r>
-              <a:rPr lang="en-US" sz="900" b="1" spc="200" kern="0" dirty="0">
+            <a:pPr marL="0" indent="0">
+              <a:buNone/>
+            </a:pPr>
+            <a:r>
+              <a:rPr lang="en-US" sz="900" b="1" kern="0" spc="200" dirty="0">
                 <a:solidFill>
                   <a:srgbClr val="F97316"/>
                 </a:solidFill>
@@ -9887,29 +12034,6 @@
           </a:p>
         </p:txBody>
       </p:sp>
-      <p:pic>
-        <p:nvPicPr>
-          <p:cNvPr id="4" name="Image 0" descr="C:\Users\cesar\OneDrive\Escritorio\FREELANCE\SpotU\docs\assets\logo-horizontal.png">    </p:cNvPr>
-          <p:cNvPicPr>
-            <a:picLocks noChangeAspect="1"/>
-          </p:cNvPicPr>
-          <p:nvPr/>
-        </p:nvPicPr>
-        <p:blipFill>
-          <a:blip r:embed="rId1"/>
-          <a:srcRect l="0" r="0" t="0" b="0"/>
-          <a:stretch/>
-        </p:blipFill>
-        <p:spPr>
-          <a:xfrm>
-            <a:off x="7315200" y="292608"/>
-            <a:ext cx="1371600" cy="384048"/>
-          </a:xfrm>
-          <a:prstGeom prst="rect">
-            <a:avLst/>
-          </a:prstGeom>
-        </p:spPr>
-      </p:pic>
       <p:sp>
         <p:nvSpPr>
           <p:cNvPr id="5" name="Text 2"/>
@@ -9931,7 +12055,7 @@
           <a:bodyPr wrap="square" rtlCol="0" anchor="ctr"/>
           <a:lstStyle/>
           <a:p>
-            <a:pPr indent="0" marL="0">
+            <a:pPr marL="0" indent="0">
               <a:buNone/>
             </a:pPr>
             <a:r>
@@ -9971,6 +12095,13 @@
             <a:prstDash val="solid"/>
           </a:ln>
         </p:spPr>
+        <p:txBody>
+          <a:bodyPr/>
+          <a:lstStyle/>
+          <a:p>
+            <a:endParaRPr lang="es-CO"/>
+          </a:p>
+        </p:txBody>
       </p:sp>
       <p:sp>
         <p:nvSpPr>
@@ -9998,6 +12129,13 @@
             <a:prstDash val="solid"/>
           </a:ln>
         </p:spPr>
+        <p:txBody>
+          <a:bodyPr/>
+          <a:lstStyle/>
+          <a:p>
+            <a:endParaRPr lang="es-CO"/>
+          </a:p>
+        </p:txBody>
       </p:sp>
       <p:sp>
         <p:nvSpPr>
@@ -10020,7 +12158,7 @@
           <a:bodyPr wrap="square" rtlCol="0" anchor="ctr"/>
           <a:lstStyle/>
           <a:p>
-            <a:pPr algn="ctr" indent="0" marL="0">
+            <a:pPr marL="0" indent="0" algn="ctr">
               <a:buNone/>
             </a:pPr>
             <a:r>
@@ -10059,7 +12197,7 @@
           <a:bodyPr wrap="square" rtlCol="0" anchor="ctr"/>
           <a:lstStyle/>
           <a:p>
-            <a:pPr algn="ctr" indent="0" marL="0">
+            <a:pPr marL="0" indent="0" algn="ctr">
               <a:buNone/>
             </a:pPr>
             <a:r>
@@ -10098,7 +12236,7 @@
           <a:bodyPr wrap="square" rtlCol="0" anchor="ctr"/>
           <a:lstStyle/>
           <a:p>
-            <a:pPr algn="ctr" indent="0" marL="0">
+            <a:pPr marL="0" indent="0" algn="ctr">
               <a:buNone/>
             </a:pPr>
             <a:r>
@@ -10137,7 +12275,7 @@
           <a:bodyPr wrap="square" rtlCol="0" anchor="ctr"/>
           <a:lstStyle/>
           <a:p>
-            <a:pPr algn="ctr" indent="0" marL="0">
+            <a:pPr marL="0" indent="0" algn="ctr">
               <a:buNone/>
             </a:pPr>
             <a:r>
@@ -10181,6 +12319,13 @@
             <a:prstDash val="solid"/>
           </a:ln>
         </p:spPr>
+        <p:txBody>
+          <a:bodyPr/>
+          <a:lstStyle/>
+          <a:p>
+            <a:endParaRPr lang="es-CO"/>
+          </a:p>
+        </p:txBody>
       </p:sp>
       <p:sp>
         <p:nvSpPr>
@@ -10203,7 +12348,7 @@
           <a:bodyPr wrap="square" rtlCol="0" anchor="ctr"/>
           <a:lstStyle/>
           <a:p>
-            <a:pPr algn="ctr" indent="0" marL="0">
+            <a:pPr marL="0" indent="0" algn="ctr">
               <a:buNone/>
             </a:pPr>
             <a:r>
@@ -10242,7 +12387,7 @@
           <a:bodyPr wrap="square" rtlCol="0" anchor="ctr"/>
           <a:lstStyle/>
           <a:p>
-            <a:pPr algn="ctr" indent="0" marL="0">
+            <a:pPr marL="0" indent="0" algn="ctr">
               <a:buNone/>
             </a:pPr>
             <a:r>
@@ -10281,7 +12426,7 @@
           <a:bodyPr wrap="square" rtlCol="0" anchor="ctr"/>
           <a:lstStyle/>
           <a:p>
-            <a:pPr algn="ctr" indent="0" marL="0">
+            <a:pPr marL="0" indent="0" algn="ctr">
               <a:buNone/>
             </a:pPr>
             <a:r>
@@ -10320,7 +12465,7 @@
           <a:bodyPr wrap="square" rtlCol="0" anchor="ctr"/>
           <a:lstStyle/>
           <a:p>
-            <a:pPr algn="ctr" indent="0" marL="0">
+            <a:pPr marL="0" indent="0" algn="ctr">
               <a:buNone/>
             </a:pPr>
             <a:r>
@@ -10359,7 +12504,7 @@
           <a:bodyPr wrap="square" rtlCol="0" anchor="ctr"/>
           <a:lstStyle/>
           <a:p>
-            <a:pPr algn="ctr" indent="0" marL="0">
+            <a:pPr marL="0" indent="0" algn="ctr">
               <a:buNone/>
             </a:pPr>
             <a:r>
@@ -10377,6 +12522,36 @@
           </a:p>
         </p:txBody>
       </p:sp>
+      <p:pic>
+        <p:nvPicPr>
+          <p:cNvPr id="19" name="Imagen 18">
+            <a:extLst>
+              <a:ext uri="{FF2B5EF4-FFF2-40B4-BE49-F238E27FC236}">
+                <a16:creationId xmlns:a16="http://schemas.microsoft.com/office/drawing/2014/main" id="{8EF7DF71-B617-B7B9-6301-CF0EC4E627FE}"/>
+              </a:ext>
+            </a:extLst>
+          </p:cNvPr>
+          <p:cNvPicPr>
+            <a:picLocks noChangeAspect="1"/>
+          </p:cNvPicPr>
+          <p:nvPr/>
+        </p:nvPicPr>
+        <p:blipFill>
+          <a:blip r:embed="rId3"/>
+          <a:stretch>
+            <a:fillRect/>
+          </a:stretch>
+        </p:blipFill>
+        <p:spPr>
+          <a:xfrm>
+            <a:off x="7877556" y="143810"/>
+            <a:ext cx="1216152" cy="663356"/>
+          </a:xfrm>
+          <a:prstGeom prst="rect">
+            <a:avLst/>
+          </a:prstGeom>
+        </p:spPr>
+      </p:pic>
     </p:spTree>
   </p:cSld>
   <p:clrMapOvr>
@@ -10393,6 +12568,7 @@
         <a:solidFill>
           <a:srgbClr val="FFFFFF"/>
         </a:solidFill>
+        <a:effectLst/>
       </p:bgPr>
     </p:bg>
     <p:spTree>
@@ -10433,6 +12609,13 @@
             <a:prstDash val="solid"/>
           </a:ln>
         </p:spPr>
+        <p:txBody>
+          <a:bodyPr/>
+          <a:lstStyle/>
+          <a:p>
+            <a:endParaRPr lang="es-CO"/>
+          </a:p>
+        </p:txBody>
       </p:sp>
       <p:sp>
         <p:nvSpPr>
@@ -10455,11 +12638,11 @@
           <a:bodyPr wrap="square" rtlCol="0" anchor="ctr"/>
           <a:lstStyle/>
           <a:p>
-            <a:pPr indent="0" marL="0">
-              <a:buNone/>
-            </a:pPr>
-            <a:r>
-              <a:rPr lang="en-US" sz="900" b="1" spc="200" kern="0" dirty="0">
+            <a:pPr marL="0" indent="0">
+              <a:buNone/>
+            </a:pPr>
+            <a:r>
+              <a:rPr lang="en-US" sz="900" b="1" kern="0" spc="200" dirty="0">
                 <a:solidFill>
                   <a:srgbClr val="F97316"/>
                 </a:solidFill>
@@ -10473,29 +12656,6 @@
           </a:p>
         </p:txBody>
       </p:sp>
-      <p:pic>
-        <p:nvPicPr>
-          <p:cNvPr id="4" name="Image 0" descr="C:\Users\cesar\OneDrive\Escritorio\FREELANCE\SpotU\docs\assets\logo-horizontal.png">    </p:cNvPr>
-          <p:cNvPicPr>
-            <a:picLocks noChangeAspect="1"/>
-          </p:cNvPicPr>
-          <p:nvPr/>
-        </p:nvPicPr>
-        <p:blipFill>
-          <a:blip r:embed="rId1"/>
-          <a:srcRect l="0" r="0" t="0" b="0"/>
-          <a:stretch/>
-        </p:blipFill>
-        <p:spPr>
-          <a:xfrm>
-            <a:off x="7315200" y="292608"/>
-            <a:ext cx="1371600" cy="384048"/>
-          </a:xfrm>
-          <a:prstGeom prst="rect">
-            <a:avLst/>
-          </a:prstGeom>
-        </p:spPr>
-      </p:pic>
       <p:sp>
         <p:nvSpPr>
           <p:cNvPr id="5" name="Text 2"/>
@@ -10517,11 +12677,11 @@
           <a:bodyPr wrap="square" rtlCol="0" anchor="ctr"/>
           <a:lstStyle/>
           <a:p>
-            <a:pPr indent="0" marL="0">
-              <a:buNone/>
-            </a:pPr>
-            <a:r>
-              <a:rPr lang="en-US" sz="3000" b="1" dirty="0">
+            <a:pPr marL="0" indent="0">
+              <a:buNone/>
+            </a:pPr>
+            <a:r>
+              <a:rPr lang="en-US" sz="2400" b="1" dirty="0">
                 <a:solidFill>
                   <a:srgbClr val="0F172A"/>
                 </a:solidFill>
@@ -10529,9 +12689,36 @@
                 <a:ea typeface="Calibri" pitchFamily="34" charset="-122"/>
                 <a:cs typeface="Calibri" pitchFamily="34" charset="-120"/>
               </a:rPr>
-              <a:t>El mercado tiene jugadores fuertes. SpotU coexiste con ellos.</a:t>
-            </a:r>
-            <a:endParaRPr lang="en-US" sz="3000" dirty="0"/>
+              <a:t>El mercado tiene jugadores fuertes. </a:t>
+            </a:r>
+          </a:p>
+          <a:p>
+            <a:pPr marL="0" indent="0">
+              <a:buNone/>
+            </a:pPr>
+            <a:r>
+              <a:rPr lang="en-US" sz="2400" b="1" dirty="0" err="1">
+                <a:solidFill>
+                  <a:srgbClr val="0F172A"/>
+                </a:solidFill>
+                <a:latin typeface="Calibri" pitchFamily="34" charset="0"/>
+                <a:ea typeface="Calibri" pitchFamily="34" charset="-122"/>
+                <a:cs typeface="Calibri" pitchFamily="34" charset="-120"/>
+              </a:rPr>
+              <a:t>SpotU</a:t>
+            </a:r>
+            <a:r>
+              <a:rPr lang="en-US" sz="2400" b="1" dirty="0">
+                <a:solidFill>
+                  <a:srgbClr val="0F172A"/>
+                </a:solidFill>
+                <a:latin typeface="Calibri" pitchFamily="34" charset="0"/>
+                <a:ea typeface="Calibri" pitchFamily="34" charset="-122"/>
+                <a:cs typeface="Calibri" pitchFamily="34" charset="-120"/>
+              </a:rPr>
+              <a:t> coexiste con ellos.</a:t>
+            </a:r>
+            <a:endParaRPr lang="en-US" sz="2400" dirty="0"/>
           </a:p>
         </p:txBody>
       </p:sp>
@@ -10557,6 +12744,13 @@
             <a:prstDash val="solid"/>
           </a:ln>
         </p:spPr>
+        <p:txBody>
+          <a:bodyPr/>
+          <a:lstStyle/>
+          <a:p>
+            <a:endParaRPr lang="es-CO"/>
+          </a:p>
+        </p:txBody>
       </p:sp>
       <p:sp>
         <p:nvSpPr>
@@ -10584,6 +12778,13 @@
             <a:prstDash val="solid"/>
           </a:ln>
         </p:spPr>
+        <p:txBody>
+          <a:bodyPr/>
+          <a:lstStyle/>
+          <a:p>
+            <a:endParaRPr lang="es-CO"/>
+          </a:p>
+        </p:txBody>
       </p:sp>
       <p:sp>
         <p:nvSpPr>
@@ -10609,6 +12810,13 @@
             <a:prstDash val="solid"/>
           </a:ln>
         </p:spPr>
+        <p:txBody>
+          <a:bodyPr/>
+          <a:lstStyle/>
+          <a:p>
+            <a:endParaRPr lang="es-CO"/>
+          </a:p>
+        </p:txBody>
       </p:sp>
       <p:sp>
         <p:nvSpPr>
@@ -10631,7 +12839,7 @@
           <a:bodyPr wrap="square" rtlCol="0" anchor="ctr"/>
           <a:lstStyle/>
           <a:p>
-            <a:pPr indent="0" marL="0">
+            <a:pPr marL="0" indent="0">
               <a:buNone/>
             </a:pPr>
             <a:r>
@@ -10670,7 +12878,7 @@
           <a:bodyPr wrap="square" rtlCol="0" anchor="ctr"/>
           <a:lstStyle/>
           <a:p>
-            <a:pPr indent="0" marL="0">
+            <a:pPr marL="0" indent="0">
               <a:buNone/>
             </a:pPr>
             <a:r>
@@ -10709,7 +12917,7 @@
           <a:bodyPr wrap="square" rtlCol="0" anchor="ctr"/>
           <a:lstStyle/>
           <a:p>
-            <a:pPr indent="0" marL="0">
+            <a:pPr marL="0" indent="0">
               <a:buNone/>
             </a:pPr>
             <a:r>
@@ -10753,6 +12961,13 @@
             <a:prstDash val="solid"/>
           </a:ln>
         </p:spPr>
+        <p:txBody>
+          <a:bodyPr/>
+          <a:lstStyle/>
+          <a:p>
+            <a:endParaRPr lang="es-CO"/>
+          </a:p>
+        </p:txBody>
       </p:sp>
       <p:sp>
         <p:nvSpPr>
@@ -10778,6 +12993,13 @@
             <a:prstDash val="solid"/>
           </a:ln>
         </p:spPr>
+        <p:txBody>
+          <a:bodyPr/>
+          <a:lstStyle/>
+          <a:p>
+            <a:endParaRPr lang="es-CO"/>
+          </a:p>
+        </p:txBody>
       </p:sp>
       <p:sp>
         <p:nvSpPr>
@@ -10800,7 +13022,7 @@
           <a:bodyPr wrap="square" rtlCol="0" anchor="ctr"/>
           <a:lstStyle/>
           <a:p>
-            <a:pPr indent="0" marL="0">
+            <a:pPr marL="0" indent="0">
               <a:buNone/>
             </a:pPr>
             <a:r>
@@ -10839,7 +13061,7 @@
           <a:bodyPr wrap="square" rtlCol="0" anchor="ctr"/>
           <a:lstStyle/>
           <a:p>
-            <a:pPr indent="0" marL="0">
+            <a:pPr marL="0" indent="0">
               <a:buNone/>
             </a:pPr>
             <a:r>
@@ -10878,7 +13100,7 @@
           <a:bodyPr wrap="square" rtlCol="0" anchor="ctr"/>
           <a:lstStyle/>
           <a:p>
-            <a:pPr indent="0" marL="0">
+            <a:pPr marL="0" indent="0">
               <a:buNone/>
             </a:pPr>
             <a:r>
@@ -10922,6 +13144,13 @@
             <a:prstDash val="solid"/>
           </a:ln>
         </p:spPr>
+        <p:txBody>
+          <a:bodyPr/>
+          <a:lstStyle/>
+          <a:p>
+            <a:endParaRPr lang="es-CO"/>
+          </a:p>
+        </p:txBody>
       </p:sp>
       <p:sp>
         <p:nvSpPr>
@@ -10947,6 +13176,13 @@
             <a:prstDash val="solid"/>
           </a:ln>
         </p:spPr>
+        <p:txBody>
+          <a:bodyPr/>
+          <a:lstStyle/>
+          <a:p>
+            <a:endParaRPr lang="es-CO"/>
+          </a:p>
+        </p:txBody>
       </p:sp>
       <p:sp>
         <p:nvSpPr>
@@ -10969,7 +13205,7 @@
           <a:bodyPr wrap="square" rtlCol="0" anchor="ctr"/>
           <a:lstStyle/>
           <a:p>
-            <a:pPr indent="0" marL="0">
+            <a:pPr marL="0" indent="0">
               <a:buNone/>
             </a:pPr>
             <a:r>
@@ -11008,7 +13244,7 @@
           <a:bodyPr wrap="square" rtlCol="0" anchor="ctr"/>
           <a:lstStyle/>
           <a:p>
-            <a:pPr indent="0" marL="0">
+            <a:pPr marL="0" indent="0">
               <a:buNone/>
             </a:pPr>
             <a:r>
@@ -11047,7 +13283,7 @@
           <a:bodyPr wrap="square" rtlCol="0" anchor="ctr"/>
           <a:lstStyle/>
           <a:p>
-            <a:pPr indent="0" marL="0">
+            <a:pPr marL="0" indent="0">
               <a:buNone/>
             </a:pPr>
             <a:r>
@@ -11091,6 +13327,13 @@
             <a:prstDash val="solid"/>
           </a:ln>
         </p:spPr>
+        <p:txBody>
+          <a:bodyPr/>
+          <a:lstStyle/>
+          <a:p>
+            <a:endParaRPr lang="es-CO"/>
+          </a:p>
+        </p:txBody>
       </p:sp>
       <p:sp>
         <p:nvSpPr>
@@ -11116,6 +13359,13 @@
             <a:prstDash val="solid"/>
           </a:ln>
         </p:spPr>
+        <p:txBody>
+          <a:bodyPr/>
+          <a:lstStyle/>
+          <a:p>
+            <a:endParaRPr lang="es-CO"/>
+          </a:p>
+        </p:txBody>
       </p:sp>
       <p:sp>
         <p:nvSpPr>
@@ -11138,7 +13388,7 @@
           <a:bodyPr wrap="square" rtlCol="0" anchor="ctr"/>
           <a:lstStyle/>
           <a:p>
-            <a:pPr indent="0" marL="0">
+            <a:pPr marL="0" indent="0">
               <a:buNone/>
             </a:pPr>
             <a:r>
@@ -11177,7 +13427,7 @@
           <a:bodyPr wrap="square" rtlCol="0" anchor="ctr"/>
           <a:lstStyle/>
           <a:p>
-            <a:pPr indent="0" marL="0">
+            <a:pPr marL="0" indent="0">
               <a:buNone/>
             </a:pPr>
             <a:r>
@@ -11216,7 +13466,7 @@
           <a:bodyPr wrap="square" rtlCol="0" anchor="ctr"/>
           <a:lstStyle/>
           <a:p>
-            <a:pPr indent="0" marL="0">
+            <a:pPr marL="0" indent="0">
               <a:buNone/>
             </a:pPr>
             <a:r>
@@ -11255,7 +13505,7 @@
           <a:bodyPr wrap="square" rtlCol="0" anchor="ctr"/>
           <a:lstStyle/>
           <a:p>
-            <a:pPr algn="ctr" indent="0" marL="0">
+            <a:pPr marL="0" indent="0" algn="ctr">
               <a:buNone/>
             </a:pPr>
             <a:r>
@@ -11273,6 +13523,36 @@
           </a:p>
         </p:txBody>
       </p:sp>
+      <p:pic>
+        <p:nvPicPr>
+          <p:cNvPr id="29" name="Imagen 28">
+            <a:extLst>
+              <a:ext uri="{FF2B5EF4-FFF2-40B4-BE49-F238E27FC236}">
+                <a16:creationId xmlns:a16="http://schemas.microsoft.com/office/drawing/2014/main" id="{D5FD69AE-5DF3-62BF-6E9F-B63A83E158CB}"/>
+              </a:ext>
+            </a:extLst>
+          </p:cNvPr>
+          <p:cNvPicPr>
+            <a:picLocks noChangeAspect="1"/>
+          </p:cNvPicPr>
+          <p:nvPr/>
+        </p:nvPicPr>
+        <p:blipFill>
+          <a:blip r:embed="rId3"/>
+          <a:stretch>
+            <a:fillRect/>
+          </a:stretch>
+        </p:blipFill>
+        <p:spPr>
+          <a:xfrm>
+            <a:off x="7877556" y="143810"/>
+            <a:ext cx="1216152" cy="663356"/>
+          </a:xfrm>
+          <a:prstGeom prst="rect">
+            <a:avLst/>
+          </a:prstGeom>
+        </p:spPr>
+      </p:pic>
     </p:spTree>
   </p:cSld>
   <p:clrMapOvr>
@@ -11289,6 +13569,7 @@
         <a:solidFill>
           <a:srgbClr val="FFFFFF"/>
         </a:solidFill>
+        <a:effectLst/>
       </p:bgPr>
     </p:bg>
     <p:spTree>
@@ -11329,6 +13610,13 @@
             <a:prstDash val="solid"/>
           </a:ln>
         </p:spPr>
+        <p:txBody>
+          <a:bodyPr/>
+          <a:lstStyle/>
+          <a:p>
+            <a:endParaRPr lang="es-CO"/>
+          </a:p>
+        </p:txBody>
       </p:sp>
       <p:sp>
         <p:nvSpPr>
@@ -11351,11 +13639,11 @@
           <a:bodyPr wrap="square" rtlCol="0" anchor="ctr"/>
           <a:lstStyle/>
           <a:p>
-            <a:pPr indent="0" marL="0">
-              <a:buNone/>
-            </a:pPr>
-            <a:r>
-              <a:rPr lang="en-US" sz="900" b="1" spc="200" kern="0" dirty="0">
+            <a:pPr marL="0" indent="0">
+              <a:buNone/>
+            </a:pPr>
+            <a:r>
+              <a:rPr lang="en-US" sz="900" b="1" kern="0" spc="200" dirty="0">
                 <a:solidFill>
                   <a:srgbClr val="F97316"/>
                 </a:solidFill>
@@ -11369,29 +13657,6 @@
           </a:p>
         </p:txBody>
       </p:sp>
-      <p:pic>
-        <p:nvPicPr>
-          <p:cNvPr id="4" name="Image 0" descr="C:\Users\cesar\OneDrive\Escritorio\FREELANCE\SpotU\docs\assets\logo-horizontal.png">    </p:cNvPr>
-          <p:cNvPicPr>
-            <a:picLocks noChangeAspect="1"/>
-          </p:cNvPicPr>
-          <p:nvPr/>
-        </p:nvPicPr>
-        <p:blipFill>
-          <a:blip r:embed="rId1"/>
-          <a:srcRect l="0" r="0" t="0" b="0"/>
-          <a:stretch/>
-        </p:blipFill>
-        <p:spPr>
-          <a:xfrm>
-            <a:off x="7315200" y="292608"/>
-            <a:ext cx="1371600" cy="384048"/>
-          </a:xfrm>
-          <a:prstGeom prst="rect">
-            <a:avLst/>
-          </a:prstGeom>
-        </p:spPr>
-      </p:pic>
       <p:sp>
         <p:nvSpPr>
           <p:cNvPr id="5" name="Text 2"/>
@@ -11413,7 +13678,7 @@
           <a:bodyPr wrap="square" rtlCol="0" anchor="ctr"/>
           <a:lstStyle/>
           <a:p>
-            <a:pPr indent="0" marL="0">
+            <a:pPr marL="0" indent="0">
               <a:buNone/>
             </a:pPr>
             <a:r>
@@ -11453,6 +13718,13 @@
             <a:prstDash val="solid"/>
           </a:ln>
         </p:spPr>
+        <p:txBody>
+          <a:bodyPr/>
+          <a:lstStyle/>
+          <a:p>
+            <a:endParaRPr lang="es-CO"/>
+          </a:p>
+        </p:txBody>
       </p:sp>
       <p:sp>
         <p:nvSpPr>
@@ -11478,6 +13750,13 @@
             <a:prstDash val="solid"/>
           </a:ln>
         </p:spPr>
+        <p:txBody>
+          <a:bodyPr/>
+          <a:lstStyle/>
+          <a:p>
+            <a:endParaRPr lang="es-CO"/>
+          </a:p>
+        </p:txBody>
       </p:sp>
       <p:sp>
         <p:nvSpPr>
@@ -11500,11 +13779,11 @@
           <a:bodyPr wrap="square" rtlCol="0" anchor="ctr"/>
           <a:lstStyle/>
           <a:p>
-            <a:pPr algn="l" indent="0" marL="0">
-              <a:buNone/>
-            </a:pPr>
-            <a:r>
-              <a:rPr lang="en-US" sz="900" b="1" spc="100" kern="0" dirty="0">
+            <a:pPr marL="0" indent="0" algn="l">
+              <a:buNone/>
+            </a:pPr>
+            <a:r>
+              <a:rPr lang="en-US" sz="900" b="1" kern="0" spc="100" dirty="0">
                 <a:solidFill>
                   <a:srgbClr val="FFFFFF"/>
                 </a:solidFill>
@@ -11539,11 +13818,11 @@
           <a:bodyPr wrap="square" rtlCol="0" anchor="ctr"/>
           <a:lstStyle/>
           <a:p>
-            <a:pPr algn="ctr" indent="0" marL="0">
-              <a:buNone/>
-            </a:pPr>
-            <a:r>
-              <a:rPr lang="en-US" sz="900" b="1" spc="100" kern="0" dirty="0">
+            <a:pPr marL="0" indent="0" algn="ctr">
+              <a:buNone/>
+            </a:pPr>
+            <a:r>
+              <a:rPr lang="en-US" sz="900" b="1" kern="0" spc="100" dirty="0">
                 <a:solidFill>
                   <a:srgbClr val="C7D2FE"/>
                 </a:solidFill>
@@ -11578,11 +13857,11 @@
           <a:bodyPr wrap="square" rtlCol="0" anchor="ctr"/>
           <a:lstStyle/>
           <a:p>
-            <a:pPr algn="ctr" indent="0" marL="0">
-              <a:buNone/>
-            </a:pPr>
-            <a:r>
-              <a:rPr lang="en-US" sz="900" b="1" spc="100" kern="0" dirty="0">
+            <a:pPr marL="0" indent="0" algn="ctr">
+              <a:buNone/>
+            </a:pPr>
+            <a:r>
+              <a:rPr lang="en-US" sz="900" b="1" kern="0" spc="100" dirty="0">
                 <a:solidFill>
                   <a:srgbClr val="FFFFFF"/>
                 </a:solidFill>
@@ -11595,11 +13874,11 @@
             <a:endParaRPr lang="en-US" sz="900" dirty="0"/>
           </a:p>
           <a:p>
-            <a:pPr algn="ctr" indent="0" marL="0">
-              <a:buNone/>
-            </a:pPr>
-            <a:r>
-              <a:rPr lang="en-US" sz="900" b="1" spc="100" kern="0" dirty="0">
+            <a:pPr marL="0" indent="0" algn="ctr">
+              <a:buNone/>
+            </a:pPr>
+            <a:r>
+              <a:rPr lang="en-US" sz="900" b="1" kern="0" spc="100" dirty="0">
                 <a:solidFill>
                   <a:srgbClr val="FFFFFF"/>
                 </a:solidFill>
@@ -11634,11 +13913,11 @@
           <a:bodyPr wrap="square" rtlCol="0" anchor="ctr"/>
           <a:lstStyle/>
           <a:p>
-            <a:pPr algn="ctr" indent="0" marL="0">
-              <a:buNone/>
-            </a:pPr>
-            <a:r>
-              <a:rPr lang="en-US" sz="900" b="1" spc="100" kern="0" dirty="0">
+            <a:pPr marL="0" indent="0" algn="ctr">
+              <a:buNone/>
+            </a:pPr>
+            <a:r>
+              <a:rPr lang="en-US" sz="900" b="1" kern="0" spc="100" dirty="0">
                 <a:solidFill>
                   <a:srgbClr val="FFFFFF"/>
                 </a:solidFill>
@@ -11651,11 +13930,11 @@
             <a:endParaRPr lang="en-US" sz="900" dirty="0"/>
           </a:p>
           <a:p>
-            <a:pPr algn="ctr" indent="0" marL="0">
-              <a:buNone/>
-            </a:pPr>
-            <a:r>
-              <a:rPr lang="en-US" sz="900" b="1" spc="100" kern="0" dirty="0">
+            <a:pPr marL="0" indent="0" algn="ctr">
+              <a:buNone/>
+            </a:pPr>
+            <a:r>
+              <a:rPr lang="en-US" sz="900" b="1" kern="0" spc="100" dirty="0">
                 <a:solidFill>
                   <a:srgbClr val="FFFFFF"/>
                 </a:solidFill>
@@ -11690,11 +13969,11 @@
           <a:bodyPr wrap="square" rtlCol="0" anchor="ctr"/>
           <a:lstStyle/>
           <a:p>
-            <a:pPr algn="ctr" indent="0" marL="0">
-              <a:buNone/>
-            </a:pPr>
-            <a:r>
-              <a:rPr lang="en-US" sz="900" b="1" spc="100" kern="0" dirty="0">
+            <a:pPr marL="0" indent="0" algn="ctr">
+              <a:buNone/>
+            </a:pPr>
+            <a:r>
+              <a:rPr lang="en-US" sz="900" b="1" kern="0" spc="100" dirty="0">
                 <a:solidFill>
                   <a:srgbClr val="FFFFFF"/>
                 </a:solidFill>
@@ -11707,11 +13986,11 @@
             <a:endParaRPr lang="en-US" sz="900" dirty="0"/>
           </a:p>
           <a:p>
-            <a:pPr algn="ctr" indent="0" marL="0">
-              <a:buNone/>
-            </a:pPr>
-            <a:r>
-              <a:rPr lang="en-US" sz="900" b="1" spc="100" kern="0" dirty="0">
+            <a:pPr marL="0" indent="0" algn="ctr">
+              <a:buNone/>
+            </a:pPr>
+            <a:r>
+              <a:rPr lang="en-US" sz="900" b="1" kern="0" spc="100" dirty="0">
                 <a:solidFill>
                   <a:srgbClr val="FFFFFF"/>
                 </a:solidFill>
@@ -11749,6 +14028,13 @@
             <a:prstDash val="solid"/>
           </a:ln>
         </p:spPr>
+        <p:txBody>
+          <a:bodyPr/>
+          <a:lstStyle/>
+          <a:p>
+            <a:endParaRPr lang="es-CO"/>
+          </a:p>
+        </p:txBody>
       </p:sp>
       <p:sp>
         <p:nvSpPr>
@@ -11771,7 +14057,7 @@
           <a:bodyPr wrap="square" rtlCol="0" anchor="ctr"/>
           <a:lstStyle/>
           <a:p>
-            <a:pPr algn="l" indent="0" marL="0">
+            <a:pPr marL="0" indent="0" algn="l">
               <a:buNone/>
             </a:pPr>
             <a:r>
@@ -11810,7 +14096,7 @@
           <a:bodyPr wrap="square" rtlCol="0" anchor="ctr"/>
           <a:lstStyle/>
           <a:p>
-            <a:pPr algn="ctr" indent="0" marL="0">
+            <a:pPr marL="0" indent="0" algn="ctr">
               <a:buNone/>
             </a:pPr>
             <a:r>
@@ -11849,7 +14135,7 @@
           <a:bodyPr wrap="square" rtlCol="0" anchor="ctr"/>
           <a:lstStyle/>
           <a:p>
-            <a:pPr algn="ctr" indent="0" marL="0">
+            <a:pPr marL="0" indent="0" algn="ctr">
               <a:buNone/>
             </a:pPr>
             <a:r>
@@ -11888,7 +14174,7 @@
           <a:bodyPr wrap="square" rtlCol="0" anchor="ctr"/>
           <a:lstStyle/>
           <a:p>
-            <a:pPr algn="ctr" indent="0" marL="0">
+            <a:pPr marL="0" indent="0" algn="ctr">
               <a:buNone/>
             </a:pPr>
             <a:r>
@@ -11927,7 +14213,7 @@
           <a:bodyPr wrap="square" rtlCol="0" anchor="ctr"/>
           <a:lstStyle/>
           <a:p>
-            <a:pPr algn="ctr" indent="0" marL="0">
+            <a:pPr marL="0" indent="0" algn="ctr">
               <a:buNone/>
             </a:pPr>
             <a:r>
@@ -11969,6 +14255,13 @@
             <a:prstDash val="solid"/>
           </a:ln>
         </p:spPr>
+        <p:txBody>
+          <a:bodyPr/>
+          <a:lstStyle/>
+          <a:p>
+            <a:endParaRPr lang="es-CO"/>
+          </a:p>
+        </p:txBody>
       </p:sp>
       <p:sp>
         <p:nvSpPr>
@@ -11991,7 +14284,7 @@
           <a:bodyPr wrap="square" rtlCol="0" anchor="ctr"/>
           <a:lstStyle/>
           <a:p>
-            <a:pPr algn="l" indent="0" marL="0">
+            <a:pPr marL="0" indent="0" algn="l">
               <a:buNone/>
             </a:pPr>
             <a:r>
@@ -12030,7 +14323,7 @@
           <a:bodyPr wrap="square" rtlCol="0" anchor="ctr"/>
           <a:lstStyle/>
           <a:p>
-            <a:pPr algn="ctr" indent="0" marL="0">
+            <a:pPr marL="0" indent="0" algn="ctr">
               <a:buNone/>
             </a:pPr>
             <a:r>
@@ -12069,7 +14362,7 @@
           <a:bodyPr wrap="square" rtlCol="0" anchor="ctr"/>
           <a:lstStyle/>
           <a:p>
-            <a:pPr algn="ctr" indent="0" marL="0">
+            <a:pPr marL="0" indent="0" algn="ctr">
               <a:buNone/>
             </a:pPr>
             <a:r>
@@ -12108,7 +14401,7 @@
           <a:bodyPr wrap="square" rtlCol="0" anchor="ctr"/>
           <a:lstStyle/>
           <a:p>
-            <a:pPr algn="ctr" indent="0" marL="0">
+            <a:pPr marL="0" indent="0" algn="ctr">
               <a:buNone/>
             </a:pPr>
             <a:r>
@@ -12147,7 +14440,7 @@
           <a:bodyPr wrap="square" rtlCol="0" anchor="ctr"/>
           <a:lstStyle/>
           <a:p>
-            <a:pPr algn="ctr" indent="0" marL="0">
+            <a:pPr marL="0" indent="0" algn="ctr">
               <a:buNone/>
             </a:pPr>
             <a:r>
@@ -12189,6 +14482,13 @@
             <a:prstDash val="solid"/>
           </a:ln>
         </p:spPr>
+        <p:txBody>
+          <a:bodyPr/>
+          <a:lstStyle/>
+          <a:p>
+            <a:endParaRPr lang="es-CO"/>
+          </a:p>
+        </p:txBody>
       </p:sp>
       <p:sp>
         <p:nvSpPr>
@@ -12211,7 +14511,7 @@
           <a:bodyPr wrap="square" rtlCol="0" anchor="ctr"/>
           <a:lstStyle/>
           <a:p>
-            <a:pPr algn="l" indent="0" marL="0">
+            <a:pPr marL="0" indent="0" algn="l">
               <a:buNone/>
             </a:pPr>
             <a:r>
@@ -12250,7 +14550,7 @@
           <a:bodyPr wrap="square" rtlCol="0" anchor="ctr"/>
           <a:lstStyle/>
           <a:p>
-            <a:pPr algn="ctr" indent="0" marL="0">
+            <a:pPr marL="0" indent="0" algn="ctr">
               <a:buNone/>
             </a:pPr>
             <a:r>
@@ -12289,7 +14589,7 @@
           <a:bodyPr wrap="square" rtlCol="0" anchor="ctr"/>
           <a:lstStyle/>
           <a:p>
-            <a:pPr algn="ctr" indent="0" marL="0">
+            <a:pPr marL="0" indent="0" algn="ctr">
               <a:buNone/>
             </a:pPr>
             <a:r>
@@ -12328,7 +14628,7 @@
           <a:bodyPr wrap="square" rtlCol="0" anchor="ctr"/>
           <a:lstStyle/>
           <a:p>
-            <a:pPr algn="ctr" indent="0" marL="0">
+            <a:pPr marL="0" indent="0" algn="ctr">
               <a:buNone/>
             </a:pPr>
             <a:r>
@@ -12367,7 +14667,7 @@
           <a:bodyPr wrap="square" rtlCol="0" anchor="ctr"/>
           <a:lstStyle/>
           <a:p>
-            <a:pPr algn="ctr" indent="0" marL="0">
+            <a:pPr marL="0" indent="0" algn="ctr">
               <a:buNone/>
             </a:pPr>
             <a:r>
@@ -12409,6 +14709,13 @@
             <a:prstDash val="solid"/>
           </a:ln>
         </p:spPr>
+        <p:txBody>
+          <a:bodyPr/>
+          <a:lstStyle/>
+          <a:p>
+            <a:endParaRPr lang="es-CO"/>
+          </a:p>
+        </p:txBody>
       </p:sp>
       <p:sp>
         <p:nvSpPr>
@@ -12431,7 +14738,7 @@
           <a:bodyPr wrap="square" rtlCol="0" anchor="ctr"/>
           <a:lstStyle/>
           <a:p>
-            <a:pPr algn="l" indent="0" marL="0">
+            <a:pPr marL="0" indent="0" algn="l">
               <a:buNone/>
             </a:pPr>
             <a:r>
@@ -12470,7 +14777,7 @@
           <a:bodyPr wrap="square" rtlCol="0" anchor="ctr"/>
           <a:lstStyle/>
           <a:p>
-            <a:pPr algn="ctr" indent="0" marL="0">
+            <a:pPr marL="0" indent="0" algn="ctr">
               <a:buNone/>
             </a:pPr>
             <a:r>
@@ -12509,7 +14816,7 @@
           <a:bodyPr wrap="square" rtlCol="0" anchor="ctr"/>
           <a:lstStyle/>
           <a:p>
-            <a:pPr algn="ctr" indent="0" marL="0">
+            <a:pPr marL="0" indent="0" algn="ctr">
               <a:buNone/>
             </a:pPr>
             <a:r>
@@ -12548,7 +14855,7 @@
           <a:bodyPr wrap="square" rtlCol="0" anchor="ctr"/>
           <a:lstStyle/>
           <a:p>
-            <a:pPr algn="ctr" indent="0" marL="0">
+            <a:pPr marL="0" indent="0" algn="ctr">
               <a:buNone/>
             </a:pPr>
             <a:r>
@@ -12587,7 +14894,7 @@
           <a:bodyPr wrap="square" rtlCol="0" anchor="ctr"/>
           <a:lstStyle/>
           <a:p>
-            <a:pPr algn="ctr" indent="0" marL="0">
+            <a:pPr marL="0" indent="0" algn="ctr">
               <a:buNone/>
             </a:pPr>
             <a:r>
@@ -12629,6 +14936,13 @@
             <a:prstDash val="solid"/>
           </a:ln>
         </p:spPr>
+        <p:txBody>
+          <a:bodyPr/>
+          <a:lstStyle/>
+          <a:p>
+            <a:endParaRPr lang="es-CO"/>
+          </a:p>
+        </p:txBody>
       </p:sp>
       <p:sp>
         <p:nvSpPr>
@@ -12651,7 +14965,7 @@
           <a:bodyPr wrap="square" rtlCol="0" anchor="ctr"/>
           <a:lstStyle/>
           <a:p>
-            <a:pPr algn="l" indent="0" marL="0">
+            <a:pPr marL="0" indent="0" algn="l">
               <a:buNone/>
             </a:pPr>
             <a:r>
@@ -12690,7 +15004,7 @@
           <a:bodyPr wrap="square" rtlCol="0" anchor="ctr"/>
           <a:lstStyle/>
           <a:p>
-            <a:pPr algn="ctr" indent="0" marL="0">
+            <a:pPr marL="0" indent="0" algn="ctr">
               <a:buNone/>
             </a:pPr>
             <a:r>
@@ -12729,7 +15043,7 @@
           <a:bodyPr wrap="square" rtlCol="0" anchor="ctr"/>
           <a:lstStyle/>
           <a:p>
-            <a:pPr algn="ctr" indent="0" marL="0">
+            <a:pPr marL="0" indent="0" algn="ctr">
               <a:buNone/>
             </a:pPr>
             <a:r>
@@ -12768,7 +15082,7 @@
           <a:bodyPr wrap="square" rtlCol="0" anchor="ctr"/>
           <a:lstStyle/>
           <a:p>
-            <a:pPr algn="ctr" indent="0" marL="0">
+            <a:pPr marL="0" indent="0" algn="ctr">
               <a:buNone/>
             </a:pPr>
             <a:r>
@@ -12807,7 +15121,7 @@
           <a:bodyPr wrap="square" rtlCol="0" anchor="ctr"/>
           <a:lstStyle/>
           <a:p>
-            <a:pPr algn="ctr" indent="0" marL="0">
+            <a:pPr marL="0" indent="0" algn="ctr">
               <a:buNone/>
             </a:pPr>
             <a:r>
@@ -12849,6 +15163,13 @@
             <a:prstDash val="solid"/>
           </a:ln>
         </p:spPr>
+        <p:txBody>
+          <a:bodyPr/>
+          <a:lstStyle/>
+          <a:p>
+            <a:endParaRPr lang="es-CO"/>
+          </a:p>
+        </p:txBody>
       </p:sp>
       <p:sp>
         <p:nvSpPr>
@@ -12871,7 +15192,7 @@
           <a:bodyPr wrap="square" rtlCol="0" anchor="ctr"/>
           <a:lstStyle/>
           <a:p>
-            <a:pPr algn="l" indent="0" marL="0">
+            <a:pPr marL="0" indent="0" algn="l">
               <a:buNone/>
             </a:pPr>
             <a:r>
@@ -12910,7 +15231,7 @@
           <a:bodyPr wrap="square" rtlCol="0" anchor="ctr"/>
           <a:lstStyle/>
           <a:p>
-            <a:pPr algn="ctr" indent="0" marL="0">
+            <a:pPr marL="0" indent="0" algn="ctr">
               <a:buNone/>
             </a:pPr>
             <a:r>
@@ -12949,7 +15270,7 @@
           <a:bodyPr wrap="square" rtlCol="0" anchor="ctr"/>
           <a:lstStyle/>
           <a:p>
-            <a:pPr algn="ctr" indent="0" marL="0">
+            <a:pPr marL="0" indent="0" algn="ctr">
               <a:buNone/>
             </a:pPr>
             <a:r>
@@ -12988,7 +15309,7 @@
           <a:bodyPr wrap="square" rtlCol="0" anchor="ctr"/>
           <a:lstStyle/>
           <a:p>
-            <a:pPr algn="ctr" indent="0" marL="0">
+            <a:pPr marL="0" indent="0" algn="ctr">
               <a:buNone/>
             </a:pPr>
             <a:r>
@@ -13027,7 +15348,7 @@
           <a:bodyPr wrap="square" rtlCol="0" anchor="ctr"/>
           <a:lstStyle/>
           <a:p>
-            <a:pPr algn="ctr" indent="0" marL="0">
+            <a:pPr marL="0" indent="0" algn="ctr">
               <a:buNone/>
             </a:pPr>
             <a:r>
@@ -13066,7 +15387,7 @@
           <a:bodyPr wrap="square" rtlCol="0" anchor="ctr"/>
           <a:lstStyle/>
           <a:p>
-            <a:pPr algn="ctr" indent="0" marL="0">
+            <a:pPr marL="0" indent="0" algn="ctr">
               <a:buNone/>
             </a:pPr>
             <a:r>
@@ -13084,6 +15405,36 @@
           </a:p>
         </p:txBody>
       </p:sp>
+      <p:pic>
+        <p:nvPicPr>
+          <p:cNvPr id="51" name="Imagen 50">
+            <a:extLst>
+              <a:ext uri="{FF2B5EF4-FFF2-40B4-BE49-F238E27FC236}">
+                <a16:creationId xmlns:a16="http://schemas.microsoft.com/office/drawing/2014/main" id="{FFF9E574-0402-E31F-710C-0F0467BFB188}"/>
+              </a:ext>
+            </a:extLst>
+          </p:cNvPr>
+          <p:cNvPicPr>
+            <a:picLocks noChangeAspect="1"/>
+          </p:cNvPicPr>
+          <p:nvPr/>
+        </p:nvPicPr>
+        <p:blipFill>
+          <a:blip r:embed="rId3"/>
+          <a:stretch>
+            <a:fillRect/>
+          </a:stretch>
+        </p:blipFill>
+        <p:spPr>
+          <a:xfrm>
+            <a:off x="7877556" y="143810"/>
+            <a:ext cx="1216152" cy="663356"/>
+          </a:xfrm>
+          <a:prstGeom prst="rect">
+            <a:avLst/>
+          </a:prstGeom>
+        </p:spPr>
+      </p:pic>
     </p:spTree>
   </p:cSld>
   <p:clrMapOvr>
@@ -13385,4 +15736,319 @@
     </a:ext>
   </a:extLst>
 </a:theme>
+</file>
+
+<file path=ppt/theme/theme2.xml><?xml version="1.0" encoding="utf-8"?>
+<a:theme xmlns:a="http://schemas.openxmlformats.org/drawingml/2006/main" name="Tema de Office">
+  <a:themeElements>
+    <a:clrScheme name="Office">
+      <a:dk1>
+        <a:sysClr val="windowText" lastClr="000000"/>
+      </a:dk1>
+      <a:lt1>
+        <a:sysClr val="window" lastClr="FFFFFF"/>
+      </a:lt1>
+      <a:dk2>
+        <a:srgbClr val="0E2841"/>
+      </a:dk2>
+      <a:lt2>
+        <a:srgbClr val="E8E8E8"/>
+      </a:lt2>
+      <a:accent1>
+        <a:srgbClr val="156082"/>
+      </a:accent1>
+      <a:accent2>
+        <a:srgbClr val="E97132"/>
+      </a:accent2>
+      <a:accent3>
+        <a:srgbClr val="196B24"/>
+      </a:accent3>
+      <a:accent4>
+        <a:srgbClr val="0F9ED5"/>
+      </a:accent4>
+      <a:accent5>
+        <a:srgbClr val="A02B93"/>
+      </a:accent5>
+      <a:accent6>
+        <a:srgbClr val="4EA72E"/>
+      </a:accent6>
+      <a:hlink>
+        <a:srgbClr val="467886"/>
+      </a:hlink>
+      <a:folHlink>
+        <a:srgbClr val="96607D"/>
+      </a:folHlink>
+    </a:clrScheme>
+    <a:fontScheme name="Office">
+      <a:majorFont>
+        <a:latin typeface="Aptos Display" panose="02110004020202020204"/>
+        <a:ea typeface=""/>
+        <a:cs typeface=""/>
+        <a:font script="Jpan" typeface="游ゴシック Light"/>
+        <a:font script="Hang" typeface="맑은 고딕"/>
+        <a:font script="Hans" typeface="等线 Light"/>
+        <a:font script="Hant" typeface="新細明體"/>
+        <a:font script="Arab" typeface="Times New Roman"/>
+        <a:font script="Hebr" typeface="Times New Roman"/>
+        <a:font script="Thai" typeface="Angsana New"/>
+        <a:font script="Ethi" typeface="Nyala"/>
+        <a:font script="Beng" typeface="Vrinda"/>
+        <a:font script="Gujr" typeface="Shruti"/>
+        <a:font script="Khmr" typeface="MoolBoran"/>
+        <a:font script="Knda" typeface="Tunga"/>
+        <a:font script="Guru" typeface="Raavi"/>
+        <a:font script="Cans" typeface="Euphemia"/>
+        <a:font script="Cher" typeface="Plantagenet Cherokee"/>
+        <a:font script="Yiii" typeface="Microsoft Yi Baiti"/>
+        <a:font script="Tibt" typeface="Microsoft Himalaya"/>
+        <a:font script="Thaa" typeface="MV Boli"/>
+        <a:font script="Deva" typeface="Mangal"/>
+        <a:font script="Telu" typeface="Gautami"/>
+        <a:font script="Taml" typeface="Latha"/>
+        <a:font script="Syrc" typeface="Estrangelo Edessa"/>
+        <a:font script="Orya" typeface="Kalinga"/>
+        <a:font script="Mlym" typeface="Kartika"/>
+        <a:font script="Laoo" typeface="DokChampa"/>
+        <a:font script="Sinh" typeface="Iskoola Pota"/>
+        <a:font script="Mong" typeface="Mongolian Baiti"/>
+        <a:font script="Viet" typeface="Times New Roman"/>
+        <a:font script="Uigh" typeface="Microsoft Uighur"/>
+        <a:font script="Geor" typeface="Sylfaen"/>
+        <a:font script="Armn" typeface="Arial"/>
+        <a:font script="Bugi" typeface="Leelawadee UI"/>
+        <a:font script="Bopo" typeface="Microsoft JhengHei"/>
+        <a:font script="Java" typeface="Javanese Text"/>
+        <a:font script="Lisu" typeface="Segoe UI"/>
+        <a:font script="Mymr" typeface="Myanmar Text"/>
+        <a:font script="Nkoo" typeface="Ebrima"/>
+        <a:font script="Olck" typeface="Nirmala UI"/>
+        <a:font script="Osma" typeface="Ebrima"/>
+        <a:font script="Phag" typeface="Phagspa"/>
+        <a:font script="Syrn" typeface="Estrangelo Edessa"/>
+        <a:font script="Syrj" typeface="Estrangelo Edessa"/>
+        <a:font script="Syre" typeface="Estrangelo Edessa"/>
+        <a:font script="Sora" typeface="Nirmala UI"/>
+        <a:font script="Tale" typeface="Microsoft Tai Le"/>
+        <a:font script="Talu" typeface="Microsoft New Tai Lue"/>
+        <a:font script="Tfng" typeface="Ebrima"/>
+      </a:majorFont>
+      <a:minorFont>
+        <a:latin typeface="Aptos" panose="02110004020202020204"/>
+        <a:ea typeface=""/>
+        <a:cs typeface=""/>
+        <a:font script="Jpan" typeface="游ゴシック"/>
+        <a:font script="Hang" typeface="맑은 고딕"/>
+        <a:font script="Hans" typeface="等线"/>
+        <a:font script="Hant" typeface="新細明體"/>
+        <a:font script="Arab" typeface="Arial"/>
+        <a:font script="Hebr" typeface="Arial"/>
+        <a:font script="Thai" typeface="Cordia New"/>
+        <a:font script="Ethi" typeface="Nyala"/>
+        <a:font script="Beng" typeface="Vrinda"/>
+        <a:font script="Gujr" typeface="Shruti"/>
+        <a:font script="Khmr" typeface="DaunPenh"/>
+        <a:font script="Knda" typeface="Tunga"/>
+        <a:font script="Guru" typeface="Raavi"/>
+        <a:font script="Cans" typeface="Euphemia"/>
+        <a:font script="Cher" typeface="Plantagenet Cherokee"/>
+        <a:font script="Yiii" typeface="Microsoft Yi Baiti"/>
+        <a:font script="Tibt" typeface="Microsoft Himalaya"/>
+        <a:font script="Thaa" typeface="MV Boli"/>
+        <a:font script="Deva" typeface="Mangal"/>
+        <a:font script="Telu" typeface="Gautami"/>
+        <a:font script="Taml" typeface="Latha"/>
+        <a:font script="Syrc" typeface="Estrangelo Edessa"/>
+        <a:font script="Orya" typeface="Kalinga"/>
+        <a:font script="Mlym" typeface="Kartika"/>
+        <a:font script="Laoo" typeface="DokChampa"/>
+        <a:font script="Sinh" typeface="Iskoola Pota"/>
+        <a:font script="Mong" typeface="Mongolian Baiti"/>
+        <a:font script="Viet" typeface="Arial"/>
+        <a:font script="Uigh" typeface="Microsoft Uighur"/>
+        <a:font script="Geor" typeface="Sylfaen"/>
+        <a:font script="Armn" typeface="Arial"/>
+        <a:font script="Bugi" typeface="Leelawadee UI"/>
+        <a:font script="Bopo" typeface="Microsoft JhengHei"/>
+        <a:font script="Java" typeface="Javanese Text"/>
+        <a:font script="Lisu" typeface="Segoe UI"/>
+        <a:font script="Mymr" typeface="Myanmar Text"/>
+        <a:font script="Nkoo" typeface="Ebrima"/>
+        <a:font script="Olck" typeface="Nirmala UI"/>
+        <a:font script="Osma" typeface="Ebrima"/>
+        <a:font script="Phag" typeface="Phagspa"/>
+        <a:font script="Syrn" typeface="Estrangelo Edessa"/>
+        <a:font script="Syrj" typeface="Estrangelo Edessa"/>
+        <a:font script="Syre" typeface="Estrangelo Edessa"/>
+        <a:font script="Sora" typeface="Nirmala UI"/>
+        <a:font script="Tale" typeface="Microsoft Tai Le"/>
+        <a:font script="Talu" typeface="Microsoft New Tai Lue"/>
+        <a:font script="Tfng" typeface="Ebrima"/>
+      </a:minorFont>
+    </a:fontScheme>
+    <a:fmtScheme name="Office">
+      <a:fillStyleLst>
+        <a:solidFill>
+          <a:schemeClr val="phClr"/>
+        </a:solidFill>
+        <a:gradFill rotWithShape="1">
+          <a:gsLst>
+            <a:gs pos="0">
+              <a:schemeClr val="phClr">
+                <a:lumMod val="110000"/>
+                <a:satMod val="105000"/>
+                <a:tint val="67000"/>
+              </a:schemeClr>
+            </a:gs>
+            <a:gs pos="50000">
+              <a:schemeClr val="phClr">
+                <a:lumMod val="105000"/>
+                <a:satMod val="103000"/>
+                <a:tint val="73000"/>
+              </a:schemeClr>
+            </a:gs>
+            <a:gs pos="100000">
+              <a:schemeClr val="phClr">
+                <a:lumMod val="105000"/>
+                <a:satMod val="109000"/>
+                <a:tint val="81000"/>
+              </a:schemeClr>
+            </a:gs>
+          </a:gsLst>
+          <a:lin ang="5400000" scaled="0"/>
+        </a:gradFill>
+        <a:gradFill rotWithShape="1">
+          <a:gsLst>
+            <a:gs pos="0">
+              <a:schemeClr val="phClr">
+                <a:satMod val="103000"/>
+                <a:lumMod val="102000"/>
+                <a:tint val="94000"/>
+              </a:schemeClr>
+            </a:gs>
+            <a:gs pos="50000">
+              <a:schemeClr val="phClr">
+                <a:satMod val="110000"/>
+                <a:lumMod val="100000"/>
+                <a:shade val="100000"/>
+              </a:schemeClr>
+            </a:gs>
+            <a:gs pos="100000">
+              <a:schemeClr val="phClr">
+                <a:lumMod val="99000"/>
+                <a:satMod val="120000"/>
+                <a:shade val="78000"/>
+              </a:schemeClr>
+            </a:gs>
+          </a:gsLst>
+          <a:lin ang="5400000" scaled="0"/>
+        </a:gradFill>
+      </a:fillStyleLst>
+      <a:lnStyleLst>
+        <a:ln w="12700" cap="flat" cmpd="sng" algn="ctr">
+          <a:solidFill>
+            <a:schemeClr val="phClr"/>
+          </a:solidFill>
+          <a:prstDash val="solid"/>
+          <a:miter lim="800000"/>
+        </a:ln>
+        <a:ln w="19050" cap="flat" cmpd="sng" algn="ctr">
+          <a:solidFill>
+            <a:schemeClr val="phClr"/>
+          </a:solidFill>
+          <a:prstDash val="solid"/>
+          <a:miter lim="800000"/>
+        </a:ln>
+        <a:ln w="25400" cap="flat" cmpd="sng" algn="ctr">
+          <a:solidFill>
+            <a:schemeClr val="phClr"/>
+          </a:solidFill>
+          <a:prstDash val="solid"/>
+          <a:miter lim="800000"/>
+        </a:ln>
+      </a:lnStyleLst>
+      <a:effectStyleLst>
+        <a:effectStyle>
+          <a:effectLst/>
+        </a:effectStyle>
+        <a:effectStyle>
+          <a:effectLst/>
+        </a:effectStyle>
+        <a:effectStyle>
+          <a:effectLst>
+            <a:outerShdw blurRad="57150" dist="19050" dir="5400000" algn="ctr" rotWithShape="0">
+              <a:srgbClr val="000000">
+                <a:alpha val="63000"/>
+              </a:srgbClr>
+            </a:outerShdw>
+          </a:effectLst>
+        </a:effectStyle>
+      </a:effectStyleLst>
+      <a:bgFillStyleLst>
+        <a:solidFill>
+          <a:schemeClr val="phClr"/>
+        </a:solidFill>
+        <a:solidFill>
+          <a:schemeClr val="phClr">
+            <a:tint val="95000"/>
+            <a:satMod val="170000"/>
+          </a:schemeClr>
+        </a:solidFill>
+        <a:gradFill rotWithShape="1">
+          <a:gsLst>
+            <a:gs pos="0">
+              <a:schemeClr val="phClr">
+                <a:tint val="93000"/>
+                <a:satMod val="150000"/>
+                <a:shade val="98000"/>
+                <a:lumMod val="102000"/>
+              </a:schemeClr>
+            </a:gs>
+            <a:gs pos="50000">
+              <a:schemeClr val="phClr">
+                <a:tint val="98000"/>
+                <a:satMod val="130000"/>
+                <a:shade val="90000"/>
+                <a:lumMod val="103000"/>
+              </a:schemeClr>
+            </a:gs>
+            <a:gs pos="100000">
+              <a:schemeClr val="phClr">
+                <a:shade val="63000"/>
+                <a:satMod val="120000"/>
+              </a:schemeClr>
+            </a:gs>
+          </a:gsLst>
+          <a:lin ang="5400000" scaled="0"/>
+        </a:gradFill>
+      </a:bgFillStyleLst>
+    </a:fmtScheme>
+  </a:themeElements>
+  <a:objectDefaults>
+    <a:lnDef>
+      <a:spPr/>
+      <a:bodyPr/>
+      <a:lstStyle/>
+      <a:style>
+        <a:lnRef idx="2">
+          <a:schemeClr val="accent1"/>
+        </a:lnRef>
+        <a:fillRef idx="0">
+          <a:schemeClr val="accent1"/>
+        </a:fillRef>
+        <a:effectRef idx="1">
+          <a:schemeClr val="accent1"/>
+        </a:effectRef>
+        <a:fontRef idx="minor">
+          <a:schemeClr val="tx1"/>
+        </a:fontRef>
+      </a:style>
+    </a:lnDef>
+  </a:objectDefaults>
+  <a:extraClrSchemeLst/>
+  <a:extLst>
+    <a:ext uri="{05A4C25C-085E-4340-85A3-A5531E510DB2}">
+      <thm15:themeFamily xmlns:thm15="http://schemas.microsoft.com/office/thememl/2012/main" name="Office Theme" id="{2E142A2C-CD16-42D6-873A-C26D2A0506FA}" vid="{1BDDFF52-6CD6-40A5-AB3C-68EB2F1E4D0A}"/>
+    </a:ext>
+  </a:extLst>
+</a:theme>
 </file>